--- a/exports/pptx/lessons/middle-module-15-project-implementation/day-02-scoping.pptx
+++ b/exports/pptx/lessons/middle-module-15-project-implementation/day-02-scoping.pptx
@@ -3946,8 +3946,8 @@
         </p:nvSpPr>
         <p:spPr>
           <a:xfrm>
-            <a:off x="634901" y="3485406"/>
-            <a:ext cx="8102798" cy="281880"/>
+            <a:off x="406301" y="1254323"/>
+            <a:ext cx="8498026" cy="213271"/>
           </a:xfrm>
           <a:prstGeom prst="rect">
             <a:avLst/>
@@ -3959,46 +3959,28 @@
           <a:bodyPr wrap="square" lIns="0" tIns="0" rIns="0" bIns="0" rtlCol="0" anchor="t"/>
           <a:lstStyle/>
           <a:p>
-            <a:pPr algn="l" marL="342900" indent="-342900">
-              <a:lnSpc>
-                <a:spcPts val="1620"/>
-              </a:lnSpc>
-              <a:spcAft>
-                <a:spcPts val="300"/>
-              </a:spcAft>
-              <a:buSzPct val="100000"/>
-              <a:buChar char="•"/>
-            </a:pPr>
-            <a:r>
-              <a:rPr lang="en-US" sz="1200" b="1" dirty="0">
-                <a:solidFill>
-                  <a:srgbClr val="1C2833"/>
-                </a:solidFill>
-                <a:latin typeface="Arial" pitchFamily="34" charset="0"/>
-                <a:ea typeface="Arial" pitchFamily="34" charset="-122"/>
-                <a:cs typeface="Arial" pitchFamily="34" charset="-120"/>
-              </a:rPr>
-              <a:t>A worked example on the board.</a:t>
-            </a:r>
-            <a:pPr algn="l" indent="0" marL="0">
-              <a:lnSpc>
-                <a:spcPts val="1620"/>
-              </a:lnSpc>
-              <a:spcAft>
-                <a:spcPts val="300"/>
-              </a:spcAft>
-              <a:buNone/>
-            </a:pPr>
-            <a:r>
-              <a:rPr lang="en-US" sz="1200" dirty="0">
-                <a:solidFill>
-                  <a:srgbClr val="1C2833"/>
-                </a:solidFill>
-                <a:latin typeface="Arial" pitchFamily="34" charset="0"/>
-                <a:ea typeface="Arial" pitchFamily="34" charset="-122"/>
-                <a:cs typeface="Arial" pitchFamily="34" charset="-120"/>
-              </a:rPr>
-              <a:t> Take one project (e.g. Project 4 — herb deck) and fill in each field aloud:</a:t>
+            <a:pPr algn="l" indent="0" marL="0">
+              <a:lnSpc>
+                <a:spcPts val="1680"/>
+              </a:lnSpc>
+              <a:spcBef>
+                <a:spcPts val="300"/>
+              </a:spcBef>
+              <a:spcAft>
+                <a:spcPts val="300"/>
+              </a:spcAft>
+              <a:buNone/>
+            </a:pPr>
+            <a:r>
+              <a:rPr lang="en-US" sz="1200" i="1" dirty="0">
+                <a:solidFill>
+                  <a:srgbClr val="1C2833"/>
+                </a:solidFill>
+                <a:latin typeface="Arial" pitchFamily="34" charset="0"/>
+                <a:ea typeface="Arial" pitchFamily="34" charset="-122"/>
+                <a:cs typeface="Arial" pitchFamily="34" charset="-120"/>
+              </a:rPr>
+              <a:t>Each row: Field · What it answers.</a:t>
             </a:r>
             <a:endParaRPr lang="en-US" sz="1200" dirty="0"/>
           </a:p>
@@ -4012,8 +3994,8 @@
         </p:nvSpPr>
         <p:spPr>
           <a:xfrm>
-            <a:off x="406301" y="3856137"/>
-            <a:ext cx="8498026" cy="1502420"/>
+            <a:off x="634901" y="1556445"/>
+            <a:ext cx="8102798" cy="1744563"/>
           </a:xfrm>
           <a:prstGeom prst="rect">
             <a:avLst/>
@@ -4025,13 +4007,31 @@
           <a:bodyPr wrap="square" lIns="0" tIns="0" rIns="0" bIns="0" rtlCol="0" anchor="t"/>
           <a:lstStyle/>
           <a:p>
-            <a:pPr algn="l" indent="0" marL="0">
-              <a:lnSpc>
-                <a:spcPts val="1680"/>
-              </a:lnSpc>
-              <a:spcBef>
-                <a:spcPts val="300"/>
-              </a:spcBef>
+            <a:pPr algn="l" marL="342900" indent="-342900">
+              <a:lnSpc>
+                <a:spcPts val="1620"/>
+              </a:lnSpc>
+              <a:spcAft>
+                <a:spcPts val="300"/>
+              </a:spcAft>
+              <a:buSzPct val="100000"/>
+              <a:buChar char="•"/>
+            </a:pPr>
+            <a:r>
+              <a:rPr lang="en-US" sz="1200" b="1" dirty="0">
+                <a:solidFill>
+                  <a:srgbClr val="1C2833"/>
+                </a:solidFill>
+                <a:latin typeface="Arial" pitchFamily="34" charset="0"/>
+                <a:ea typeface="Arial" pitchFamily="34" charset="-122"/>
+                <a:cs typeface="Arial" pitchFamily="34" charset="-120"/>
+              </a:rPr>
+              <a:t>Project chosen</a:t>
+            </a:r>
+            <a:pPr algn="l" indent="0" marL="0">
+              <a:lnSpc>
+                <a:spcPts val="1620"/>
+              </a:lnSpc>
               <a:spcAft>
                 <a:spcPts val="300"/>
               </a:spcAft>
@@ -4046,38 +4046,36 @@
                 <a:ea typeface="Arial" pitchFamily="34" charset="-122"/>
                 <a:cs typeface="Arial" pitchFamily="34" charset="-120"/>
               </a:rPr>
-              <a:t>– Project chosen: Herb deck (10 herbs from my neighbourhood). – Anchor module: Module 10 — Auṣadhi. – Driving question: </a:t>
-            </a:r>
-            <a:pPr algn="l" indent="0" marL="0">
-              <a:lnSpc>
-                <a:spcPts val="1680"/>
-              </a:lnSpc>
-              <a:spcBef>
-                <a:spcPts val="300"/>
-              </a:spcBef>
-              <a:spcAft>
-                <a:spcPts val="300"/>
-              </a:spcAft>
-              <a:buNone/>
-            </a:pPr>
-            <a:r>
-              <a:rPr lang="en-US" sz="1200" i="1" dirty="0">
-                <a:solidFill>
-                  <a:srgbClr val="1C2833"/>
-                </a:solidFill>
-                <a:latin typeface="Arial" pitchFamily="34" charset="0"/>
-                <a:ea typeface="Arial" pitchFamily="34" charset="-122"/>
-                <a:cs typeface="Arial" pitchFamily="34" charset="-120"/>
-              </a:rPr>
-              <a:t>Which 10 herbs grow within 200 m of my home, and what does the tradition say about each?</a:t>
-            </a:r>
-            <a:pPr algn="l" indent="0" marL="0">
-              <a:lnSpc>
-                <a:spcPts val="1680"/>
-              </a:lnSpc>
-              <a:spcBef>
-                <a:spcPts val="300"/>
-              </a:spcBef>
+              <a:t> — Which option from the menu (or "open" with anchor module)</a:t>
+            </a:r>
+            <a:endParaRPr lang="en-US" sz="1200" dirty="0"/>
+          </a:p>
+          <a:p>
+            <a:pPr algn="l" marL="342900" indent="-342900">
+              <a:lnSpc>
+                <a:spcPts val="1620"/>
+              </a:lnSpc>
+              <a:spcAft>
+                <a:spcPts val="300"/>
+              </a:spcAft>
+              <a:buSzPct val="100000"/>
+              <a:buChar char="•"/>
+            </a:pPr>
+            <a:r>
+              <a:rPr lang="en-US" sz="1200" b="1" dirty="0">
+                <a:solidFill>
+                  <a:srgbClr val="1C2833"/>
+                </a:solidFill>
+                <a:latin typeface="Arial" pitchFamily="34" charset="0"/>
+                <a:ea typeface="Arial" pitchFamily="34" charset="-122"/>
+                <a:cs typeface="Arial" pitchFamily="34" charset="-120"/>
+              </a:rPr>
+              <a:t>Anchor module</a:t>
+            </a:r>
+            <a:pPr algn="l" indent="0" marL="0">
+              <a:lnSpc>
+                <a:spcPts val="1620"/>
+              </a:lnSpc>
               <a:spcAft>
                 <a:spcPts val="300"/>
               </a:spcAft>
@@ -4092,15 +4090,36 @@
                 <a:ea typeface="Arial" pitchFamily="34" charset="-122"/>
                 <a:cs typeface="Arial" pitchFamily="34" charset="-120"/>
               </a:rPr>
-              <a:t> – Two candidate sources: Module 10's </a:t>
-            </a:r>
-            <a:pPr algn="l" indent="0" marL="0">
-              <a:lnSpc>
-                <a:spcPts val="1680"/>
-              </a:lnSpc>
-              <a:spcBef>
-                <a:spcPts val="300"/>
-              </a:spcBef>
+              <a:t> — Which prior module's framework you'll apply</a:t>
+            </a:r>
+            <a:endParaRPr lang="en-US" sz="1200" dirty="0"/>
+          </a:p>
+          <a:p>
+            <a:pPr algn="l" marL="342900" indent="-342900">
+              <a:lnSpc>
+                <a:spcPts val="1620"/>
+              </a:lnSpc>
+              <a:spcAft>
+                <a:spcPts val="300"/>
+              </a:spcAft>
+              <a:buSzPct val="100000"/>
+              <a:buChar char="•"/>
+            </a:pPr>
+            <a:r>
+              <a:rPr lang="en-US" sz="1200" b="1" dirty="0">
+                <a:solidFill>
+                  <a:srgbClr val="1C2833"/>
+                </a:solidFill>
+                <a:latin typeface="Arial" pitchFamily="34" charset="0"/>
+                <a:ea typeface="Arial" pitchFamily="34" charset="-122"/>
+                <a:cs typeface="Arial" pitchFamily="34" charset="-120"/>
+              </a:rPr>
+              <a:t>Driving question</a:t>
+            </a:r>
+            <a:pPr algn="l" indent="0" marL="0">
+              <a:lnSpc>
+                <a:spcPts val="1620"/>
+              </a:lnSpc>
               <a:spcAft>
                 <a:spcPts val="300"/>
               </a:spcAft>
@@ -4115,15 +4134,36 @@
                 <a:ea typeface="Arial" pitchFamily="34" charset="-122"/>
                 <a:cs typeface="Arial" pitchFamily="34" charset="-120"/>
               </a:rPr>
-              <a:t>.rag-cache/</a:t>
-            </a:r>
-            <a:pPr algn="l" indent="0" marL="0">
-              <a:lnSpc>
-                <a:spcPts val="1680"/>
-              </a:lnSpc>
-              <a:spcBef>
-                <a:spcPts val="300"/>
-              </a:spcBef>
+              <a:t> — The question this project tries to answer (1 sentence)</a:t>
+            </a:r>
+            <a:endParaRPr lang="en-US" sz="1200" dirty="0"/>
+          </a:p>
+          <a:p>
+            <a:pPr algn="l" marL="342900" indent="-342900">
+              <a:lnSpc>
+                <a:spcPts val="1620"/>
+              </a:lnSpc>
+              <a:spcAft>
+                <a:spcPts val="300"/>
+              </a:spcAft>
+              <a:buSzPct val="100000"/>
+              <a:buChar char="•"/>
+            </a:pPr>
+            <a:r>
+              <a:rPr lang="en-US" sz="1200" b="1" dirty="0">
+                <a:solidFill>
+                  <a:srgbClr val="1C2833"/>
+                </a:solidFill>
+                <a:latin typeface="Arial" pitchFamily="34" charset="0"/>
+                <a:ea typeface="Arial" pitchFamily="34" charset="-122"/>
+                <a:cs typeface="Arial" pitchFamily="34" charset="-120"/>
+              </a:rPr>
+              <a:t>Two candidate sources</a:t>
+            </a:r>
+            <a:pPr algn="l" indent="0" marL="0">
+              <a:lnSpc>
+                <a:spcPts val="1620"/>
+              </a:lnSpc>
               <a:spcAft>
                 <a:spcPts val="300"/>
               </a:spcAft>
@@ -4138,38 +4178,36 @@
                 <a:ea typeface="Arial" pitchFamily="34" charset="-122"/>
                 <a:cs typeface="Arial" pitchFamily="34" charset="-120"/>
               </a:rPr>
-              <a:t> (for Ayurvedic uses); Pradip Krishen's </a:t>
-            </a:r>
-            <a:pPr algn="l" indent="0" marL="0">
-              <a:lnSpc>
-                <a:spcPts val="1680"/>
-              </a:lnSpc>
-              <a:spcBef>
-                <a:spcPts val="300"/>
-              </a:spcBef>
-              <a:spcAft>
-                <a:spcPts val="300"/>
-              </a:spcAft>
-              <a:buNone/>
-            </a:pPr>
-            <a:r>
-              <a:rPr lang="en-US" sz="1200" i="1" dirty="0">
-                <a:solidFill>
-                  <a:srgbClr val="1C2833"/>
-                </a:solidFill>
-                <a:latin typeface="Arial" pitchFamily="34" charset="0"/>
-                <a:ea typeface="Arial" pitchFamily="34" charset="-122"/>
-                <a:cs typeface="Arial" pitchFamily="34" charset="-120"/>
-              </a:rPr>
-              <a:t>Trees of Delhi</a:t>
-            </a:r>
-            <a:pPr algn="l" indent="0" marL="0">
-              <a:lnSpc>
-                <a:spcPts val="1680"/>
-              </a:lnSpc>
-              <a:spcBef>
-                <a:spcPts val="300"/>
-              </a:spcBef>
+              <a:t> — Where you'll get evidence from (one prior-module cache + one other)</a:t>
+            </a:r>
+            <a:endParaRPr lang="en-US" sz="1200" dirty="0"/>
+          </a:p>
+          <a:p>
+            <a:pPr algn="l" marL="342900" indent="-342900">
+              <a:lnSpc>
+                <a:spcPts val="1620"/>
+              </a:lnSpc>
+              <a:spcAft>
+                <a:spcPts val="300"/>
+              </a:spcAft>
+              <a:buSzPct val="100000"/>
+              <a:buChar char="•"/>
+            </a:pPr>
+            <a:r>
+              <a:rPr lang="en-US" sz="1200" b="1" dirty="0">
+                <a:solidFill>
+                  <a:srgbClr val="1C2833"/>
+                </a:solidFill>
+                <a:latin typeface="Arial" pitchFamily="34" charset="0"/>
+                <a:ea typeface="Arial" pitchFamily="34" charset="-122"/>
+                <a:cs typeface="Arial" pitchFamily="34" charset="-120"/>
+              </a:rPr>
+              <a:t>Artefact format</a:t>
+            </a:r>
+            <a:pPr algn="l" indent="0" marL="0">
+              <a:lnSpc>
+                <a:spcPts val="1620"/>
+              </a:lnSpc>
               <a:spcAft>
                 <a:spcPts val="300"/>
               </a:spcAft>
@@ -4184,7 +4222,95 @@
                 <a:ea typeface="Arial" pitchFamily="34" charset="-122"/>
                 <a:cs typeface="Arial" pitchFamily="34" charset="-120"/>
               </a:rPr>
-              <a:t> for identification (or a state forest-department field guide for your region). – Artefact format: 10 cards (postcard size), front = photo + sketch, back = Sanskrit name + English + use + part used. – Success criteria: (a) all 10 are real plants from my neighbourhood, (b) every card has a verifiable Ayurvedic note from the cache, (c) the deck is bound or stored together (not 10 loose pages). – Materials: cardstock or thick paper, glue, sketch pens, camera or phone.</a:t>
+              <a:t> — What you'll actually produce (poster / deck / report / etc.)</a:t>
+            </a:r>
+            <a:endParaRPr lang="en-US" sz="1200" dirty="0"/>
+          </a:p>
+          <a:p>
+            <a:pPr algn="l" marL="342900" indent="-342900">
+              <a:lnSpc>
+                <a:spcPts val="1620"/>
+              </a:lnSpc>
+              <a:spcAft>
+                <a:spcPts val="300"/>
+              </a:spcAft>
+              <a:buSzPct val="100000"/>
+              <a:buChar char="•"/>
+            </a:pPr>
+            <a:r>
+              <a:rPr lang="en-US" sz="1200" b="1" dirty="0">
+                <a:solidFill>
+                  <a:srgbClr val="1C2833"/>
+                </a:solidFill>
+                <a:latin typeface="Arial" pitchFamily="34" charset="0"/>
+                <a:ea typeface="Arial" pitchFamily="34" charset="-122"/>
+                <a:cs typeface="Arial" pitchFamily="34" charset="-120"/>
+              </a:rPr>
+              <a:t>Success criteria</a:t>
+            </a:r>
+            <a:pPr algn="l" indent="0" marL="0">
+              <a:lnSpc>
+                <a:spcPts val="1620"/>
+              </a:lnSpc>
+              <a:spcAft>
+                <a:spcPts val="300"/>
+              </a:spcAft>
+              <a:buNone/>
+            </a:pPr>
+            <a:r>
+              <a:rPr lang="en-US" sz="1200" dirty="0">
+                <a:solidFill>
+                  <a:srgbClr val="1C2833"/>
+                </a:solidFill>
+                <a:latin typeface="Arial" pitchFamily="34" charset="0"/>
+                <a:ea typeface="Arial" pitchFamily="34" charset="-122"/>
+                <a:cs typeface="Arial" pitchFamily="34" charset="-120"/>
+              </a:rPr>
+              <a:t> — Three things that, if present in the final, mean it worked</a:t>
+            </a:r>
+            <a:endParaRPr lang="en-US" sz="1200" dirty="0"/>
+          </a:p>
+          <a:p>
+            <a:pPr algn="l" marL="342900" indent="-342900">
+              <a:lnSpc>
+                <a:spcPts val="1620"/>
+              </a:lnSpc>
+              <a:spcAft>
+                <a:spcPts val="300"/>
+              </a:spcAft>
+              <a:buSzPct val="100000"/>
+              <a:buChar char="•"/>
+            </a:pPr>
+            <a:r>
+              <a:rPr lang="en-US" sz="1200" b="1" dirty="0">
+                <a:solidFill>
+                  <a:srgbClr val="1C2833"/>
+                </a:solidFill>
+                <a:latin typeface="Arial" pitchFamily="34" charset="0"/>
+                <a:ea typeface="Arial" pitchFamily="34" charset="-122"/>
+                <a:cs typeface="Arial" pitchFamily="34" charset="-120"/>
+              </a:rPr>
+              <a:t>Materials needed</a:t>
+            </a:r>
+            <a:pPr algn="l" indent="0" marL="0">
+              <a:lnSpc>
+                <a:spcPts val="1620"/>
+              </a:lnSpc>
+              <a:spcAft>
+                <a:spcPts val="300"/>
+              </a:spcAft>
+              <a:buNone/>
+            </a:pPr>
+            <a:r>
+              <a:rPr lang="en-US" sz="1200" dirty="0">
+                <a:solidFill>
+                  <a:srgbClr val="1C2833"/>
+                </a:solidFill>
+                <a:latin typeface="Arial" pitchFamily="34" charset="0"/>
+                <a:ea typeface="Arial" pitchFamily="34" charset="-122"/>
+                <a:cs typeface="Arial" pitchFamily="34" charset="-120"/>
+              </a:rPr>
+              <a:t> — What you need to bring or have stocked</a:t>
             </a:r>
             <a:endParaRPr lang="en-US" sz="1200" dirty="0"/>
           </a:p>
@@ -4198,7 +4324,7 @@
         </p:nvSpPr>
         <p:spPr>
           <a:xfrm>
-            <a:off x="634901" y="5447407"/>
+            <a:off x="634901" y="3402509"/>
             <a:ext cx="8102798" cy="281880"/>
           </a:xfrm>
           <a:prstGeom prst="rect">
@@ -4230,7 +4356,7 @@
                 <a:ea typeface="Arial" pitchFamily="34" charset="-122"/>
                 <a:cs typeface="Arial" pitchFamily="34" charset="-120"/>
               </a:rPr>
-              <a:t>The over-scoping trap.</a:t>
+              <a:t>A worked example on the board.</a:t>
             </a:r>
             <a:pPr algn="l" indent="0" marL="0">
               <a:lnSpc>
@@ -4250,7 +4376,7 @@
                 <a:ea typeface="Arial" pitchFamily="34" charset="-122"/>
                 <a:cs typeface="Arial" pitchFamily="34" charset="-120"/>
               </a:rPr>
-              <a:t> Three signs your plan is too big:</a:t>
+              <a:t> Take one project (e.g. Project 4 — herb deck) and fill in each field aloud:</a:t>
             </a:r>
             <a:endParaRPr lang="en-US" sz="1200" dirty="0"/>
           </a:p>
@@ -4264,8 +4390,8 @@
         </p:nvSpPr>
         <p:spPr>
           <a:xfrm>
-            <a:off x="406301" y="5818138"/>
-            <a:ext cx="8498026" cy="426541"/>
+            <a:off x="406301" y="3773239"/>
+            <a:ext cx="8498026" cy="1502420"/>
           </a:xfrm>
           <a:prstGeom prst="rect">
             <a:avLst/>
@@ -4298,7 +4424,145 @@
                 <a:ea typeface="Arial" pitchFamily="34" charset="-122"/>
                 <a:cs typeface="Arial" pitchFamily="34" charset="-120"/>
               </a:rPr>
-              <a:t>– You can't list the materials in 30 seconds.    – You can't say what's done in fewer than 5 sentences.    – You'd need an extra week to finish.</a:t>
+              <a:t>– Project chosen: Herb deck (10 herbs from my neighbourhood). – Anchor module: Module 10 — Auṣadhi. – Driving question: </a:t>
+            </a:r>
+            <a:pPr algn="l" indent="0" marL="0">
+              <a:lnSpc>
+                <a:spcPts val="1680"/>
+              </a:lnSpc>
+              <a:spcBef>
+                <a:spcPts val="300"/>
+              </a:spcBef>
+              <a:spcAft>
+                <a:spcPts val="300"/>
+              </a:spcAft>
+              <a:buNone/>
+            </a:pPr>
+            <a:r>
+              <a:rPr lang="en-US" sz="1200" i="1" dirty="0">
+                <a:solidFill>
+                  <a:srgbClr val="1C2833"/>
+                </a:solidFill>
+                <a:latin typeface="Arial" pitchFamily="34" charset="0"/>
+                <a:ea typeface="Arial" pitchFamily="34" charset="-122"/>
+                <a:cs typeface="Arial" pitchFamily="34" charset="-120"/>
+              </a:rPr>
+              <a:t>Which 10 herbs grow within 200 m of my home, and what does the tradition say about each?</a:t>
+            </a:r>
+            <a:pPr algn="l" indent="0" marL="0">
+              <a:lnSpc>
+                <a:spcPts val="1680"/>
+              </a:lnSpc>
+              <a:spcBef>
+                <a:spcPts val="300"/>
+              </a:spcBef>
+              <a:spcAft>
+                <a:spcPts val="300"/>
+              </a:spcAft>
+              <a:buNone/>
+            </a:pPr>
+            <a:r>
+              <a:rPr lang="en-US" sz="1200" dirty="0">
+                <a:solidFill>
+                  <a:srgbClr val="1C2833"/>
+                </a:solidFill>
+                <a:latin typeface="Arial" pitchFamily="34" charset="0"/>
+                <a:ea typeface="Arial" pitchFamily="34" charset="-122"/>
+                <a:cs typeface="Arial" pitchFamily="34" charset="-120"/>
+              </a:rPr>
+              <a:t> – Two candidate sources: Module 10's </a:t>
+            </a:r>
+            <a:pPr algn="l" indent="0" marL="0">
+              <a:lnSpc>
+                <a:spcPts val="1680"/>
+              </a:lnSpc>
+              <a:spcBef>
+                <a:spcPts val="300"/>
+              </a:spcBef>
+              <a:spcAft>
+                <a:spcPts val="300"/>
+              </a:spcAft>
+              <a:buNone/>
+            </a:pPr>
+            <a:r>
+              <a:rPr lang="en-US" sz="1200" dirty="0">
+                <a:solidFill>
+                  <a:srgbClr val="1C2833"/>
+                </a:solidFill>
+                <a:latin typeface="Arial" pitchFamily="34" charset="0"/>
+                <a:ea typeface="Arial" pitchFamily="34" charset="-122"/>
+                <a:cs typeface="Arial" pitchFamily="34" charset="-120"/>
+              </a:rPr>
+              <a:t>.rag-cache/</a:t>
+            </a:r>
+            <a:pPr algn="l" indent="0" marL="0">
+              <a:lnSpc>
+                <a:spcPts val="1680"/>
+              </a:lnSpc>
+              <a:spcBef>
+                <a:spcPts val="300"/>
+              </a:spcBef>
+              <a:spcAft>
+                <a:spcPts val="300"/>
+              </a:spcAft>
+              <a:buNone/>
+            </a:pPr>
+            <a:r>
+              <a:rPr lang="en-US" sz="1200" dirty="0">
+                <a:solidFill>
+                  <a:srgbClr val="1C2833"/>
+                </a:solidFill>
+                <a:latin typeface="Arial" pitchFamily="34" charset="0"/>
+                <a:ea typeface="Arial" pitchFamily="34" charset="-122"/>
+                <a:cs typeface="Arial" pitchFamily="34" charset="-120"/>
+              </a:rPr>
+              <a:t> (for Ayurvedic uses); Pradip Krishen's </a:t>
+            </a:r>
+            <a:pPr algn="l" indent="0" marL="0">
+              <a:lnSpc>
+                <a:spcPts val="1680"/>
+              </a:lnSpc>
+              <a:spcBef>
+                <a:spcPts val="300"/>
+              </a:spcBef>
+              <a:spcAft>
+                <a:spcPts val="300"/>
+              </a:spcAft>
+              <a:buNone/>
+            </a:pPr>
+            <a:r>
+              <a:rPr lang="en-US" sz="1200" i="1" dirty="0">
+                <a:solidFill>
+                  <a:srgbClr val="1C2833"/>
+                </a:solidFill>
+                <a:latin typeface="Arial" pitchFamily="34" charset="0"/>
+                <a:ea typeface="Arial" pitchFamily="34" charset="-122"/>
+                <a:cs typeface="Arial" pitchFamily="34" charset="-120"/>
+              </a:rPr>
+              <a:t>Trees of Delhi</a:t>
+            </a:r>
+            <a:pPr algn="l" indent="0" marL="0">
+              <a:lnSpc>
+                <a:spcPts val="1680"/>
+              </a:lnSpc>
+              <a:spcBef>
+                <a:spcPts val="300"/>
+              </a:spcBef>
+              <a:spcAft>
+                <a:spcPts val="300"/>
+              </a:spcAft>
+              <a:buNone/>
+            </a:pPr>
+            <a:r>
+              <a:rPr lang="en-US" sz="1200" dirty="0">
+                <a:solidFill>
+                  <a:srgbClr val="1C2833"/>
+                </a:solidFill>
+                <a:latin typeface="Arial" pitchFamily="34" charset="0"/>
+                <a:ea typeface="Arial" pitchFamily="34" charset="-122"/>
+                <a:cs typeface="Arial" pitchFamily="34" charset="-120"/>
+              </a:rPr>
+              <a:t> for identification (or a state forest-department field guide for your region). – Artefact format: 10 cards (postcard size), front = photo + sketch, back = Sanskrit name + English + use + part used. – Success criteria: (a) all 10 are real plants from my neighbourhood, (b) every card has a verifiable Ayurvedic note from the cache, (c) the deck is bound or stored together (not 10 loose pages). – Materials: cardstock or thick paper, glue, sketch pens, camera or phone.</a:t>
             </a:r>
             <a:endParaRPr lang="en-US" sz="1200" dirty="0"/>
           </a:p>
@@ -4312,8 +4576,8 @@
         </p:nvSpPr>
         <p:spPr>
           <a:xfrm>
-            <a:off x="406301" y="6320879"/>
-            <a:ext cx="8498026" cy="213271"/>
+            <a:off x="634901" y="5364510"/>
+            <a:ext cx="8102798" cy="281880"/>
           </a:xfrm>
           <a:prstGeom prst="rect">
             <a:avLst/>
@@ -4325,13 +4589,31 @@
           <a:bodyPr wrap="square" lIns="0" tIns="0" rIns="0" bIns="0" rtlCol="0" anchor="t"/>
           <a:lstStyle/>
           <a:p>
-            <a:pPr algn="l" indent="0" marL="0">
-              <a:lnSpc>
-                <a:spcPts val="1680"/>
-              </a:lnSpc>
-              <a:spcBef>
-                <a:spcPts val="300"/>
-              </a:spcBef>
+            <a:pPr algn="l" marL="342900" indent="-342900">
+              <a:lnSpc>
+                <a:spcPts val="1620"/>
+              </a:lnSpc>
+              <a:spcAft>
+                <a:spcPts val="300"/>
+              </a:spcAft>
+              <a:buSzPct val="100000"/>
+              <a:buChar char="•"/>
+            </a:pPr>
+            <a:r>
+              <a:rPr lang="en-US" sz="1200" b="1" dirty="0">
+                <a:solidFill>
+                  <a:srgbClr val="1C2833"/>
+                </a:solidFill>
+                <a:latin typeface="Arial" pitchFamily="34" charset="0"/>
+                <a:ea typeface="Arial" pitchFamily="34" charset="-122"/>
+                <a:cs typeface="Arial" pitchFamily="34" charset="-120"/>
+              </a:rPr>
+              <a:t>The over-scoping trap.</a:t>
+            </a:r>
+            <a:pPr algn="l" indent="0" marL="0">
+              <a:lnSpc>
+                <a:spcPts val="1620"/>
+              </a:lnSpc>
               <a:spcAft>
                 <a:spcPts val="300"/>
               </a:spcAft>
@@ -4346,53 +4628,7 @@
                 <a:ea typeface="Arial" pitchFamily="34" charset="-122"/>
                 <a:cs typeface="Arial" pitchFamily="34" charset="-120"/>
               </a:rPr>
-              <a:t>"If any of these are true, </a:t>
-            </a:r>
-            <a:pPr algn="l" indent="0" marL="0">
-              <a:lnSpc>
-                <a:spcPts val="1680"/>
-              </a:lnSpc>
-              <a:spcBef>
-                <a:spcPts val="300"/>
-              </a:spcBef>
-              <a:spcAft>
-                <a:spcPts val="300"/>
-              </a:spcAft>
-              <a:buNone/>
-            </a:pPr>
-            <a:r>
-              <a:rPr lang="en-US" sz="1200" i="1" dirty="0">
-                <a:solidFill>
-                  <a:srgbClr val="1C2833"/>
-                </a:solidFill>
-                <a:latin typeface="Arial" pitchFamily="34" charset="0"/>
-                <a:ea typeface="Arial" pitchFamily="34" charset="-122"/>
-                <a:cs typeface="Arial" pitchFamily="34" charset="-120"/>
-              </a:rPr>
-              <a:t>cut your project in half</a:t>
-            </a:r>
-            <a:pPr algn="l" indent="0" marL="0">
-              <a:lnSpc>
-                <a:spcPts val="1680"/>
-              </a:lnSpc>
-              <a:spcBef>
-                <a:spcPts val="300"/>
-              </a:spcBef>
-              <a:spcAft>
-                <a:spcPts val="300"/>
-              </a:spcAft>
-              <a:buNone/>
-            </a:pPr>
-            <a:r>
-              <a:rPr lang="en-US" sz="1200" dirty="0">
-                <a:solidFill>
-                  <a:srgbClr val="1C2833"/>
-                </a:solidFill>
-                <a:latin typeface="Arial" pitchFamily="34" charset="0"/>
-                <a:ea typeface="Arial" pitchFamily="34" charset="-122"/>
-                <a:cs typeface="Arial" pitchFamily="34" charset="-120"/>
-              </a:rPr>
-              <a:t>. A small finished piece beats a large half-finished one."</a:t>
+              <a:t> Three signs your plan is too big:</a:t>
             </a:r>
             <a:endParaRPr lang="en-US" sz="1200" dirty="0"/>
           </a:p>
@@ -4406,7 +4642,149 @@
         </p:nvSpPr>
         <p:spPr>
           <a:xfrm>
-            <a:off x="406301" y="6686550"/>
+            <a:off x="406301" y="5735241"/>
+            <a:ext cx="8498026" cy="426541"/>
+          </a:xfrm>
+          <a:prstGeom prst="rect">
+            <a:avLst/>
+          </a:prstGeom>
+          <a:noFill/>
+          <a:ln/>
+        </p:spPr>
+        <p:txBody>
+          <a:bodyPr wrap="square" lIns="0" tIns="0" rIns="0" bIns="0" rtlCol="0" anchor="t"/>
+          <a:lstStyle/>
+          <a:p>
+            <a:pPr algn="l" indent="0" marL="0">
+              <a:lnSpc>
+                <a:spcPts val="1680"/>
+              </a:lnSpc>
+              <a:spcBef>
+                <a:spcPts val="300"/>
+              </a:spcBef>
+              <a:spcAft>
+                <a:spcPts val="300"/>
+              </a:spcAft>
+              <a:buNone/>
+            </a:pPr>
+            <a:r>
+              <a:rPr lang="en-US" sz="1200" dirty="0">
+                <a:solidFill>
+                  <a:srgbClr val="1C2833"/>
+                </a:solidFill>
+                <a:latin typeface="Arial" pitchFamily="34" charset="0"/>
+                <a:ea typeface="Arial" pitchFamily="34" charset="-122"/>
+                <a:cs typeface="Arial" pitchFamily="34" charset="-120"/>
+              </a:rPr>
+              <a:t>– You can't list the materials in 30 seconds.    – You can't say what's done in fewer than 5 sentences.    – You'd need an extra week to finish.</a:t>
+            </a:r>
+            <a:endParaRPr lang="en-US" sz="1200" dirty="0"/>
+          </a:p>
+        </p:txBody>
+      </p:sp>
+      <p:sp>
+        <p:nvSpPr>
+          <p:cNvPr id="11" name="Text 9"/>
+          <p:cNvSpPr/>
+          <p:nvPr/>
+        </p:nvSpPr>
+        <p:spPr>
+          <a:xfrm>
+            <a:off x="406301" y="6237982"/>
+            <a:ext cx="8498026" cy="213271"/>
+          </a:xfrm>
+          <a:prstGeom prst="rect">
+            <a:avLst/>
+          </a:prstGeom>
+          <a:noFill/>
+          <a:ln/>
+        </p:spPr>
+        <p:txBody>
+          <a:bodyPr wrap="square" lIns="0" tIns="0" rIns="0" bIns="0" rtlCol="0" anchor="t"/>
+          <a:lstStyle/>
+          <a:p>
+            <a:pPr algn="l" indent="0" marL="0">
+              <a:lnSpc>
+                <a:spcPts val="1680"/>
+              </a:lnSpc>
+              <a:spcBef>
+                <a:spcPts val="300"/>
+              </a:spcBef>
+              <a:spcAft>
+                <a:spcPts val="300"/>
+              </a:spcAft>
+              <a:buNone/>
+            </a:pPr>
+            <a:r>
+              <a:rPr lang="en-US" sz="1200" dirty="0">
+                <a:solidFill>
+                  <a:srgbClr val="1C2833"/>
+                </a:solidFill>
+                <a:latin typeface="Arial" pitchFamily="34" charset="0"/>
+                <a:ea typeface="Arial" pitchFamily="34" charset="-122"/>
+                <a:cs typeface="Arial" pitchFamily="34" charset="-120"/>
+              </a:rPr>
+              <a:t>"If any of these are true, </a:t>
+            </a:r>
+            <a:pPr algn="l" indent="0" marL="0">
+              <a:lnSpc>
+                <a:spcPts val="1680"/>
+              </a:lnSpc>
+              <a:spcBef>
+                <a:spcPts val="300"/>
+              </a:spcBef>
+              <a:spcAft>
+                <a:spcPts val="300"/>
+              </a:spcAft>
+              <a:buNone/>
+            </a:pPr>
+            <a:r>
+              <a:rPr lang="en-US" sz="1200" i="1" dirty="0">
+                <a:solidFill>
+                  <a:srgbClr val="1C2833"/>
+                </a:solidFill>
+                <a:latin typeface="Arial" pitchFamily="34" charset="0"/>
+                <a:ea typeface="Arial" pitchFamily="34" charset="-122"/>
+                <a:cs typeface="Arial" pitchFamily="34" charset="-120"/>
+              </a:rPr>
+              <a:t>cut your project in half</a:t>
+            </a:r>
+            <a:pPr algn="l" indent="0" marL="0">
+              <a:lnSpc>
+                <a:spcPts val="1680"/>
+              </a:lnSpc>
+              <a:spcBef>
+                <a:spcPts val="300"/>
+              </a:spcBef>
+              <a:spcAft>
+                <a:spcPts val="300"/>
+              </a:spcAft>
+              <a:buNone/>
+            </a:pPr>
+            <a:r>
+              <a:rPr lang="en-US" sz="1200" dirty="0">
+                <a:solidFill>
+                  <a:srgbClr val="1C2833"/>
+                </a:solidFill>
+                <a:latin typeface="Arial" pitchFamily="34" charset="0"/>
+                <a:ea typeface="Arial" pitchFamily="34" charset="-122"/>
+                <a:cs typeface="Arial" pitchFamily="34" charset="-120"/>
+              </a:rPr>
+              <a:t>. A small finished piece beats a large half-finished one."</a:t>
+            </a:r>
+            <a:endParaRPr lang="en-US" sz="1200" dirty="0"/>
+          </a:p>
+        </p:txBody>
+      </p:sp>
+      <p:sp>
+        <p:nvSpPr>
+          <p:cNvPr id="12" name="Text 10"/>
+          <p:cNvSpPr/>
+          <p:nvPr/>
+        </p:nvSpPr>
+        <p:spPr>
+          <a:xfrm>
+            <a:off x="406301" y="6603653"/>
             <a:ext cx="8498026" cy="213271"/>
           </a:xfrm>
           <a:prstGeom prst="rect">

--- a/exports/pptx/lessons/middle-module-15-project-implementation/day-02-scoping.pptx
+++ b/exports/pptx/lessons/middle-module-15-project-implementation/day-02-scoping.pptx
@@ -17,9 +17,15 @@
     <p:sldId id="265" r:id="rId11"/>
     <p:sldId id="266" r:id="rId12"/>
     <p:sldId id="267" r:id="rId13"/>
+    <p:sldId id="268" r:id="rId14"/>
+    <p:sldId id="269" r:id="rId15"/>
+    <p:sldId id="270" r:id="rId16"/>
+    <p:sldId id="271" r:id="rId17"/>
+    <p:sldId id="272" r:id="rId18"/>
+    <p:sldId id="273" r:id="rId19"/>
   </p:sldIdLst>
   <p:notesMasterIdLst>
-    <p:notesMasterId r:id="rId14"/>
+    <p:notesMasterId r:id="rId20"/>
   </p:notesMasterIdLst>
   <p:sldSz cx="9144000" cy="5143500"/>
   <p:notesSz cx="5143500" cy="9144000"/>
@@ -801,6 +807,534 @@
             <a:fld id="{F7021451-1387-4CA6-816F-3879F97B5CBC}" type="slidenum">
               <a:rPr lang="en-US"/>
               <a:t>12</a:t>
+            </a:fld>
+            <a:endParaRPr lang="en-US"/>
+          </a:p>
+        </p:txBody>
+      </p:sp>
+    </p:spTree>
+    <p:extLst>
+      <p:ext uri="{BB962C8B-B14F-4D97-AF65-F5344CB8AC3E}">
+        <p14:creationId xmlns:p14="http://schemas.microsoft.com/office/powerpoint/2010/main" val="1024086991"/>
+      </p:ext>
+    </p:extLst>
+  </p:cSld>
+  <p:clrMapOvr>
+    <a:masterClrMapping/>
+  </p:clrMapOvr>
+</p:notes>
+</file>
+
+<file path=ppt/notesSlides/notesSlide13.xml><?xml version="1.0" encoding="utf-8"?>
+<p:notes xmlns:a="http://schemas.openxmlformats.org/drawingml/2006/main" xmlns:r="http://schemas.openxmlformats.org/officeDocument/2006/relationships" xmlns:p="http://schemas.openxmlformats.org/presentationml/2006/main">
+  <p:cSld>
+    <p:spTree>
+      <p:nvGrpSpPr>
+        <p:cNvPr id="1" name=""/>
+        <p:cNvGrpSpPr/>
+        <p:nvPr/>
+      </p:nvGrpSpPr>
+      <p:grpSpPr>
+        <a:xfrm>
+          <a:off x="0" y="0"/>
+          <a:ext cx="0" cy="0"/>
+          <a:chOff x="0" y="0"/>
+          <a:chExt cx="0" cy="0"/>
+        </a:xfrm>
+      </p:grpSpPr>
+      <p:sp>
+        <p:nvSpPr>
+          <p:cNvPr id="2" name="Slide Image Placeholder 1"/>
+          <p:cNvSpPr>
+            <a:spLocks noGrp="1" noRot="1" noChangeAspect="1"/>
+          </p:cNvSpPr>
+          <p:nvPr>
+            <p:ph type="sldImg"/>
+          </p:nvPr>
+        </p:nvSpPr>
+        <p:spPr/>
+      </p:sp>
+      <p:sp>
+        <p:nvSpPr>
+          <p:cNvPr id="3" name="Notes Placeholder 2"/>
+          <p:cNvSpPr>
+            <a:spLocks noGrp="1"/>
+          </p:cNvSpPr>
+          <p:nvPr>
+            <p:ph type="body" idx="1"/>
+          </p:nvPr>
+        </p:nvSpPr>
+        <p:spPr/>
+        <p:txBody>
+          <a:bodyPr/>
+          <a:lstStyle/>
+          <a:p>
+            <a:r>
+              <a:rPr lang="en-US" dirty="0"/>
+              <a:t/>
+            </a:r>
+            <a:endParaRPr lang="en-US" dirty="0"/>
+          </a:p>
+        </p:txBody>
+      </p:sp>
+      <p:sp>
+        <p:nvSpPr>
+          <p:cNvPr id="4" name="Slide Number Placeholder 3"/>
+          <p:cNvSpPr>
+            <a:spLocks noGrp="1"/>
+          </p:cNvSpPr>
+          <p:nvPr>
+            <p:ph type="sldNum" sz="quarter" idx="10"/>
+          </p:nvPr>
+        </p:nvSpPr>
+        <p:spPr/>
+        <p:txBody>
+          <a:bodyPr/>
+          <a:lstStyle/>
+          <a:p>
+            <a:fld id="{F7021451-1387-4CA6-816F-3879F97B5CBC}" type="slidenum">
+              <a:rPr lang="en-US"/>
+              <a:t>13</a:t>
+            </a:fld>
+            <a:endParaRPr lang="en-US"/>
+          </a:p>
+        </p:txBody>
+      </p:sp>
+    </p:spTree>
+    <p:extLst>
+      <p:ext uri="{BB962C8B-B14F-4D97-AF65-F5344CB8AC3E}">
+        <p14:creationId xmlns:p14="http://schemas.microsoft.com/office/powerpoint/2010/main" val="1024086991"/>
+      </p:ext>
+    </p:extLst>
+  </p:cSld>
+  <p:clrMapOvr>
+    <a:masterClrMapping/>
+  </p:clrMapOvr>
+</p:notes>
+</file>
+
+<file path=ppt/notesSlides/notesSlide14.xml><?xml version="1.0" encoding="utf-8"?>
+<p:notes xmlns:a="http://schemas.openxmlformats.org/drawingml/2006/main" xmlns:r="http://schemas.openxmlformats.org/officeDocument/2006/relationships" xmlns:p="http://schemas.openxmlformats.org/presentationml/2006/main">
+  <p:cSld>
+    <p:spTree>
+      <p:nvGrpSpPr>
+        <p:cNvPr id="1" name=""/>
+        <p:cNvGrpSpPr/>
+        <p:nvPr/>
+      </p:nvGrpSpPr>
+      <p:grpSpPr>
+        <a:xfrm>
+          <a:off x="0" y="0"/>
+          <a:ext cx="0" cy="0"/>
+          <a:chOff x="0" y="0"/>
+          <a:chExt cx="0" cy="0"/>
+        </a:xfrm>
+      </p:grpSpPr>
+      <p:sp>
+        <p:nvSpPr>
+          <p:cNvPr id="2" name="Slide Image Placeholder 1"/>
+          <p:cNvSpPr>
+            <a:spLocks noGrp="1" noRot="1" noChangeAspect="1"/>
+          </p:cNvSpPr>
+          <p:nvPr>
+            <p:ph type="sldImg"/>
+          </p:nvPr>
+        </p:nvSpPr>
+        <p:spPr/>
+      </p:sp>
+      <p:sp>
+        <p:nvSpPr>
+          <p:cNvPr id="3" name="Notes Placeholder 2"/>
+          <p:cNvSpPr>
+            <a:spLocks noGrp="1"/>
+          </p:cNvSpPr>
+          <p:nvPr>
+            <p:ph type="body" idx="1"/>
+          </p:nvPr>
+        </p:nvSpPr>
+        <p:spPr/>
+        <p:txBody>
+          <a:bodyPr/>
+          <a:lstStyle/>
+          <a:p>
+            <a:r>
+              <a:rPr lang="en-US" dirty="0"/>
+              <a:t/>
+            </a:r>
+            <a:endParaRPr lang="en-US" dirty="0"/>
+          </a:p>
+        </p:txBody>
+      </p:sp>
+      <p:sp>
+        <p:nvSpPr>
+          <p:cNvPr id="4" name="Slide Number Placeholder 3"/>
+          <p:cNvSpPr>
+            <a:spLocks noGrp="1"/>
+          </p:cNvSpPr>
+          <p:nvPr>
+            <p:ph type="sldNum" sz="quarter" idx="10"/>
+          </p:nvPr>
+        </p:nvSpPr>
+        <p:spPr/>
+        <p:txBody>
+          <a:bodyPr/>
+          <a:lstStyle/>
+          <a:p>
+            <a:fld id="{F7021451-1387-4CA6-816F-3879F97B5CBC}" type="slidenum">
+              <a:rPr lang="en-US"/>
+              <a:t>14</a:t>
+            </a:fld>
+            <a:endParaRPr lang="en-US"/>
+          </a:p>
+        </p:txBody>
+      </p:sp>
+    </p:spTree>
+    <p:extLst>
+      <p:ext uri="{BB962C8B-B14F-4D97-AF65-F5344CB8AC3E}">
+        <p14:creationId xmlns:p14="http://schemas.microsoft.com/office/powerpoint/2010/main" val="1024086991"/>
+      </p:ext>
+    </p:extLst>
+  </p:cSld>
+  <p:clrMapOvr>
+    <a:masterClrMapping/>
+  </p:clrMapOvr>
+</p:notes>
+</file>
+
+<file path=ppt/notesSlides/notesSlide15.xml><?xml version="1.0" encoding="utf-8"?>
+<p:notes xmlns:a="http://schemas.openxmlformats.org/drawingml/2006/main" xmlns:r="http://schemas.openxmlformats.org/officeDocument/2006/relationships" xmlns:p="http://schemas.openxmlformats.org/presentationml/2006/main">
+  <p:cSld>
+    <p:spTree>
+      <p:nvGrpSpPr>
+        <p:cNvPr id="1" name=""/>
+        <p:cNvGrpSpPr/>
+        <p:nvPr/>
+      </p:nvGrpSpPr>
+      <p:grpSpPr>
+        <a:xfrm>
+          <a:off x="0" y="0"/>
+          <a:ext cx="0" cy="0"/>
+          <a:chOff x="0" y="0"/>
+          <a:chExt cx="0" cy="0"/>
+        </a:xfrm>
+      </p:grpSpPr>
+      <p:sp>
+        <p:nvSpPr>
+          <p:cNvPr id="2" name="Slide Image Placeholder 1"/>
+          <p:cNvSpPr>
+            <a:spLocks noGrp="1" noRot="1" noChangeAspect="1"/>
+          </p:cNvSpPr>
+          <p:nvPr>
+            <p:ph type="sldImg"/>
+          </p:nvPr>
+        </p:nvSpPr>
+        <p:spPr/>
+      </p:sp>
+      <p:sp>
+        <p:nvSpPr>
+          <p:cNvPr id="3" name="Notes Placeholder 2"/>
+          <p:cNvSpPr>
+            <a:spLocks noGrp="1"/>
+          </p:cNvSpPr>
+          <p:nvPr>
+            <p:ph type="body" idx="1"/>
+          </p:nvPr>
+        </p:nvSpPr>
+        <p:spPr/>
+        <p:txBody>
+          <a:bodyPr/>
+          <a:lstStyle/>
+          <a:p>
+            <a:r>
+              <a:rPr lang="en-US" dirty="0"/>
+              <a:t/>
+            </a:r>
+            <a:endParaRPr lang="en-US" dirty="0"/>
+          </a:p>
+        </p:txBody>
+      </p:sp>
+      <p:sp>
+        <p:nvSpPr>
+          <p:cNvPr id="4" name="Slide Number Placeholder 3"/>
+          <p:cNvSpPr>
+            <a:spLocks noGrp="1"/>
+          </p:cNvSpPr>
+          <p:nvPr>
+            <p:ph type="sldNum" sz="quarter" idx="10"/>
+          </p:nvPr>
+        </p:nvSpPr>
+        <p:spPr/>
+        <p:txBody>
+          <a:bodyPr/>
+          <a:lstStyle/>
+          <a:p>
+            <a:fld id="{F7021451-1387-4CA6-816F-3879F97B5CBC}" type="slidenum">
+              <a:rPr lang="en-US"/>
+              <a:t>15</a:t>
+            </a:fld>
+            <a:endParaRPr lang="en-US"/>
+          </a:p>
+        </p:txBody>
+      </p:sp>
+    </p:spTree>
+    <p:extLst>
+      <p:ext uri="{BB962C8B-B14F-4D97-AF65-F5344CB8AC3E}">
+        <p14:creationId xmlns:p14="http://schemas.microsoft.com/office/powerpoint/2010/main" val="1024086991"/>
+      </p:ext>
+    </p:extLst>
+  </p:cSld>
+  <p:clrMapOvr>
+    <a:masterClrMapping/>
+  </p:clrMapOvr>
+</p:notes>
+</file>
+
+<file path=ppt/notesSlides/notesSlide16.xml><?xml version="1.0" encoding="utf-8"?>
+<p:notes xmlns:a="http://schemas.openxmlformats.org/drawingml/2006/main" xmlns:r="http://schemas.openxmlformats.org/officeDocument/2006/relationships" xmlns:p="http://schemas.openxmlformats.org/presentationml/2006/main">
+  <p:cSld>
+    <p:spTree>
+      <p:nvGrpSpPr>
+        <p:cNvPr id="1" name=""/>
+        <p:cNvGrpSpPr/>
+        <p:nvPr/>
+      </p:nvGrpSpPr>
+      <p:grpSpPr>
+        <a:xfrm>
+          <a:off x="0" y="0"/>
+          <a:ext cx="0" cy="0"/>
+          <a:chOff x="0" y="0"/>
+          <a:chExt cx="0" cy="0"/>
+        </a:xfrm>
+      </p:grpSpPr>
+      <p:sp>
+        <p:nvSpPr>
+          <p:cNvPr id="2" name="Slide Image Placeholder 1"/>
+          <p:cNvSpPr>
+            <a:spLocks noGrp="1" noRot="1" noChangeAspect="1"/>
+          </p:cNvSpPr>
+          <p:nvPr>
+            <p:ph type="sldImg"/>
+          </p:nvPr>
+        </p:nvSpPr>
+        <p:spPr/>
+      </p:sp>
+      <p:sp>
+        <p:nvSpPr>
+          <p:cNvPr id="3" name="Notes Placeholder 2"/>
+          <p:cNvSpPr>
+            <a:spLocks noGrp="1"/>
+          </p:cNvSpPr>
+          <p:nvPr>
+            <p:ph type="body" idx="1"/>
+          </p:nvPr>
+        </p:nvSpPr>
+        <p:spPr/>
+        <p:txBody>
+          <a:bodyPr/>
+          <a:lstStyle/>
+          <a:p>
+            <a:r>
+              <a:rPr lang="en-US" dirty="0"/>
+              <a:t/>
+            </a:r>
+            <a:endParaRPr lang="en-US" dirty="0"/>
+          </a:p>
+        </p:txBody>
+      </p:sp>
+      <p:sp>
+        <p:nvSpPr>
+          <p:cNvPr id="4" name="Slide Number Placeholder 3"/>
+          <p:cNvSpPr>
+            <a:spLocks noGrp="1"/>
+          </p:cNvSpPr>
+          <p:nvPr>
+            <p:ph type="sldNum" sz="quarter" idx="10"/>
+          </p:nvPr>
+        </p:nvSpPr>
+        <p:spPr/>
+        <p:txBody>
+          <a:bodyPr/>
+          <a:lstStyle/>
+          <a:p>
+            <a:fld id="{F7021451-1387-4CA6-816F-3879F97B5CBC}" type="slidenum">
+              <a:rPr lang="en-US"/>
+              <a:t>16</a:t>
+            </a:fld>
+            <a:endParaRPr lang="en-US"/>
+          </a:p>
+        </p:txBody>
+      </p:sp>
+    </p:spTree>
+    <p:extLst>
+      <p:ext uri="{BB962C8B-B14F-4D97-AF65-F5344CB8AC3E}">
+        <p14:creationId xmlns:p14="http://schemas.microsoft.com/office/powerpoint/2010/main" val="1024086991"/>
+      </p:ext>
+    </p:extLst>
+  </p:cSld>
+  <p:clrMapOvr>
+    <a:masterClrMapping/>
+  </p:clrMapOvr>
+</p:notes>
+</file>
+
+<file path=ppt/notesSlides/notesSlide17.xml><?xml version="1.0" encoding="utf-8"?>
+<p:notes xmlns:a="http://schemas.openxmlformats.org/drawingml/2006/main" xmlns:r="http://schemas.openxmlformats.org/officeDocument/2006/relationships" xmlns:p="http://schemas.openxmlformats.org/presentationml/2006/main">
+  <p:cSld>
+    <p:spTree>
+      <p:nvGrpSpPr>
+        <p:cNvPr id="1" name=""/>
+        <p:cNvGrpSpPr/>
+        <p:nvPr/>
+      </p:nvGrpSpPr>
+      <p:grpSpPr>
+        <a:xfrm>
+          <a:off x="0" y="0"/>
+          <a:ext cx="0" cy="0"/>
+          <a:chOff x="0" y="0"/>
+          <a:chExt cx="0" cy="0"/>
+        </a:xfrm>
+      </p:grpSpPr>
+      <p:sp>
+        <p:nvSpPr>
+          <p:cNvPr id="2" name="Slide Image Placeholder 1"/>
+          <p:cNvSpPr>
+            <a:spLocks noGrp="1" noRot="1" noChangeAspect="1"/>
+          </p:cNvSpPr>
+          <p:nvPr>
+            <p:ph type="sldImg"/>
+          </p:nvPr>
+        </p:nvSpPr>
+        <p:spPr/>
+      </p:sp>
+      <p:sp>
+        <p:nvSpPr>
+          <p:cNvPr id="3" name="Notes Placeholder 2"/>
+          <p:cNvSpPr>
+            <a:spLocks noGrp="1"/>
+          </p:cNvSpPr>
+          <p:nvPr>
+            <p:ph type="body" idx="1"/>
+          </p:nvPr>
+        </p:nvSpPr>
+        <p:spPr/>
+        <p:txBody>
+          <a:bodyPr/>
+          <a:lstStyle/>
+          <a:p>
+            <a:r>
+              <a:rPr lang="en-US" dirty="0"/>
+              <a:t/>
+            </a:r>
+            <a:endParaRPr lang="en-US" dirty="0"/>
+          </a:p>
+        </p:txBody>
+      </p:sp>
+      <p:sp>
+        <p:nvSpPr>
+          <p:cNvPr id="4" name="Slide Number Placeholder 3"/>
+          <p:cNvSpPr>
+            <a:spLocks noGrp="1"/>
+          </p:cNvSpPr>
+          <p:nvPr>
+            <p:ph type="sldNum" sz="quarter" idx="10"/>
+          </p:nvPr>
+        </p:nvSpPr>
+        <p:spPr/>
+        <p:txBody>
+          <a:bodyPr/>
+          <a:lstStyle/>
+          <a:p>
+            <a:fld id="{F7021451-1387-4CA6-816F-3879F97B5CBC}" type="slidenum">
+              <a:rPr lang="en-US"/>
+              <a:t>17</a:t>
+            </a:fld>
+            <a:endParaRPr lang="en-US"/>
+          </a:p>
+        </p:txBody>
+      </p:sp>
+    </p:spTree>
+    <p:extLst>
+      <p:ext uri="{BB962C8B-B14F-4D97-AF65-F5344CB8AC3E}">
+        <p14:creationId xmlns:p14="http://schemas.microsoft.com/office/powerpoint/2010/main" val="1024086991"/>
+      </p:ext>
+    </p:extLst>
+  </p:cSld>
+  <p:clrMapOvr>
+    <a:masterClrMapping/>
+  </p:clrMapOvr>
+</p:notes>
+</file>
+
+<file path=ppt/notesSlides/notesSlide18.xml><?xml version="1.0" encoding="utf-8"?>
+<p:notes xmlns:a="http://schemas.openxmlformats.org/drawingml/2006/main" xmlns:r="http://schemas.openxmlformats.org/officeDocument/2006/relationships" xmlns:p="http://schemas.openxmlformats.org/presentationml/2006/main">
+  <p:cSld>
+    <p:spTree>
+      <p:nvGrpSpPr>
+        <p:cNvPr id="1" name=""/>
+        <p:cNvGrpSpPr/>
+        <p:nvPr/>
+      </p:nvGrpSpPr>
+      <p:grpSpPr>
+        <a:xfrm>
+          <a:off x="0" y="0"/>
+          <a:ext cx="0" cy="0"/>
+          <a:chOff x="0" y="0"/>
+          <a:chExt cx="0" cy="0"/>
+        </a:xfrm>
+      </p:grpSpPr>
+      <p:sp>
+        <p:nvSpPr>
+          <p:cNvPr id="2" name="Slide Image Placeholder 1"/>
+          <p:cNvSpPr>
+            <a:spLocks noGrp="1" noRot="1" noChangeAspect="1"/>
+          </p:cNvSpPr>
+          <p:nvPr>
+            <p:ph type="sldImg"/>
+          </p:nvPr>
+        </p:nvSpPr>
+        <p:spPr/>
+      </p:sp>
+      <p:sp>
+        <p:nvSpPr>
+          <p:cNvPr id="3" name="Notes Placeholder 2"/>
+          <p:cNvSpPr>
+            <a:spLocks noGrp="1"/>
+          </p:cNvSpPr>
+          <p:nvPr>
+            <p:ph type="body" idx="1"/>
+          </p:nvPr>
+        </p:nvSpPr>
+        <p:spPr/>
+        <p:txBody>
+          <a:bodyPr/>
+          <a:lstStyle/>
+          <a:p>
+            <a:r>
+              <a:rPr lang="en-US" dirty="0"/>
+              <a:t/>
+            </a:r>
+            <a:endParaRPr lang="en-US" dirty="0"/>
+          </a:p>
+        </p:txBody>
+      </p:sp>
+      <p:sp>
+        <p:nvSpPr>
+          <p:cNvPr id="4" name="Slide Number Placeholder 3"/>
+          <p:cNvSpPr>
+            <a:spLocks noGrp="1"/>
+          </p:cNvSpPr>
+          <p:nvPr>
+            <p:ph type="sldNum" sz="quarter" idx="10"/>
+          </p:nvPr>
+        </p:nvSpPr>
+        <p:spPr/>
+        <p:txBody>
+          <a:bodyPr/>
+          <a:lstStyle/>
+          <a:p>
+            <a:fld id="{F7021451-1387-4CA6-816F-3879F97B5CBC}" type="slidenum">
+              <a:rPr lang="en-US"/>
+              <a:t>18</a:t>
             </a:fld>
             <a:endParaRPr lang="en-US"/>
           </a:p>
@@ -2100,102 +2634,6 @@
         </p:nvSpPr>
         <p:spPr>
           <a:xfrm>
-            <a:off x="406301" y="1223963"/>
-            <a:ext cx="8498026" cy="274290"/>
-          </a:xfrm>
-          <a:prstGeom prst="rect">
-            <a:avLst/>
-          </a:prstGeom>
-          <a:noFill/>
-          <a:ln/>
-        </p:spPr>
-        <p:txBody>
-          <a:bodyPr wrap="square" lIns="0" tIns="0" rIns="0" bIns="0" rtlCol="0" anchor="t"/>
-          <a:lstStyle/>
-          <a:p>
-            <a:pPr algn="l" indent="0" marL="0">
-              <a:lnSpc>
-                <a:spcPts val="2160"/>
-              </a:lnSpc>
-              <a:spcBef>
-                <a:spcPts val="600"/>
-              </a:spcBef>
-              <a:spcAft>
-                <a:spcPts val="800"/>
-              </a:spcAft>
-              <a:buNone/>
-            </a:pPr>
-            <a:r>
-              <a:rPr lang="en-US" sz="1800" b="1" dirty="0">
-                <a:solidFill>
-                  <a:srgbClr val="FE4447"/>
-                </a:solidFill>
-                <a:latin typeface="Georgia" pitchFamily="34" charset="0"/>
-                <a:ea typeface="Georgia" pitchFamily="34" charset="-122"/>
-                <a:cs typeface="Georgia" pitchFamily="34" charset="-120"/>
-              </a:rPr>
-              <a:t>Learning objective</a:t>
-            </a:r>
-            <a:endParaRPr lang="en-US" sz="1800" dirty="0"/>
-          </a:p>
-        </p:txBody>
-      </p:sp>
-      <p:sp>
-        <p:nvSpPr>
-          <p:cNvPr id="6" name="Text 4"/>
-          <p:cNvSpPr/>
-          <p:nvPr/>
-        </p:nvSpPr>
-        <p:spPr>
-          <a:xfrm>
-            <a:off x="406301" y="1637854"/>
-            <a:ext cx="8498026" cy="426541"/>
-          </a:xfrm>
-          <a:prstGeom prst="rect">
-            <a:avLst/>
-          </a:prstGeom>
-          <a:noFill/>
-          <a:ln/>
-        </p:spPr>
-        <p:txBody>
-          <a:bodyPr wrap="square" lIns="0" tIns="0" rIns="0" bIns="0" rtlCol="0" anchor="t"/>
-          <a:lstStyle/>
-          <a:p>
-            <a:pPr algn="l" indent="0" marL="0">
-              <a:lnSpc>
-                <a:spcPts val="1680"/>
-              </a:lnSpc>
-              <a:spcBef>
-                <a:spcPts val="300"/>
-              </a:spcBef>
-              <a:spcAft>
-                <a:spcPts val="300"/>
-              </a:spcAft>
-              <a:buNone/>
-            </a:pPr>
-            <a:r>
-              <a:rPr lang="en-US" sz="1200" dirty="0">
-                <a:solidFill>
-                  <a:srgbClr val="1C2833"/>
-                </a:solidFill>
-                <a:latin typeface="Arial" pitchFamily="34" charset="0"/>
-                <a:ea typeface="Arial" pitchFamily="34" charset="-122"/>
-                <a:cs typeface="Arial" pitchFamily="34" charset="-120"/>
-              </a:rPr>
-              <a:t>By the end of this lesson, students will lock in their project choice and submit a one-page plan that names the project, the anchor module, the question, two candidate sources, the artefact format, the materials, and success criteria.</a:t>
-            </a:r>
-            <a:endParaRPr lang="en-US" sz="1200" dirty="0"/>
-          </a:p>
-        </p:txBody>
-      </p:sp>
-      <p:sp>
-        <p:nvSpPr>
-          <p:cNvPr id="7" name="Text 5"/>
-          <p:cNvSpPr/>
-          <p:nvPr/>
-        </p:nvSpPr>
-        <p:spPr>
-          <a:xfrm>
             <a:off x="406301" y="4434929"/>
             <a:ext cx="8498026" cy="213271"/>
           </a:xfrm>
@@ -2340,7 +2778,7 @@
                 <a:ea typeface="Georgia" pitchFamily="34" charset="-122"/>
                 <a:cs typeface="Georgia" pitchFamily="34" charset="-120"/>
               </a:rPr>
-              <a:t>Differentiation</a:t>
+              <a:t>Core (15 min) (cont.)</a:t>
             </a:r>
             <a:endParaRPr lang="en-US" sz="1800" dirty="0"/>
           </a:p>
@@ -2355,7 +2793,7 @@
         <p:spPr>
           <a:xfrm>
             <a:off x="634901" y="883593"/>
-            <a:ext cx="8102798" cy="937022"/>
+            <a:ext cx="8102798" cy="731341"/>
           </a:xfrm>
           <a:prstGeom prst="rect">
             <a:avLst/>
@@ -2378,26 +2816,6 @@
               <a:buChar char="•"/>
             </a:pPr>
             <a:r>
-              <a:rPr lang="en-US" sz="1200" b="1" dirty="0">
-                <a:solidFill>
-                  <a:srgbClr val="1C2833"/>
-                </a:solidFill>
-                <a:latin typeface="Arial" pitchFamily="34" charset="0"/>
-                <a:ea typeface="Arial" pitchFamily="34" charset="-122"/>
-                <a:cs typeface="Arial" pitchFamily="34" charset="-120"/>
-              </a:rPr>
-              <a:t>One tier up:</a:t>
-            </a:r>
-            <a:pPr algn="l" indent="0" marL="0">
-              <a:lnSpc>
-                <a:spcPts val="1620"/>
-              </a:lnSpc>
-              <a:spcAft>
-                <a:spcPts val="300"/>
-              </a:spcAft>
-              <a:buNone/>
-            </a:pPr>
-            <a:r>
               <a:rPr lang="en-US" sz="1200" dirty="0">
                 <a:solidFill>
                   <a:srgbClr val="1C2833"/>
@@ -2406,7 +2824,7 @@
                 <a:ea typeface="Arial" pitchFamily="34" charset="-122"/>
                 <a:cs typeface="Arial" pitchFamily="34" charset="-120"/>
               </a:rPr>
-              <a:t> If your plan is solid, draft a "stretch goal" — one extra thing you'll add if the core artefact comes in by Day 7. Keep it small.</a:t>
+              <a:t>Success criteria: (a) all 10 are real plants from my neighbourhood, (b) every card has a verifiable Ayurvedic note from the cache, (c) the deck is bound or stored together (not 10 loose pages).</a:t>
             </a:r>
             <a:endParaRPr lang="en-US" sz="1200" dirty="0"/>
           </a:p>
@@ -2422,26 +2840,6 @@
               <a:buChar char="•"/>
             </a:pPr>
             <a:r>
-              <a:rPr lang="en-US" sz="1200" b="1" dirty="0">
-                <a:solidFill>
-                  <a:srgbClr val="1C2833"/>
-                </a:solidFill>
-                <a:latin typeface="Arial" pitchFamily="34" charset="0"/>
-                <a:ea typeface="Arial" pitchFamily="34" charset="-122"/>
-                <a:cs typeface="Arial" pitchFamily="34" charset="-120"/>
-              </a:rPr>
-              <a:t>One tier down:</a:t>
-            </a:r>
-            <a:pPr algn="l" indent="0" marL="0">
-              <a:lnSpc>
-                <a:spcPts val="1620"/>
-              </a:lnSpc>
-              <a:spcAft>
-                <a:spcPts val="300"/>
-              </a:spcAft>
-              <a:buNone/>
-            </a:pPr>
-            <a:r>
               <a:rPr lang="en-US" sz="1200" dirty="0">
                 <a:solidFill>
                   <a:srgbClr val="1C2833"/>
@@ -2450,7 +2848,7 @@
                 <a:ea typeface="Arial" pitchFamily="34" charset="-122"/>
                 <a:cs typeface="Arial" pitchFamily="34" charset="-120"/>
               </a:rPr>
-              <a:t> If you're stuck on the question, ask: "What about this topic puzzles me?" That puzzle is your question. Write the puzzle, not a polished question.</a:t>
+              <a:t>Materials: cardstock or thick paper, glue, sketch pens, camera or phone.</a:t>
             </a:r>
             <a:endParaRPr lang="en-US" sz="1200" dirty="0"/>
           </a:p>
@@ -2608,7 +3006,7 @@
                 <a:ea typeface="Georgia" pitchFamily="34" charset="-122"/>
                 <a:cs typeface="Georgia" pitchFamily="34" charset="-120"/>
               </a:rPr>
-              <a:t>Teacher notes</a:t>
+              <a:t>Core (15 min) (cont.)</a:t>
             </a:r>
             <a:endParaRPr lang="en-US" sz="1800" dirty="0"/>
           </a:p>
@@ -2622,8 +3020,8 @@
         </p:nvSpPr>
         <p:spPr>
           <a:xfrm>
-            <a:off x="406301" y="870942"/>
-            <a:ext cx="8498026" cy="1066354"/>
+            <a:off x="634901" y="883593"/>
+            <a:ext cx="8102798" cy="281880"/>
           </a:xfrm>
           <a:prstGeom prst="rect">
             <a:avLst/>
@@ -2635,6 +3033,166 @@
           <a:bodyPr wrap="square" lIns="0" tIns="0" rIns="0" bIns="0" rtlCol="0" anchor="t"/>
           <a:lstStyle/>
           <a:p>
+            <a:pPr algn="l" marL="342900" indent="-342900">
+              <a:lnSpc>
+                <a:spcPts val="1620"/>
+              </a:lnSpc>
+              <a:spcAft>
+                <a:spcPts val="300"/>
+              </a:spcAft>
+              <a:buSzPct val="100000"/>
+              <a:buChar char="•"/>
+            </a:pPr>
+            <a:r>
+              <a:rPr lang="en-US" sz="1200" b="1" dirty="0">
+                <a:solidFill>
+                  <a:srgbClr val="1C2833"/>
+                </a:solidFill>
+                <a:latin typeface="Arial" pitchFamily="34" charset="0"/>
+                <a:ea typeface="Arial" pitchFamily="34" charset="-122"/>
+                <a:cs typeface="Arial" pitchFamily="34" charset="-120"/>
+              </a:rPr>
+              <a:t>The over-scoping trap.</a:t>
+            </a:r>
+            <a:pPr algn="l" indent="0" marL="0">
+              <a:lnSpc>
+                <a:spcPts val="1620"/>
+              </a:lnSpc>
+              <a:spcAft>
+                <a:spcPts val="300"/>
+              </a:spcAft>
+              <a:buNone/>
+            </a:pPr>
+            <a:r>
+              <a:rPr lang="en-US" sz="1200" dirty="0">
+                <a:solidFill>
+                  <a:srgbClr val="1C2833"/>
+                </a:solidFill>
+                <a:latin typeface="Arial" pitchFamily="34" charset="0"/>
+                <a:ea typeface="Arial" pitchFamily="34" charset="-122"/>
+                <a:cs typeface="Arial" pitchFamily="34" charset="-120"/>
+              </a:rPr>
+              <a:t> Three signs your plan is too big:</a:t>
+            </a:r>
+            <a:endParaRPr lang="en-US" sz="1200" dirty="0"/>
+          </a:p>
+        </p:txBody>
+      </p:sp>
+      <p:sp>
+        <p:nvSpPr>
+          <p:cNvPr id="5" name="Text 3"/>
+          <p:cNvSpPr/>
+          <p:nvPr/>
+        </p:nvSpPr>
+        <p:spPr>
+          <a:xfrm>
+            <a:off x="634901" y="1266974"/>
+            <a:ext cx="8102798" cy="769441"/>
+          </a:xfrm>
+          <a:prstGeom prst="rect">
+            <a:avLst/>
+          </a:prstGeom>
+          <a:noFill/>
+          <a:ln/>
+        </p:spPr>
+        <p:txBody>
+          <a:bodyPr wrap="square" lIns="0" tIns="0" rIns="0" bIns="0" rtlCol="0" anchor="t"/>
+          <a:lstStyle/>
+          <a:p>
+            <a:pPr algn="l" marL="342900" indent="-342900">
+              <a:lnSpc>
+                <a:spcPts val="1620"/>
+              </a:lnSpc>
+              <a:spcAft>
+                <a:spcPts val="300"/>
+              </a:spcAft>
+              <a:buSzPct val="100000"/>
+              <a:buChar char="•"/>
+            </a:pPr>
+            <a:r>
+              <a:rPr lang="en-US" sz="1200" dirty="0">
+                <a:solidFill>
+                  <a:srgbClr val="1C2833"/>
+                </a:solidFill>
+                <a:latin typeface="Arial" pitchFamily="34" charset="0"/>
+                <a:ea typeface="Arial" pitchFamily="34" charset="-122"/>
+                <a:cs typeface="Arial" pitchFamily="34" charset="-120"/>
+              </a:rPr>
+              <a:t>You can't list the materials in 30 seconds.</a:t>
+            </a:r>
+            <a:endParaRPr lang="en-US" sz="1200" dirty="0"/>
+          </a:p>
+          <a:p>
+            <a:pPr algn="l" marL="342900" indent="-342900">
+              <a:lnSpc>
+                <a:spcPts val="1620"/>
+              </a:lnSpc>
+              <a:spcAft>
+                <a:spcPts val="300"/>
+              </a:spcAft>
+              <a:buSzPct val="100000"/>
+              <a:buChar char="•"/>
+            </a:pPr>
+            <a:r>
+              <a:rPr lang="en-US" sz="1200" dirty="0">
+                <a:solidFill>
+                  <a:srgbClr val="1C2833"/>
+                </a:solidFill>
+                <a:latin typeface="Arial" pitchFamily="34" charset="0"/>
+                <a:ea typeface="Arial" pitchFamily="34" charset="-122"/>
+                <a:cs typeface="Arial" pitchFamily="34" charset="-120"/>
+              </a:rPr>
+              <a:t>You can't say what's done in fewer than 5 sentences.</a:t>
+            </a:r>
+            <a:endParaRPr lang="en-US" sz="1200" dirty="0"/>
+          </a:p>
+          <a:p>
+            <a:pPr algn="l" marL="342900" indent="-342900">
+              <a:lnSpc>
+                <a:spcPts val="1620"/>
+              </a:lnSpc>
+              <a:spcAft>
+                <a:spcPts val="300"/>
+              </a:spcAft>
+              <a:buSzPct val="100000"/>
+              <a:buChar char="•"/>
+            </a:pPr>
+            <a:r>
+              <a:rPr lang="en-US" sz="1200" dirty="0">
+                <a:solidFill>
+                  <a:srgbClr val="1C2833"/>
+                </a:solidFill>
+                <a:latin typeface="Arial" pitchFamily="34" charset="0"/>
+                <a:ea typeface="Arial" pitchFamily="34" charset="-122"/>
+                <a:cs typeface="Arial" pitchFamily="34" charset="-120"/>
+              </a:rPr>
+              <a:t>You'd need an extra week to finish.</a:t>
+            </a:r>
+            <a:endParaRPr lang="en-US" sz="1200" dirty="0"/>
+          </a:p>
+        </p:txBody>
+      </p:sp>
+      <p:sp>
+        <p:nvSpPr>
+          <p:cNvPr id="6" name="Text 4"/>
+          <p:cNvSpPr/>
+          <p:nvPr/>
+        </p:nvSpPr>
+        <p:spPr>
+          <a:xfrm>
+            <a:off x="406301" y="2125266"/>
+            <a:ext cx="8498026" cy="213271"/>
+          </a:xfrm>
+          <a:prstGeom prst="rect">
+            <a:avLst/>
+          </a:prstGeom>
+          <a:noFill/>
+          <a:ln/>
+        </p:spPr>
+        <p:txBody>
+          <a:bodyPr wrap="square" lIns="0" tIns="0" rIns="0" bIns="0" rtlCol="0" anchor="t"/>
+          <a:lstStyle/>
+          <a:p>
             <a:pPr algn="l" indent="0" marL="0">
               <a:lnSpc>
                 <a:spcPts val="1680"/>
@@ -2656,7 +3214,7 @@
                 <a:ea typeface="Arial" pitchFamily="34" charset="-122"/>
                 <a:cs typeface="Arial" pitchFamily="34" charset="-120"/>
               </a:rPr>
-              <a:t>– Read every plan tonight. Mark each with: ✓ (good to go), ? (need a 5-min check-in tomorrow), or ✗ (re-scope required). – The most common over-scope: Project 7 (sustainability audit). It is </a:t>
+              <a:t>"If any of these are true, </a:t>
             </a:r>
             <a:pPr algn="l" indent="0" marL="0">
               <a:lnSpc>
@@ -2679,7 +3237,7 @@
                 <a:ea typeface="Arial" pitchFamily="34" charset="-122"/>
                 <a:cs typeface="Arial" pitchFamily="34" charset="-120"/>
               </a:rPr>
-              <a:t>not</a:t>
+              <a:t>cut your project in half</a:t>
             </a:r>
             <a:pPr algn="l" indent="0" marL="0">
               <a:lnSpc>
@@ -2702,7 +3260,7 @@
                 <a:ea typeface="Arial" pitchFamily="34" charset="-122"/>
                 <a:cs typeface="Arial" pitchFamily="34" charset="-120"/>
               </a:rPr>
-              <a:t> a school-wide audit. Pick ONE station (water at the canteen; paper waste in one classroom; light usage in one corridor). Cut hard. – The most common under-scope: Project 8 (doṣa self-study) reduced to "I will write about myself." Push them to specify what they'll observe each day. – Save 10 minutes at the end of the day to read all plans before leaving school. Don't take this home — it's class work.</a:t>
+              <a:t>. A small finished piece beats a large half-finished one."</a:t>
             </a:r>
             <a:endParaRPr lang="en-US" sz="1200" dirty="0"/>
           </a:p>
@@ -2710,7 +3268,7 @@
       </p:sp>
       <p:sp>
         <p:nvSpPr>
-          <p:cNvPr id="5" name="Text 3"/>
+          <p:cNvPr id="7" name="Text 5"/>
           <p:cNvSpPr/>
           <p:nvPr/>
         </p:nvSpPr>
@@ -2860,7 +3418,7 @@
                 <a:ea typeface="Georgia" pitchFamily="34" charset="-122"/>
                 <a:cs typeface="Georgia" pitchFamily="34" charset="-120"/>
               </a:rPr>
-              <a:t>Citation(s) used in this lesson</a:t>
+              <a:t>Activity (20 min) — Write the plan</a:t>
             </a:r>
             <a:endParaRPr lang="en-US" sz="1800" dirty="0"/>
           </a:p>
@@ -2874,8 +3432,8 @@
         </p:nvSpPr>
         <p:spPr>
           <a:xfrm>
-            <a:off x="406301" y="870942"/>
-            <a:ext cx="8498026" cy="222796"/>
+            <a:off x="634901" y="883593"/>
+            <a:ext cx="8102798" cy="731341"/>
           </a:xfrm>
           <a:prstGeom prst="rect">
             <a:avLst/>
@@ -2887,6 +3445,156 @@
           <a:bodyPr wrap="square" lIns="0" tIns="0" rIns="0" bIns="0" rtlCol="0" anchor="t"/>
           <a:lstStyle/>
           <a:p>
+            <a:pPr algn="l" marL="342900" indent="-342900">
+              <a:lnSpc>
+                <a:spcPts val="1620"/>
+              </a:lnSpc>
+              <a:spcAft>
+                <a:spcPts val="300"/>
+              </a:spcAft>
+              <a:buSzPct val="100000"/>
+              <a:buChar char="•"/>
+            </a:pPr>
+            <a:r>
+              <a:rPr lang="en-US" sz="1200" dirty="0">
+                <a:solidFill>
+                  <a:srgbClr val="1C2833"/>
+                </a:solidFill>
+                <a:latin typeface="Arial" pitchFamily="34" charset="0"/>
+                <a:ea typeface="Arial" pitchFamily="34" charset="-122"/>
+                <a:cs typeface="Arial" pitchFamily="34" charset="-120"/>
+              </a:rPr>
+              <a:t>18 minutes silent writing on the template.</a:t>
+            </a:r>
+            <a:endParaRPr lang="en-US" sz="1200" dirty="0"/>
+          </a:p>
+          <a:p>
+            <a:pPr algn="l" marL="342900" indent="-342900">
+              <a:lnSpc>
+                <a:spcPts val="1620"/>
+              </a:lnSpc>
+              <a:spcAft>
+                <a:spcPts val="300"/>
+              </a:spcAft>
+              <a:buSzPct val="100000"/>
+              <a:buChar char="•"/>
+            </a:pPr>
+            <a:r>
+              <a:rPr lang="en-US" sz="1200" dirty="0">
+                <a:solidFill>
+                  <a:srgbClr val="1C2833"/>
+                </a:solidFill>
+                <a:latin typeface="Arial" pitchFamily="34" charset="0"/>
+                <a:ea typeface="Arial" pitchFamily="34" charset="-122"/>
+                <a:cs typeface="Arial" pitchFamily="34" charset="-120"/>
+              </a:rPr>
+              <a:t>Last 2 minutes: pair-swap. Read your partner's plan. On a sticky note, write </a:t>
+            </a:r>
+            <a:pPr algn="l" indent="0" marL="0">
+              <a:lnSpc>
+                <a:spcPts val="1620"/>
+              </a:lnSpc>
+              <a:spcAft>
+                <a:spcPts val="300"/>
+              </a:spcAft>
+              <a:buNone/>
+            </a:pPr>
+            <a:r>
+              <a:rPr lang="en-US" sz="1200" i="1" dirty="0">
+                <a:solidFill>
+                  <a:srgbClr val="1C2833"/>
+                </a:solidFill>
+                <a:latin typeface="Arial" pitchFamily="34" charset="0"/>
+                <a:ea typeface="Arial" pitchFamily="34" charset="-122"/>
+                <a:cs typeface="Arial" pitchFamily="34" charset="-120"/>
+              </a:rPr>
+              <a:t>one thing that's clear</a:t>
+            </a:r>
+            <a:pPr algn="l" indent="0" marL="0">
+              <a:lnSpc>
+                <a:spcPts val="1620"/>
+              </a:lnSpc>
+              <a:spcAft>
+                <a:spcPts val="300"/>
+              </a:spcAft>
+              <a:buNone/>
+            </a:pPr>
+            <a:r>
+              <a:rPr lang="en-US" sz="1200" dirty="0">
+                <a:solidFill>
+                  <a:srgbClr val="1C2833"/>
+                </a:solidFill>
+                <a:latin typeface="Arial" pitchFamily="34" charset="0"/>
+                <a:ea typeface="Arial" pitchFamily="34" charset="-122"/>
+                <a:cs typeface="Arial" pitchFamily="34" charset="-120"/>
+              </a:rPr>
+              <a:t> and </a:t>
+            </a:r>
+            <a:pPr algn="l" indent="0" marL="0">
+              <a:lnSpc>
+                <a:spcPts val="1620"/>
+              </a:lnSpc>
+              <a:spcAft>
+                <a:spcPts val="300"/>
+              </a:spcAft>
+              <a:buNone/>
+            </a:pPr>
+            <a:r>
+              <a:rPr lang="en-US" sz="1200" i="1" dirty="0">
+                <a:solidFill>
+                  <a:srgbClr val="1C2833"/>
+                </a:solidFill>
+                <a:latin typeface="Arial" pitchFamily="34" charset="0"/>
+                <a:ea typeface="Arial" pitchFamily="34" charset="-122"/>
+                <a:cs typeface="Arial" pitchFamily="34" charset="-120"/>
+              </a:rPr>
+              <a:t>one thing that's unclear</a:t>
+            </a:r>
+            <a:pPr algn="l" indent="0" marL="0">
+              <a:lnSpc>
+                <a:spcPts val="1620"/>
+              </a:lnSpc>
+              <a:spcAft>
+                <a:spcPts val="300"/>
+              </a:spcAft>
+              <a:buNone/>
+            </a:pPr>
+            <a:r>
+              <a:rPr lang="en-US" sz="1200" dirty="0">
+                <a:solidFill>
+                  <a:srgbClr val="1C2833"/>
+                </a:solidFill>
+                <a:latin typeface="Arial" pitchFamily="34" charset="0"/>
+                <a:ea typeface="Arial" pitchFamily="34" charset="-122"/>
+                <a:cs typeface="Arial" pitchFamily="34" charset="-120"/>
+              </a:rPr>
+              <a:t>. Hand the sticky back.</a:t>
+            </a:r>
+            <a:endParaRPr lang="en-US" sz="1200" dirty="0"/>
+          </a:p>
+        </p:txBody>
+      </p:sp>
+      <p:sp>
+        <p:nvSpPr>
+          <p:cNvPr id="5" name="Text 3"/>
+          <p:cNvSpPr/>
+          <p:nvPr/>
+        </p:nvSpPr>
+        <p:spPr>
+          <a:xfrm>
+            <a:off x="406301" y="4434929"/>
+            <a:ext cx="8498026" cy="213271"/>
+          </a:xfrm>
+          <a:prstGeom prst="rect">
+            <a:avLst/>
+          </a:prstGeom>
+          <a:noFill/>
+          <a:ln/>
+        </p:spPr>
+        <p:txBody>
+          <a:bodyPr wrap="square" lIns="0" tIns="0" rIns="0" bIns="0" rtlCol="0" anchor="t"/>
+          <a:lstStyle/>
+          <a:p>
             <a:pPr algn="l" indent="0" marL="0">
               <a:lnSpc>
                 <a:spcPts val="1680"/>
@@ -2908,8 +3616,317 @@
                 <a:ea typeface="Arial" pitchFamily="34" charset="-122"/>
                 <a:cs typeface="Arial" pitchFamily="34" charset="-120"/>
               </a:rPr>
-              <a:t>– Sanskrit term </a:t>
-            </a:r>
+              <a:t>Middle ·  · IKS Curriculum</a:t>
+            </a:r>
+            <a:endParaRPr lang="en-US" sz="1200" dirty="0"/>
+          </a:p>
+        </p:txBody>
+      </p:sp>
+    </p:spTree>
+  </p:cSld>
+  <p:clrMapOvr>
+    <a:masterClrMapping/>
+  </p:clrMapOvr>
+</p:sld>
+</file>
+
+<file path=ppt/slides/slide13.xml><?xml version="1.0" encoding="utf-8"?>
+<p:sld xmlns:a="http://schemas.openxmlformats.org/drawingml/2006/main" xmlns:r="http://schemas.openxmlformats.org/officeDocument/2006/relationships" xmlns:p="http://schemas.openxmlformats.org/presentationml/2006/main">
+  <p:cSld name="Slide 13">
+    <p:bg>
+      <p:bgPr>
+        <a:solidFill>
+          <a:srgbClr val="FFFFFF"/>
+        </a:solidFill>
+      </p:bgPr>
+    </p:bg>
+    <p:spTree>
+      <p:nvGrpSpPr>
+        <p:cNvPr id="1" name=""/>
+        <p:cNvGrpSpPr/>
+        <p:nvPr/>
+      </p:nvGrpSpPr>
+      <p:grpSpPr>
+        <a:xfrm>
+          <a:off x="0" y="0"/>
+          <a:ext cx="0" cy="0"/>
+          <a:chOff x="0" y="0"/>
+          <a:chExt cx="0" cy="0"/>
+        </a:xfrm>
+      </p:grpSpPr>
+      <p:sp>
+        <p:nvSpPr>
+          <p:cNvPr id="2" name="Text 0"/>
+          <p:cNvSpPr/>
+          <p:nvPr/>
+        </p:nvSpPr>
+        <p:spPr>
+          <a:xfrm>
+            <a:off x="0" y="0"/>
+            <a:ext cx="9144000" cy="101501"/>
+          </a:xfrm>
+          <a:prstGeom prst="rect">
+            <a:avLst/>
+          </a:prstGeom>
+          <a:solidFill>
+            <a:srgbClr val="277884"/>
+          </a:solidFill>
+          <a:ln/>
+        </p:spPr>
+        <p:txBody>
+          <a:bodyPr wrap="square" rtlCol="0" anchor="ctr"/>
+          <a:lstStyle/>
+          <a:p>
+            <a:pPr indent="0" marL="0">
+              <a:buNone/>
+            </a:pPr>
+            <a:endParaRPr lang="en-US" dirty="0"/>
+          </a:p>
+        </p:txBody>
+      </p:sp>
+      <p:sp>
+        <p:nvSpPr>
+          <p:cNvPr id="3" name="Text 1"/>
+          <p:cNvSpPr/>
+          <p:nvPr/>
+        </p:nvSpPr>
+        <p:spPr>
+          <a:xfrm>
+            <a:off x="406301" y="457051"/>
+            <a:ext cx="8498026" cy="274290"/>
+          </a:xfrm>
+          <a:prstGeom prst="rect">
+            <a:avLst/>
+          </a:prstGeom>
+          <a:noFill/>
+          <a:ln/>
+        </p:spPr>
+        <p:txBody>
+          <a:bodyPr wrap="square" lIns="0" tIns="0" rIns="0" bIns="0" rtlCol="0" anchor="t"/>
+          <a:lstStyle/>
+          <a:p>
+            <a:pPr algn="l" indent="0" marL="0">
+              <a:lnSpc>
+                <a:spcPts val="2160"/>
+              </a:lnSpc>
+              <a:spcBef>
+                <a:spcPts val="600"/>
+              </a:spcBef>
+              <a:spcAft>
+                <a:spcPts val="800"/>
+              </a:spcAft>
+              <a:buNone/>
+            </a:pPr>
+            <a:r>
+              <a:rPr lang="en-US" sz="1800" b="1" dirty="0">
+                <a:solidFill>
+                  <a:srgbClr val="FE4447"/>
+                </a:solidFill>
+                <a:latin typeface="Georgia" pitchFamily="34" charset="0"/>
+                <a:ea typeface="Georgia" pitchFamily="34" charset="-122"/>
+                <a:cs typeface="Georgia" pitchFamily="34" charset="-120"/>
+              </a:rPr>
+              <a:t>Wrap-up (5 min)</a:t>
+            </a:r>
+            <a:endParaRPr lang="en-US" sz="1800" dirty="0"/>
+          </a:p>
+        </p:txBody>
+      </p:sp>
+      <p:sp>
+        <p:nvSpPr>
+          <p:cNvPr id="4" name="Text 2"/>
+          <p:cNvSpPr/>
+          <p:nvPr/>
+        </p:nvSpPr>
+        <p:spPr>
+          <a:xfrm>
+            <a:off x="634901" y="883593"/>
+            <a:ext cx="8102798" cy="994172"/>
+          </a:xfrm>
+          <a:prstGeom prst="rect">
+            <a:avLst/>
+          </a:prstGeom>
+          <a:noFill/>
+          <a:ln/>
+        </p:spPr>
+        <p:txBody>
+          <a:bodyPr wrap="square" lIns="0" tIns="0" rIns="0" bIns="0" rtlCol="0" anchor="t"/>
+          <a:lstStyle/>
+          <a:p>
+            <a:pPr algn="l" marL="342900" indent="-342900">
+              <a:lnSpc>
+                <a:spcPts val="1620"/>
+              </a:lnSpc>
+              <a:spcAft>
+                <a:spcPts val="300"/>
+              </a:spcAft>
+              <a:buSzPct val="100000"/>
+              <a:buChar char="•"/>
+            </a:pPr>
+            <a:r>
+              <a:rPr lang="en-US" sz="1200" b="1" dirty="0">
+                <a:solidFill>
+                  <a:srgbClr val="1C2833"/>
+                </a:solidFill>
+                <a:latin typeface="Arial" pitchFamily="34" charset="0"/>
+                <a:ea typeface="Arial" pitchFamily="34" charset="-122"/>
+                <a:cs typeface="Arial" pitchFamily="34" charset="-120"/>
+              </a:rPr>
+              <a:t>Submit plans into the in-tray</a:t>
+            </a:r>
+            <a:pPr algn="l" indent="0" marL="0">
+              <a:lnSpc>
+                <a:spcPts val="1620"/>
+              </a:lnSpc>
+              <a:spcAft>
+                <a:spcPts val="300"/>
+              </a:spcAft>
+              <a:buNone/>
+            </a:pPr>
+            <a:r>
+              <a:rPr lang="en-US" sz="1200" dirty="0">
+                <a:solidFill>
+                  <a:srgbClr val="1C2833"/>
+                </a:solidFill>
+                <a:latin typeface="Arial" pitchFamily="34" charset="0"/>
+                <a:ea typeface="Arial" pitchFamily="34" charset="-122"/>
+                <a:cs typeface="Arial" pitchFamily="34" charset="-120"/>
+              </a:rPr>
+              <a:t> as you leave. Teacher reads tonight; flagged plans get a 10-min check-in tomorrow morning.</a:t>
+            </a:r>
+            <a:endParaRPr lang="en-US" sz="1200" dirty="0"/>
+          </a:p>
+          <a:p>
+            <a:pPr algn="l" marL="342900" indent="-342900">
+              <a:lnSpc>
+                <a:spcPts val="1620"/>
+              </a:lnSpc>
+              <a:spcAft>
+                <a:spcPts val="300"/>
+              </a:spcAft>
+              <a:buSzPct val="100000"/>
+              <a:buChar char="•"/>
+            </a:pPr>
+            <a:r>
+              <a:rPr lang="en-US" sz="1200" dirty="0">
+                <a:solidFill>
+                  <a:srgbClr val="1C2833"/>
+                </a:solidFill>
+                <a:latin typeface="Arial" pitchFamily="34" charset="0"/>
+                <a:ea typeface="Arial" pitchFamily="34" charset="-122"/>
+                <a:cs typeface="Arial" pitchFamily="34" charset="-120"/>
+              </a:rPr>
+              <a:t>Journal entry: "Today I chose ___ . The hardest part of the plan was ___ ."</a:t>
+            </a:r>
+            <a:endParaRPr lang="en-US" sz="1200" dirty="0"/>
+          </a:p>
+          <a:p>
+            <a:pPr algn="l" marL="342900" indent="-342900">
+              <a:lnSpc>
+                <a:spcPts val="1620"/>
+              </a:lnSpc>
+              <a:spcAft>
+                <a:spcPts val="300"/>
+              </a:spcAft>
+              <a:buSzPct val="100000"/>
+              <a:buChar char="•"/>
+            </a:pPr>
+            <a:r>
+              <a:rPr lang="en-US" sz="1200" dirty="0">
+                <a:solidFill>
+                  <a:srgbClr val="1C2833"/>
+                </a:solidFill>
+                <a:latin typeface="Arial" pitchFamily="34" charset="0"/>
+                <a:ea typeface="Arial" pitchFamily="34" charset="-122"/>
+                <a:cs typeface="Arial" pitchFamily="34" charset="-120"/>
+              </a:rPr>
+              <a:t>Preview: </a:t>
+            </a:r>
+            <a:pPr algn="l" indent="0" marL="0">
+              <a:lnSpc>
+                <a:spcPts val="1620"/>
+              </a:lnSpc>
+              <a:spcAft>
+                <a:spcPts val="300"/>
+              </a:spcAft>
+              <a:buNone/>
+            </a:pPr>
+            <a:r>
+              <a:rPr lang="en-US" sz="1200" i="1" dirty="0">
+                <a:solidFill>
+                  <a:srgbClr val="1C2833"/>
+                </a:solidFill>
+                <a:latin typeface="Arial" pitchFamily="34" charset="0"/>
+                <a:ea typeface="Arial" pitchFamily="34" charset="-122"/>
+                <a:cs typeface="Arial" pitchFamily="34" charset="-120"/>
+              </a:rPr>
+              <a:t>"Tomorrow you start research. Bring your anchor module's </a:t>
+            </a:r>
+            <a:pPr algn="l" indent="0" marL="0">
+              <a:lnSpc>
+                <a:spcPts val="1620"/>
+              </a:lnSpc>
+              <a:spcAft>
+                <a:spcPts val="300"/>
+              </a:spcAft>
+              <a:buNone/>
+            </a:pPr>
+            <a:r>
+              <a:rPr lang="en-US" sz="1200" i="1" dirty="0">
+                <a:solidFill>
+                  <a:srgbClr val="1C2833"/>
+                </a:solidFill>
+                <a:latin typeface="Arial" pitchFamily="34" charset="0"/>
+                <a:ea typeface="Arial" pitchFamily="34" charset="-122"/>
+                <a:cs typeface="Arial" pitchFamily="34" charset="-120"/>
+              </a:rPr>
+              <a:t>sources.md</a:t>
+            </a:r>
+            <a:pPr algn="l" indent="0" marL="0">
+              <a:lnSpc>
+                <a:spcPts val="1620"/>
+              </a:lnSpc>
+              <a:spcAft>
+                <a:spcPts val="300"/>
+              </a:spcAft>
+              <a:buNone/>
+            </a:pPr>
+            <a:r>
+              <a:rPr lang="en-US" sz="1200" i="1" dirty="0">
+                <a:solidFill>
+                  <a:srgbClr val="1C2833"/>
+                </a:solidFill>
+                <a:latin typeface="Arial" pitchFamily="34" charset="0"/>
+                <a:ea typeface="Arial" pitchFamily="34" charset="-122"/>
+                <a:cs typeface="Arial" pitchFamily="34" charset="-120"/>
+              </a:rPr>
+              <a:t> printout, and your notebook."</a:t>
+            </a:r>
+            <a:endParaRPr lang="en-US" sz="1200" dirty="0"/>
+          </a:p>
+        </p:txBody>
+      </p:sp>
+      <p:sp>
+        <p:nvSpPr>
+          <p:cNvPr id="5" name="Text 3"/>
+          <p:cNvSpPr/>
+          <p:nvPr/>
+        </p:nvSpPr>
+        <p:spPr>
+          <a:xfrm>
+            <a:off x="406301" y="4434929"/>
+            <a:ext cx="8498026" cy="213271"/>
+          </a:xfrm>
+          <a:prstGeom prst="rect">
+            <a:avLst/>
+          </a:prstGeom>
+          <a:noFill/>
+          <a:ln/>
+        </p:spPr>
+        <p:txBody>
+          <a:bodyPr wrap="square" lIns="0" tIns="0" rIns="0" bIns="0" rtlCol="0" anchor="t"/>
+          <a:lstStyle/>
+          <a:p>
             <a:pPr algn="l" indent="0" marL="0">
               <a:lnSpc>
                 <a:spcPts val="1680"/>
@@ -2923,6 +3940,1192 @@
               <a:buNone/>
             </a:pPr>
             <a:r>
+              <a:rPr lang="en-US" sz="1200" dirty="0">
+                <a:solidFill>
+                  <a:srgbClr val="1C2833"/>
+                </a:solidFill>
+                <a:latin typeface="Arial" pitchFamily="34" charset="0"/>
+                <a:ea typeface="Arial" pitchFamily="34" charset="-122"/>
+                <a:cs typeface="Arial" pitchFamily="34" charset="-120"/>
+              </a:rPr>
+              <a:t>Middle ·  · IKS Curriculum</a:t>
+            </a:r>
+            <a:endParaRPr lang="en-US" sz="1200" dirty="0"/>
+          </a:p>
+        </p:txBody>
+      </p:sp>
+    </p:spTree>
+  </p:cSld>
+  <p:clrMapOvr>
+    <a:masterClrMapping/>
+  </p:clrMapOvr>
+</p:sld>
+</file>
+
+<file path=ppt/slides/slide14.xml><?xml version="1.0" encoding="utf-8"?>
+<p:sld xmlns:a="http://schemas.openxmlformats.org/drawingml/2006/main" xmlns:r="http://schemas.openxmlformats.org/officeDocument/2006/relationships" xmlns:p="http://schemas.openxmlformats.org/presentationml/2006/main">
+  <p:cSld name="Slide 14">
+    <p:bg>
+      <p:bgPr>
+        <a:solidFill>
+          <a:srgbClr val="FFFFFF"/>
+        </a:solidFill>
+      </p:bgPr>
+    </p:bg>
+    <p:spTree>
+      <p:nvGrpSpPr>
+        <p:cNvPr id="1" name=""/>
+        <p:cNvGrpSpPr/>
+        <p:nvPr/>
+      </p:nvGrpSpPr>
+      <p:grpSpPr>
+        <a:xfrm>
+          <a:off x="0" y="0"/>
+          <a:ext cx="0" cy="0"/>
+          <a:chOff x="0" y="0"/>
+          <a:chExt cx="0" cy="0"/>
+        </a:xfrm>
+      </p:grpSpPr>
+      <p:sp>
+        <p:nvSpPr>
+          <p:cNvPr id="2" name="Text 0"/>
+          <p:cNvSpPr/>
+          <p:nvPr/>
+        </p:nvSpPr>
+        <p:spPr>
+          <a:xfrm>
+            <a:off x="0" y="0"/>
+            <a:ext cx="9144000" cy="101501"/>
+          </a:xfrm>
+          <a:prstGeom prst="rect">
+            <a:avLst/>
+          </a:prstGeom>
+          <a:solidFill>
+            <a:srgbClr val="277884"/>
+          </a:solidFill>
+          <a:ln/>
+        </p:spPr>
+        <p:txBody>
+          <a:bodyPr wrap="square" rtlCol="0" anchor="ctr"/>
+          <a:lstStyle/>
+          <a:p>
+            <a:pPr indent="0" marL="0">
+              <a:buNone/>
+            </a:pPr>
+            <a:endParaRPr lang="en-US" dirty="0"/>
+          </a:p>
+        </p:txBody>
+      </p:sp>
+      <p:sp>
+        <p:nvSpPr>
+          <p:cNvPr id="3" name="Text 1"/>
+          <p:cNvSpPr/>
+          <p:nvPr/>
+        </p:nvSpPr>
+        <p:spPr>
+          <a:xfrm>
+            <a:off x="406301" y="457051"/>
+            <a:ext cx="8498026" cy="274290"/>
+          </a:xfrm>
+          <a:prstGeom prst="rect">
+            <a:avLst/>
+          </a:prstGeom>
+          <a:noFill/>
+          <a:ln/>
+        </p:spPr>
+        <p:txBody>
+          <a:bodyPr wrap="square" lIns="0" tIns="0" rIns="0" bIns="0" rtlCol="0" anchor="t"/>
+          <a:lstStyle/>
+          <a:p>
+            <a:pPr algn="l" indent="0" marL="0">
+              <a:lnSpc>
+                <a:spcPts val="2160"/>
+              </a:lnSpc>
+              <a:spcBef>
+                <a:spcPts val="600"/>
+              </a:spcBef>
+              <a:spcAft>
+                <a:spcPts val="800"/>
+              </a:spcAft>
+              <a:buNone/>
+            </a:pPr>
+            <a:r>
+              <a:rPr lang="en-US" sz="1800" b="1" dirty="0">
+                <a:solidFill>
+                  <a:srgbClr val="FE4447"/>
+                </a:solidFill>
+                <a:latin typeface="Georgia" pitchFamily="34" charset="0"/>
+                <a:ea typeface="Georgia" pitchFamily="34" charset="-122"/>
+                <a:cs typeface="Georgia" pitchFamily="34" charset="-120"/>
+              </a:rPr>
+              <a:t>Student-facing content</a:t>
+            </a:r>
+            <a:endParaRPr lang="en-US" sz="1800" dirty="0"/>
+          </a:p>
+        </p:txBody>
+      </p:sp>
+      <p:sp>
+        <p:nvSpPr>
+          <p:cNvPr id="4" name="Text 2"/>
+          <p:cNvSpPr/>
+          <p:nvPr/>
+        </p:nvSpPr>
+        <p:spPr>
+          <a:xfrm>
+            <a:off x="406301" y="883593"/>
+            <a:ext cx="8331398" cy="1881187"/>
+          </a:xfrm>
+          <a:prstGeom prst="rect">
+            <a:avLst/>
+          </a:prstGeom>
+          <a:solidFill>
+            <a:srgbClr val="F4F8F9"/>
+          </a:solidFill>
+          <a:ln/>
+        </p:spPr>
+        <p:txBody>
+          <a:bodyPr wrap="square" rtlCol="0" anchor="ctr"/>
+          <a:lstStyle/>
+          <a:p>
+            <a:pPr indent="0" marL="0">
+              <a:buNone/>
+            </a:pPr>
+            <a:endParaRPr lang="en-US" dirty="0"/>
+          </a:p>
+        </p:txBody>
+      </p:sp>
+      <p:sp>
+        <p:nvSpPr>
+          <p:cNvPr id="5" name="Shape 3"/>
+          <p:cNvSpPr/>
+          <p:nvPr/>
+        </p:nvSpPr>
+        <p:spPr>
+          <a:xfrm>
+            <a:off x="434876" y="883593"/>
+            <a:ext cx="0" cy="1881187"/>
+          </a:xfrm>
+          <a:prstGeom prst="line">
+            <a:avLst/>
+          </a:prstGeom>
+          <a:noFill/>
+          <a:ln w="57150">
+            <a:solidFill>
+              <a:srgbClr val="FE4447"/>
+            </a:solidFill>
+            <a:prstDash val="solid"/>
+          </a:ln>
+        </p:spPr>
+      </p:sp>
+      <p:sp>
+        <p:nvSpPr>
+          <p:cNvPr id="6" name="Text 4"/>
+          <p:cNvSpPr/>
+          <p:nvPr/>
+        </p:nvSpPr>
+        <p:spPr>
+          <a:xfrm>
+            <a:off x="692051" y="1074093"/>
+            <a:ext cx="7973389" cy="230981"/>
+          </a:xfrm>
+          <a:prstGeom prst="rect">
+            <a:avLst/>
+          </a:prstGeom>
+          <a:noFill/>
+          <a:ln/>
+        </p:spPr>
+        <p:txBody>
+          <a:bodyPr wrap="square" lIns="0" tIns="0" rIns="0" bIns="0" rtlCol="0" anchor="t"/>
+          <a:lstStyle/>
+          <a:p>
+            <a:pPr algn="l" indent="0" marL="0">
+              <a:lnSpc>
+                <a:spcPts val="1820"/>
+              </a:lnSpc>
+              <a:spcBef>
+                <a:spcPts val="300"/>
+              </a:spcBef>
+              <a:spcAft>
+                <a:spcPts val="300"/>
+              </a:spcAft>
+              <a:buNone/>
+            </a:pPr>
+            <a:r>
+              <a:rPr lang="en-US" sz="1300" b="1" i="1" dirty="0">
+                <a:solidFill>
+                  <a:srgbClr val="1C2833"/>
+                </a:solidFill>
+                <a:latin typeface="Georgia" pitchFamily="34" charset="0"/>
+                <a:ea typeface="Georgia" pitchFamily="34" charset="-122"/>
+                <a:cs typeface="Georgia" pitchFamily="34" charset="-120"/>
+              </a:rPr>
+              <a:t>A project without a plan is a hope.</a:t>
+            </a:r>
+            <a:endParaRPr lang="en-US" sz="1300" dirty="0"/>
+          </a:p>
+        </p:txBody>
+      </p:sp>
+      <p:sp>
+        <p:nvSpPr>
+          <p:cNvPr id="7" name="Text 5"/>
+          <p:cNvSpPr/>
+          <p:nvPr/>
+        </p:nvSpPr>
+        <p:spPr>
+          <a:xfrm>
+            <a:off x="692051" y="1343174"/>
+            <a:ext cx="7973389" cy="230981"/>
+          </a:xfrm>
+          <a:prstGeom prst="rect">
+            <a:avLst/>
+          </a:prstGeom>
+          <a:noFill/>
+          <a:ln/>
+        </p:spPr>
+        <p:txBody>
+          <a:bodyPr wrap="square" lIns="0" tIns="0" rIns="0" bIns="0" rtlCol="0" anchor="t"/>
+          <a:lstStyle/>
+          <a:p>
+            <a:pPr algn="l" indent="0" marL="0">
+              <a:lnSpc>
+                <a:spcPts val="1820"/>
+              </a:lnSpc>
+              <a:spcBef>
+                <a:spcPts val="300"/>
+              </a:spcBef>
+              <a:spcAft>
+                <a:spcPts val="300"/>
+              </a:spcAft>
+              <a:buNone/>
+            </a:pPr>
+            <a:r>
+              <a:rPr lang="en-US" sz="1300" i="1" dirty="0">
+                <a:solidFill>
+                  <a:srgbClr val="1C2833"/>
+                </a:solidFill>
+                <a:latin typeface="Georgia" pitchFamily="34" charset="0"/>
+                <a:ea typeface="Georgia" pitchFamily="34" charset="-122"/>
+                <a:cs typeface="Georgia" pitchFamily="34" charset="-120"/>
+              </a:rPr>
+              <a:t>Today you write the plan. Six fields. One page. Submit before you leave.</a:t>
+            </a:r>
+            <a:endParaRPr lang="en-US" sz="1300" dirty="0"/>
+          </a:p>
+        </p:txBody>
+      </p:sp>
+      <p:sp>
+        <p:nvSpPr>
+          <p:cNvPr id="8" name="Text 6"/>
+          <p:cNvSpPr/>
+          <p:nvPr/>
+        </p:nvSpPr>
+        <p:spPr>
+          <a:xfrm>
+            <a:off x="692051" y="1612255"/>
+            <a:ext cx="7973389" cy="692944"/>
+          </a:xfrm>
+          <a:prstGeom prst="rect">
+            <a:avLst/>
+          </a:prstGeom>
+          <a:noFill/>
+          <a:ln/>
+        </p:spPr>
+        <p:txBody>
+          <a:bodyPr wrap="square" lIns="0" tIns="0" rIns="0" bIns="0" rtlCol="0" anchor="t"/>
+          <a:lstStyle/>
+          <a:p>
+            <a:pPr algn="l" indent="0" marL="0">
+              <a:lnSpc>
+                <a:spcPts val="1820"/>
+              </a:lnSpc>
+              <a:spcBef>
+                <a:spcPts val="300"/>
+              </a:spcBef>
+              <a:spcAft>
+                <a:spcPts val="300"/>
+              </a:spcAft>
+              <a:buNone/>
+            </a:pPr>
+            <a:r>
+              <a:rPr lang="en-US" sz="1300" i="1" dirty="0">
+                <a:solidFill>
+                  <a:srgbClr val="1C2833"/>
+                </a:solidFill>
+                <a:latin typeface="Georgia" pitchFamily="34" charset="0"/>
+                <a:ea typeface="Georgia" pitchFamily="34" charset="-122"/>
+                <a:cs typeface="Georgia" pitchFamily="34" charset="-120"/>
+              </a:rPr>
+              <a:t>| Field | Your answer | |-------|-------------| | Project chosen | | | Anchor module | | | Driving question (1 sentence) | | | Two candidate sources | | | Artefact format | | | Success criteria (3 bullets) | | | Materials needed | |</a:t>
+            </a:r>
+            <a:endParaRPr lang="en-US" sz="1300" dirty="0"/>
+          </a:p>
+        </p:txBody>
+      </p:sp>
+      <p:sp>
+        <p:nvSpPr>
+          <p:cNvPr id="9" name="Text 7"/>
+          <p:cNvSpPr/>
+          <p:nvPr/>
+        </p:nvSpPr>
+        <p:spPr>
+          <a:xfrm>
+            <a:off x="692051" y="2343299"/>
+            <a:ext cx="7973389" cy="230981"/>
+          </a:xfrm>
+          <a:prstGeom prst="rect">
+            <a:avLst/>
+          </a:prstGeom>
+          <a:noFill/>
+          <a:ln/>
+        </p:spPr>
+        <p:txBody>
+          <a:bodyPr wrap="square" lIns="0" tIns="0" rIns="0" bIns="0" rtlCol="0" anchor="t"/>
+          <a:lstStyle/>
+          <a:p>
+            <a:pPr algn="l" indent="0" marL="0">
+              <a:lnSpc>
+                <a:spcPts val="1820"/>
+              </a:lnSpc>
+              <a:spcBef>
+                <a:spcPts val="300"/>
+              </a:spcBef>
+              <a:spcAft>
+                <a:spcPts val="300"/>
+              </a:spcAft>
+              <a:buNone/>
+            </a:pPr>
+            <a:r>
+              <a:rPr lang="en-US" sz="1300" b="1" i="1" dirty="0">
+                <a:solidFill>
+                  <a:srgbClr val="1C2833"/>
+                </a:solidFill>
+                <a:latin typeface="Georgia" pitchFamily="34" charset="0"/>
+                <a:ea typeface="Georgia" pitchFamily="34" charset="-122"/>
+                <a:cs typeface="Georgia" pitchFamily="34" charset="-120"/>
+              </a:rPr>
+              <a:t>Cut, don't pad.</a:t>
+            </a:r>
+            <a:pPr algn="l" indent="0" marL="0">
+              <a:lnSpc>
+                <a:spcPts val="1820"/>
+              </a:lnSpc>
+              <a:spcBef>
+                <a:spcPts val="300"/>
+              </a:spcBef>
+              <a:spcAft>
+                <a:spcPts val="300"/>
+              </a:spcAft>
+              <a:buNone/>
+            </a:pPr>
+            <a:r>
+              <a:rPr lang="en-US" sz="1300" dirty="0">
+                <a:solidFill>
+                  <a:srgbClr val="1C2833"/>
+                </a:solidFill>
+                <a:latin typeface="Georgia" pitchFamily="34" charset="0"/>
+                <a:ea typeface="Georgia" pitchFamily="34" charset="-122"/>
+                <a:cs typeface="Georgia" pitchFamily="34" charset="-120"/>
+              </a:rPr>
+              <a:t> A small finished project is better than a large unfinished one.</a:t>
+            </a:r>
+            <a:endParaRPr lang="en-US" sz="1300" dirty="0"/>
+          </a:p>
+        </p:txBody>
+      </p:sp>
+      <p:sp>
+        <p:nvSpPr>
+          <p:cNvPr id="10" name="Text 8"/>
+          <p:cNvSpPr/>
+          <p:nvPr/>
+        </p:nvSpPr>
+        <p:spPr>
+          <a:xfrm>
+            <a:off x="406301" y="4434929"/>
+            <a:ext cx="8498026" cy="213271"/>
+          </a:xfrm>
+          <a:prstGeom prst="rect">
+            <a:avLst/>
+          </a:prstGeom>
+          <a:noFill/>
+          <a:ln/>
+        </p:spPr>
+        <p:txBody>
+          <a:bodyPr wrap="square" lIns="0" tIns="0" rIns="0" bIns="0" rtlCol="0" anchor="t"/>
+          <a:lstStyle/>
+          <a:p>
+            <a:pPr algn="l" indent="0" marL="0">
+              <a:lnSpc>
+                <a:spcPts val="1680"/>
+              </a:lnSpc>
+              <a:spcBef>
+                <a:spcPts val="300"/>
+              </a:spcBef>
+              <a:spcAft>
+                <a:spcPts val="300"/>
+              </a:spcAft>
+              <a:buNone/>
+            </a:pPr>
+            <a:r>
+              <a:rPr lang="en-US" sz="1200" dirty="0">
+                <a:solidFill>
+                  <a:srgbClr val="1C2833"/>
+                </a:solidFill>
+                <a:latin typeface="Arial" pitchFamily="34" charset="0"/>
+                <a:ea typeface="Arial" pitchFamily="34" charset="-122"/>
+                <a:cs typeface="Arial" pitchFamily="34" charset="-120"/>
+              </a:rPr>
+              <a:t>Middle ·  · IKS Curriculum</a:t>
+            </a:r>
+            <a:endParaRPr lang="en-US" sz="1200" dirty="0"/>
+          </a:p>
+        </p:txBody>
+      </p:sp>
+    </p:spTree>
+  </p:cSld>
+  <p:clrMapOvr>
+    <a:masterClrMapping/>
+  </p:clrMapOvr>
+</p:sld>
+</file>
+
+<file path=ppt/slides/slide15.xml><?xml version="1.0" encoding="utf-8"?>
+<p:sld xmlns:a="http://schemas.openxmlformats.org/drawingml/2006/main" xmlns:r="http://schemas.openxmlformats.org/officeDocument/2006/relationships" xmlns:p="http://schemas.openxmlformats.org/presentationml/2006/main">
+  <p:cSld name="Slide 15">
+    <p:bg>
+      <p:bgPr>
+        <a:solidFill>
+          <a:srgbClr val="FFFFFF"/>
+        </a:solidFill>
+      </p:bgPr>
+    </p:bg>
+    <p:spTree>
+      <p:nvGrpSpPr>
+        <p:cNvPr id="1" name=""/>
+        <p:cNvGrpSpPr/>
+        <p:nvPr/>
+      </p:nvGrpSpPr>
+      <p:grpSpPr>
+        <a:xfrm>
+          <a:off x="0" y="0"/>
+          <a:ext cx="0" cy="0"/>
+          <a:chOff x="0" y="0"/>
+          <a:chExt cx="0" cy="0"/>
+        </a:xfrm>
+      </p:grpSpPr>
+      <p:sp>
+        <p:nvSpPr>
+          <p:cNvPr id="2" name="Text 0"/>
+          <p:cNvSpPr/>
+          <p:nvPr/>
+        </p:nvSpPr>
+        <p:spPr>
+          <a:xfrm>
+            <a:off x="0" y="0"/>
+            <a:ext cx="9144000" cy="101501"/>
+          </a:xfrm>
+          <a:prstGeom prst="rect">
+            <a:avLst/>
+          </a:prstGeom>
+          <a:solidFill>
+            <a:srgbClr val="277884"/>
+          </a:solidFill>
+          <a:ln/>
+        </p:spPr>
+        <p:txBody>
+          <a:bodyPr wrap="square" rtlCol="0" anchor="ctr"/>
+          <a:lstStyle/>
+          <a:p>
+            <a:pPr indent="0" marL="0">
+              <a:buNone/>
+            </a:pPr>
+            <a:endParaRPr lang="en-US" dirty="0"/>
+          </a:p>
+        </p:txBody>
+      </p:sp>
+      <p:sp>
+        <p:nvSpPr>
+          <p:cNvPr id="3" name="Text 1"/>
+          <p:cNvSpPr/>
+          <p:nvPr/>
+        </p:nvSpPr>
+        <p:spPr>
+          <a:xfrm>
+            <a:off x="406301" y="457051"/>
+            <a:ext cx="8498026" cy="274290"/>
+          </a:xfrm>
+          <a:prstGeom prst="rect">
+            <a:avLst/>
+          </a:prstGeom>
+          <a:noFill/>
+          <a:ln/>
+        </p:spPr>
+        <p:txBody>
+          <a:bodyPr wrap="square" lIns="0" tIns="0" rIns="0" bIns="0" rtlCol="0" anchor="t"/>
+          <a:lstStyle/>
+          <a:p>
+            <a:pPr algn="l" indent="0" marL="0">
+              <a:lnSpc>
+                <a:spcPts val="2160"/>
+              </a:lnSpc>
+              <a:spcBef>
+                <a:spcPts val="600"/>
+              </a:spcBef>
+              <a:spcAft>
+                <a:spcPts val="800"/>
+              </a:spcAft>
+              <a:buNone/>
+            </a:pPr>
+            <a:r>
+              <a:rPr lang="en-US" sz="1800" b="1" dirty="0">
+                <a:solidFill>
+                  <a:srgbClr val="FE4447"/>
+                </a:solidFill>
+                <a:latin typeface="Georgia" pitchFamily="34" charset="0"/>
+                <a:ea typeface="Georgia" pitchFamily="34" charset="-122"/>
+                <a:cs typeface="Georgia" pitchFamily="34" charset="-120"/>
+              </a:rPr>
+              <a:t>Homework</a:t>
+            </a:r>
+            <a:endParaRPr lang="en-US" sz="1800" dirty="0"/>
+          </a:p>
+        </p:txBody>
+      </p:sp>
+      <p:sp>
+        <p:nvSpPr>
+          <p:cNvPr id="4" name="Text 2"/>
+          <p:cNvSpPr/>
+          <p:nvPr/>
+        </p:nvSpPr>
+        <p:spPr>
+          <a:xfrm>
+            <a:off x="634901" y="883593"/>
+            <a:ext cx="8102798" cy="788491"/>
+          </a:xfrm>
+          <a:prstGeom prst="rect">
+            <a:avLst/>
+          </a:prstGeom>
+          <a:noFill/>
+          <a:ln/>
+        </p:spPr>
+        <p:txBody>
+          <a:bodyPr wrap="square" lIns="0" tIns="0" rIns="0" bIns="0" rtlCol="0" anchor="t"/>
+          <a:lstStyle/>
+          <a:p>
+            <a:pPr algn="l" marL="342900" indent="-342900">
+              <a:lnSpc>
+                <a:spcPts val="1620"/>
+              </a:lnSpc>
+              <a:spcAft>
+                <a:spcPts val="300"/>
+              </a:spcAft>
+              <a:buSzPct val="100000"/>
+              <a:buChar char="•"/>
+            </a:pPr>
+            <a:r>
+              <a:rPr lang="en-US" sz="1200" dirty="0">
+                <a:solidFill>
+                  <a:srgbClr val="1C2833"/>
+                </a:solidFill>
+                <a:latin typeface="Arial" pitchFamily="34" charset="0"/>
+                <a:ea typeface="Arial" pitchFamily="34" charset="-122"/>
+                <a:cs typeface="Arial" pitchFamily="34" charset="-120"/>
+              </a:rPr>
+              <a:t>Locate your anchor module's </a:t>
+            </a:r>
+            <a:pPr algn="l" indent="0" marL="0">
+              <a:lnSpc>
+                <a:spcPts val="1620"/>
+              </a:lnSpc>
+              <a:spcAft>
+                <a:spcPts val="300"/>
+              </a:spcAft>
+              <a:buNone/>
+            </a:pPr>
+            <a:r>
+              <a:rPr lang="en-US" sz="1200" dirty="0">
+                <a:solidFill>
+                  <a:srgbClr val="1C2833"/>
+                </a:solidFill>
+                <a:latin typeface="Arial" pitchFamily="34" charset="0"/>
+                <a:ea typeface="Arial" pitchFamily="34" charset="-122"/>
+                <a:cs typeface="Arial" pitchFamily="34" charset="-120"/>
+              </a:rPr>
+              <a:t>sources.md</a:t>
+            </a:r>
+            <a:pPr algn="l" indent="0" marL="0">
+              <a:lnSpc>
+                <a:spcPts val="1620"/>
+              </a:lnSpc>
+              <a:spcAft>
+                <a:spcPts val="300"/>
+              </a:spcAft>
+              <a:buNone/>
+            </a:pPr>
+            <a:r>
+              <a:rPr lang="en-US" sz="1200" dirty="0">
+                <a:solidFill>
+                  <a:srgbClr val="1C2833"/>
+                </a:solidFill>
+                <a:latin typeface="Arial" pitchFamily="34" charset="0"/>
+                <a:ea typeface="Arial" pitchFamily="34" charset="-122"/>
+                <a:cs typeface="Arial" pitchFamily="34" charset="-120"/>
+              </a:rPr>
+              <a:t> and read it. Tag one source you'll definitely use.</a:t>
+            </a:r>
+            <a:endParaRPr lang="en-US" sz="1200" dirty="0"/>
+          </a:p>
+          <a:p>
+            <a:pPr algn="l" marL="342900" indent="-342900">
+              <a:lnSpc>
+                <a:spcPts val="1620"/>
+              </a:lnSpc>
+              <a:spcAft>
+                <a:spcPts val="300"/>
+              </a:spcAft>
+              <a:buSzPct val="100000"/>
+              <a:buChar char="•"/>
+            </a:pPr>
+            <a:r>
+              <a:rPr lang="en-US" sz="1200" dirty="0">
+                <a:solidFill>
+                  <a:srgbClr val="1C2833"/>
+                </a:solidFill>
+                <a:latin typeface="Arial" pitchFamily="34" charset="0"/>
+                <a:ea typeface="Arial" pitchFamily="34" charset="-122"/>
+                <a:cs typeface="Arial" pitchFamily="34" charset="-120"/>
+              </a:rPr>
+              <a:t>Bring all materials you have at home to class on Day 3.</a:t>
+            </a:r>
+            <a:endParaRPr lang="en-US" sz="1200" dirty="0"/>
+          </a:p>
+          <a:p>
+            <a:pPr algn="l" marL="342900" indent="-342900">
+              <a:lnSpc>
+                <a:spcPts val="1620"/>
+              </a:lnSpc>
+              <a:spcAft>
+                <a:spcPts val="300"/>
+              </a:spcAft>
+              <a:buSzPct val="100000"/>
+              <a:buChar char="•"/>
+            </a:pPr>
+            <a:r>
+              <a:rPr lang="en-US" sz="1200" dirty="0">
+                <a:solidFill>
+                  <a:srgbClr val="1C2833"/>
+                </a:solidFill>
+                <a:latin typeface="Arial" pitchFamily="34" charset="0"/>
+                <a:ea typeface="Arial" pitchFamily="34" charset="-122"/>
+                <a:cs typeface="Arial" pitchFamily="34" charset="-120"/>
+              </a:rPr>
+              <a:t>If you forgot to submit your plan today, slide it under the staff-room door this evening.</a:t>
+            </a:r>
+            <a:endParaRPr lang="en-US" sz="1200" dirty="0"/>
+          </a:p>
+        </p:txBody>
+      </p:sp>
+      <p:sp>
+        <p:nvSpPr>
+          <p:cNvPr id="5" name="Text 3"/>
+          <p:cNvSpPr/>
+          <p:nvPr/>
+        </p:nvSpPr>
+        <p:spPr>
+          <a:xfrm>
+            <a:off x="406301" y="4434929"/>
+            <a:ext cx="8498026" cy="213271"/>
+          </a:xfrm>
+          <a:prstGeom prst="rect">
+            <a:avLst/>
+          </a:prstGeom>
+          <a:noFill/>
+          <a:ln/>
+        </p:spPr>
+        <p:txBody>
+          <a:bodyPr wrap="square" lIns="0" tIns="0" rIns="0" bIns="0" rtlCol="0" anchor="t"/>
+          <a:lstStyle/>
+          <a:p>
+            <a:pPr algn="l" indent="0" marL="0">
+              <a:lnSpc>
+                <a:spcPts val="1680"/>
+              </a:lnSpc>
+              <a:spcBef>
+                <a:spcPts val="300"/>
+              </a:spcBef>
+              <a:spcAft>
+                <a:spcPts val="300"/>
+              </a:spcAft>
+              <a:buNone/>
+            </a:pPr>
+            <a:r>
+              <a:rPr lang="en-US" sz="1200" dirty="0">
+                <a:solidFill>
+                  <a:srgbClr val="1C2833"/>
+                </a:solidFill>
+                <a:latin typeface="Arial" pitchFamily="34" charset="0"/>
+                <a:ea typeface="Arial" pitchFamily="34" charset="-122"/>
+                <a:cs typeface="Arial" pitchFamily="34" charset="-120"/>
+              </a:rPr>
+              <a:t>Middle ·  · IKS Curriculum</a:t>
+            </a:r>
+            <a:endParaRPr lang="en-US" sz="1200" dirty="0"/>
+          </a:p>
+        </p:txBody>
+      </p:sp>
+    </p:spTree>
+  </p:cSld>
+  <p:clrMapOvr>
+    <a:masterClrMapping/>
+  </p:clrMapOvr>
+</p:sld>
+</file>
+
+<file path=ppt/slides/slide16.xml><?xml version="1.0" encoding="utf-8"?>
+<p:sld xmlns:a="http://schemas.openxmlformats.org/drawingml/2006/main" xmlns:r="http://schemas.openxmlformats.org/officeDocument/2006/relationships" xmlns:p="http://schemas.openxmlformats.org/presentationml/2006/main">
+  <p:cSld name="Slide 16">
+    <p:bg>
+      <p:bgPr>
+        <a:solidFill>
+          <a:srgbClr val="FFFFFF"/>
+        </a:solidFill>
+      </p:bgPr>
+    </p:bg>
+    <p:spTree>
+      <p:nvGrpSpPr>
+        <p:cNvPr id="1" name=""/>
+        <p:cNvGrpSpPr/>
+        <p:nvPr/>
+      </p:nvGrpSpPr>
+      <p:grpSpPr>
+        <a:xfrm>
+          <a:off x="0" y="0"/>
+          <a:ext cx="0" cy="0"/>
+          <a:chOff x="0" y="0"/>
+          <a:chExt cx="0" cy="0"/>
+        </a:xfrm>
+      </p:grpSpPr>
+      <p:sp>
+        <p:nvSpPr>
+          <p:cNvPr id="2" name="Text 0"/>
+          <p:cNvSpPr/>
+          <p:nvPr/>
+        </p:nvSpPr>
+        <p:spPr>
+          <a:xfrm>
+            <a:off x="0" y="0"/>
+            <a:ext cx="9144000" cy="101501"/>
+          </a:xfrm>
+          <a:prstGeom prst="rect">
+            <a:avLst/>
+          </a:prstGeom>
+          <a:solidFill>
+            <a:srgbClr val="277884"/>
+          </a:solidFill>
+          <a:ln/>
+        </p:spPr>
+        <p:txBody>
+          <a:bodyPr wrap="square" rtlCol="0" anchor="ctr"/>
+          <a:lstStyle/>
+          <a:p>
+            <a:pPr indent="0" marL="0">
+              <a:buNone/>
+            </a:pPr>
+            <a:endParaRPr lang="en-US" dirty="0"/>
+          </a:p>
+        </p:txBody>
+      </p:sp>
+      <p:sp>
+        <p:nvSpPr>
+          <p:cNvPr id="3" name="Text 1"/>
+          <p:cNvSpPr/>
+          <p:nvPr/>
+        </p:nvSpPr>
+        <p:spPr>
+          <a:xfrm>
+            <a:off x="406301" y="457051"/>
+            <a:ext cx="8498026" cy="274290"/>
+          </a:xfrm>
+          <a:prstGeom prst="rect">
+            <a:avLst/>
+          </a:prstGeom>
+          <a:noFill/>
+          <a:ln/>
+        </p:spPr>
+        <p:txBody>
+          <a:bodyPr wrap="square" lIns="0" tIns="0" rIns="0" bIns="0" rtlCol="0" anchor="t"/>
+          <a:lstStyle/>
+          <a:p>
+            <a:pPr algn="l" indent="0" marL="0">
+              <a:lnSpc>
+                <a:spcPts val="2160"/>
+              </a:lnSpc>
+              <a:spcBef>
+                <a:spcPts val="600"/>
+              </a:spcBef>
+              <a:spcAft>
+                <a:spcPts val="800"/>
+              </a:spcAft>
+              <a:buNone/>
+            </a:pPr>
+            <a:r>
+              <a:rPr lang="en-US" sz="1800" b="1" dirty="0">
+                <a:solidFill>
+                  <a:srgbClr val="FE4447"/>
+                </a:solidFill>
+                <a:latin typeface="Georgia" pitchFamily="34" charset="0"/>
+                <a:ea typeface="Georgia" pitchFamily="34" charset="-122"/>
+                <a:cs typeface="Georgia" pitchFamily="34" charset="-120"/>
+              </a:rPr>
+              <a:t>Differentiation</a:t>
+            </a:r>
+            <a:endParaRPr lang="en-US" sz="1800" dirty="0"/>
+          </a:p>
+        </p:txBody>
+      </p:sp>
+      <p:sp>
+        <p:nvSpPr>
+          <p:cNvPr id="4" name="Text 2"/>
+          <p:cNvSpPr/>
+          <p:nvPr/>
+        </p:nvSpPr>
+        <p:spPr>
+          <a:xfrm>
+            <a:off x="634901" y="883593"/>
+            <a:ext cx="8102798" cy="937022"/>
+          </a:xfrm>
+          <a:prstGeom prst="rect">
+            <a:avLst/>
+          </a:prstGeom>
+          <a:noFill/>
+          <a:ln/>
+        </p:spPr>
+        <p:txBody>
+          <a:bodyPr wrap="square" lIns="0" tIns="0" rIns="0" bIns="0" rtlCol="0" anchor="t"/>
+          <a:lstStyle/>
+          <a:p>
+            <a:pPr algn="l" marL="342900" indent="-342900">
+              <a:lnSpc>
+                <a:spcPts val="1620"/>
+              </a:lnSpc>
+              <a:spcAft>
+                <a:spcPts val="300"/>
+              </a:spcAft>
+              <a:buSzPct val="100000"/>
+              <a:buChar char="•"/>
+            </a:pPr>
+            <a:r>
+              <a:rPr lang="en-US" sz="1200" b="1" dirty="0">
+                <a:solidFill>
+                  <a:srgbClr val="1C2833"/>
+                </a:solidFill>
+                <a:latin typeface="Arial" pitchFamily="34" charset="0"/>
+                <a:ea typeface="Arial" pitchFamily="34" charset="-122"/>
+                <a:cs typeface="Arial" pitchFamily="34" charset="-120"/>
+              </a:rPr>
+              <a:t>One tier up:</a:t>
+            </a:r>
+            <a:pPr algn="l" indent="0" marL="0">
+              <a:lnSpc>
+                <a:spcPts val="1620"/>
+              </a:lnSpc>
+              <a:spcAft>
+                <a:spcPts val="300"/>
+              </a:spcAft>
+              <a:buNone/>
+            </a:pPr>
+            <a:r>
+              <a:rPr lang="en-US" sz="1200" dirty="0">
+                <a:solidFill>
+                  <a:srgbClr val="1C2833"/>
+                </a:solidFill>
+                <a:latin typeface="Arial" pitchFamily="34" charset="0"/>
+                <a:ea typeface="Arial" pitchFamily="34" charset="-122"/>
+                <a:cs typeface="Arial" pitchFamily="34" charset="-120"/>
+              </a:rPr>
+              <a:t> If your plan is solid, draft a "stretch goal" — one extra thing you'll add if the core artefact comes in by Day 7. Keep it small.</a:t>
+            </a:r>
+            <a:endParaRPr lang="en-US" sz="1200" dirty="0"/>
+          </a:p>
+          <a:p>
+            <a:pPr algn="l" marL="342900" indent="-342900">
+              <a:lnSpc>
+                <a:spcPts val="1620"/>
+              </a:lnSpc>
+              <a:spcAft>
+                <a:spcPts val="300"/>
+              </a:spcAft>
+              <a:buSzPct val="100000"/>
+              <a:buChar char="•"/>
+            </a:pPr>
+            <a:r>
+              <a:rPr lang="en-US" sz="1200" b="1" dirty="0">
+                <a:solidFill>
+                  <a:srgbClr val="1C2833"/>
+                </a:solidFill>
+                <a:latin typeface="Arial" pitchFamily="34" charset="0"/>
+                <a:ea typeface="Arial" pitchFamily="34" charset="-122"/>
+                <a:cs typeface="Arial" pitchFamily="34" charset="-120"/>
+              </a:rPr>
+              <a:t>One tier down:</a:t>
+            </a:r>
+            <a:pPr algn="l" indent="0" marL="0">
+              <a:lnSpc>
+                <a:spcPts val="1620"/>
+              </a:lnSpc>
+              <a:spcAft>
+                <a:spcPts val="300"/>
+              </a:spcAft>
+              <a:buNone/>
+            </a:pPr>
+            <a:r>
+              <a:rPr lang="en-US" sz="1200" dirty="0">
+                <a:solidFill>
+                  <a:srgbClr val="1C2833"/>
+                </a:solidFill>
+                <a:latin typeface="Arial" pitchFamily="34" charset="0"/>
+                <a:ea typeface="Arial" pitchFamily="34" charset="-122"/>
+                <a:cs typeface="Arial" pitchFamily="34" charset="-120"/>
+              </a:rPr>
+              <a:t> If you're stuck on the question, ask: "What about this topic puzzles me?" That puzzle is your question. Write the puzzle, not a polished question.</a:t>
+            </a:r>
+            <a:endParaRPr lang="en-US" sz="1200" dirty="0"/>
+          </a:p>
+        </p:txBody>
+      </p:sp>
+      <p:sp>
+        <p:nvSpPr>
+          <p:cNvPr id="5" name="Text 3"/>
+          <p:cNvSpPr/>
+          <p:nvPr/>
+        </p:nvSpPr>
+        <p:spPr>
+          <a:xfrm>
+            <a:off x="406301" y="4434929"/>
+            <a:ext cx="8498026" cy="213271"/>
+          </a:xfrm>
+          <a:prstGeom prst="rect">
+            <a:avLst/>
+          </a:prstGeom>
+          <a:noFill/>
+          <a:ln/>
+        </p:spPr>
+        <p:txBody>
+          <a:bodyPr wrap="square" lIns="0" tIns="0" rIns="0" bIns="0" rtlCol="0" anchor="t"/>
+          <a:lstStyle/>
+          <a:p>
+            <a:pPr algn="l" indent="0" marL="0">
+              <a:lnSpc>
+                <a:spcPts val="1680"/>
+              </a:lnSpc>
+              <a:spcBef>
+                <a:spcPts val="300"/>
+              </a:spcBef>
+              <a:spcAft>
+                <a:spcPts val="300"/>
+              </a:spcAft>
+              <a:buNone/>
+            </a:pPr>
+            <a:r>
+              <a:rPr lang="en-US" sz="1200" dirty="0">
+                <a:solidFill>
+                  <a:srgbClr val="1C2833"/>
+                </a:solidFill>
+                <a:latin typeface="Arial" pitchFamily="34" charset="0"/>
+                <a:ea typeface="Arial" pitchFamily="34" charset="-122"/>
+                <a:cs typeface="Arial" pitchFamily="34" charset="-120"/>
+              </a:rPr>
+              <a:t>Middle ·  · IKS Curriculum</a:t>
+            </a:r>
+            <a:endParaRPr lang="en-US" sz="1200" dirty="0"/>
+          </a:p>
+        </p:txBody>
+      </p:sp>
+    </p:spTree>
+  </p:cSld>
+  <p:clrMapOvr>
+    <a:masterClrMapping/>
+  </p:clrMapOvr>
+</p:sld>
+</file>
+
+<file path=ppt/slides/slide17.xml><?xml version="1.0" encoding="utf-8"?>
+<p:sld xmlns:a="http://schemas.openxmlformats.org/drawingml/2006/main" xmlns:r="http://schemas.openxmlformats.org/officeDocument/2006/relationships" xmlns:p="http://schemas.openxmlformats.org/presentationml/2006/main">
+  <p:cSld name="Slide 17">
+    <p:bg>
+      <p:bgPr>
+        <a:solidFill>
+          <a:srgbClr val="FFFFFF"/>
+        </a:solidFill>
+      </p:bgPr>
+    </p:bg>
+    <p:spTree>
+      <p:nvGrpSpPr>
+        <p:cNvPr id="1" name=""/>
+        <p:cNvGrpSpPr/>
+        <p:nvPr/>
+      </p:nvGrpSpPr>
+      <p:grpSpPr>
+        <a:xfrm>
+          <a:off x="0" y="0"/>
+          <a:ext cx="0" cy="0"/>
+          <a:chOff x="0" y="0"/>
+          <a:chExt cx="0" cy="0"/>
+        </a:xfrm>
+      </p:grpSpPr>
+      <p:sp>
+        <p:nvSpPr>
+          <p:cNvPr id="2" name="Text 0"/>
+          <p:cNvSpPr/>
+          <p:nvPr/>
+        </p:nvSpPr>
+        <p:spPr>
+          <a:xfrm>
+            <a:off x="0" y="0"/>
+            <a:ext cx="9144000" cy="101501"/>
+          </a:xfrm>
+          <a:prstGeom prst="rect">
+            <a:avLst/>
+          </a:prstGeom>
+          <a:solidFill>
+            <a:srgbClr val="277884"/>
+          </a:solidFill>
+          <a:ln/>
+        </p:spPr>
+        <p:txBody>
+          <a:bodyPr wrap="square" rtlCol="0" anchor="ctr"/>
+          <a:lstStyle/>
+          <a:p>
+            <a:pPr indent="0" marL="0">
+              <a:buNone/>
+            </a:pPr>
+            <a:endParaRPr lang="en-US" dirty="0"/>
+          </a:p>
+        </p:txBody>
+      </p:sp>
+      <p:sp>
+        <p:nvSpPr>
+          <p:cNvPr id="3" name="Text 1"/>
+          <p:cNvSpPr/>
+          <p:nvPr/>
+        </p:nvSpPr>
+        <p:spPr>
+          <a:xfrm>
+            <a:off x="406301" y="457051"/>
+            <a:ext cx="8498026" cy="274290"/>
+          </a:xfrm>
+          <a:prstGeom prst="rect">
+            <a:avLst/>
+          </a:prstGeom>
+          <a:noFill/>
+          <a:ln/>
+        </p:spPr>
+        <p:txBody>
+          <a:bodyPr wrap="square" lIns="0" tIns="0" rIns="0" bIns="0" rtlCol="0" anchor="t"/>
+          <a:lstStyle/>
+          <a:p>
+            <a:pPr algn="l" indent="0" marL="0">
+              <a:lnSpc>
+                <a:spcPts val="2160"/>
+              </a:lnSpc>
+              <a:spcBef>
+                <a:spcPts val="600"/>
+              </a:spcBef>
+              <a:spcAft>
+                <a:spcPts val="800"/>
+              </a:spcAft>
+              <a:buNone/>
+            </a:pPr>
+            <a:r>
+              <a:rPr lang="en-US" sz="1800" b="1" dirty="0">
+                <a:solidFill>
+                  <a:srgbClr val="FE4447"/>
+                </a:solidFill>
+                <a:latin typeface="Georgia" pitchFamily="34" charset="0"/>
+                <a:ea typeface="Georgia" pitchFamily="34" charset="-122"/>
+                <a:cs typeface="Georgia" pitchFamily="34" charset="-120"/>
+              </a:rPr>
+              <a:t>Teacher notes</a:t>
+            </a:r>
+            <a:endParaRPr lang="en-US" sz="1800" dirty="0"/>
+          </a:p>
+        </p:txBody>
+      </p:sp>
+      <p:sp>
+        <p:nvSpPr>
+          <p:cNvPr id="4" name="Text 2"/>
+          <p:cNvSpPr/>
+          <p:nvPr/>
+        </p:nvSpPr>
+        <p:spPr>
+          <a:xfrm>
+            <a:off x="634901" y="883593"/>
+            <a:ext cx="8102798" cy="1424583"/>
+          </a:xfrm>
+          <a:prstGeom prst="rect">
+            <a:avLst/>
+          </a:prstGeom>
+          <a:noFill/>
+          <a:ln/>
+        </p:spPr>
+        <p:txBody>
+          <a:bodyPr wrap="square" lIns="0" tIns="0" rIns="0" bIns="0" rtlCol="0" anchor="t"/>
+          <a:lstStyle/>
+          <a:p>
+            <a:pPr algn="l" marL="342900" indent="-342900">
+              <a:lnSpc>
+                <a:spcPts val="1620"/>
+              </a:lnSpc>
+              <a:spcAft>
+                <a:spcPts val="300"/>
+              </a:spcAft>
+              <a:buSzPct val="100000"/>
+              <a:buChar char="•"/>
+            </a:pPr>
+            <a:r>
+              <a:rPr lang="en-US" sz="1200" dirty="0">
+                <a:solidFill>
+                  <a:srgbClr val="1C2833"/>
+                </a:solidFill>
+                <a:latin typeface="Arial" pitchFamily="34" charset="0"/>
+                <a:ea typeface="Arial" pitchFamily="34" charset="-122"/>
+                <a:cs typeface="Arial" pitchFamily="34" charset="-120"/>
+              </a:rPr>
+              <a:t>Read every plan tonight. Mark each with: ✓ (good to go), ? (need a 5-min check-in tomorrow), or ✗ (re-scope required).</a:t>
+            </a:r>
+            <a:endParaRPr lang="en-US" sz="1200" dirty="0"/>
+          </a:p>
+          <a:p>
+            <a:pPr algn="l" marL="342900" indent="-342900">
+              <a:lnSpc>
+                <a:spcPts val="1620"/>
+              </a:lnSpc>
+              <a:spcAft>
+                <a:spcPts val="300"/>
+              </a:spcAft>
+              <a:buSzPct val="100000"/>
+              <a:buChar char="•"/>
+            </a:pPr>
+            <a:r>
+              <a:rPr lang="en-US" sz="1200" dirty="0">
+                <a:solidFill>
+                  <a:srgbClr val="1C2833"/>
+                </a:solidFill>
+                <a:latin typeface="Arial" pitchFamily="34" charset="0"/>
+                <a:ea typeface="Arial" pitchFamily="34" charset="-122"/>
+                <a:cs typeface="Arial" pitchFamily="34" charset="-120"/>
+              </a:rPr>
+              <a:t>The most common over-scope: Project 7 (sustainability audit). It is </a:t>
+            </a:r>
+            <a:pPr algn="l" indent="0" marL="0">
+              <a:lnSpc>
+                <a:spcPts val="1620"/>
+              </a:lnSpc>
+              <a:spcAft>
+                <a:spcPts val="300"/>
+              </a:spcAft>
+              <a:buNone/>
+            </a:pPr>
+            <a:r>
               <a:rPr lang="en-US" sz="1200" i="1" dirty="0">
                 <a:solidFill>
                   <a:srgbClr val="1C2833"/>
@@ -2931,15 +5134,304 @@
                 <a:ea typeface="Arial" pitchFamily="34" charset="-122"/>
                 <a:cs typeface="Arial" pitchFamily="34" charset="-120"/>
               </a:rPr>
+              <a:t>not</a:t>
+            </a:r>
+            <a:pPr algn="l" indent="0" marL="0">
+              <a:lnSpc>
+                <a:spcPts val="1620"/>
+              </a:lnSpc>
+              <a:spcAft>
+                <a:spcPts val="300"/>
+              </a:spcAft>
+              <a:buNone/>
+            </a:pPr>
+            <a:r>
+              <a:rPr lang="en-US" sz="1200" dirty="0">
+                <a:solidFill>
+                  <a:srgbClr val="1C2833"/>
+                </a:solidFill>
+                <a:latin typeface="Arial" pitchFamily="34" charset="0"/>
+                <a:ea typeface="Arial" pitchFamily="34" charset="-122"/>
+                <a:cs typeface="Arial" pitchFamily="34" charset="-120"/>
+              </a:rPr>
+              <a:t> a school-wide audit. Pick ONE station (water at the canteen; paper waste in one classroom; light usage in one corridor). Cut hard.</a:t>
+            </a:r>
+            <a:endParaRPr lang="en-US" sz="1200" dirty="0"/>
+          </a:p>
+          <a:p>
+            <a:pPr algn="l" marL="342900" indent="-342900">
+              <a:lnSpc>
+                <a:spcPts val="1620"/>
+              </a:lnSpc>
+              <a:spcAft>
+                <a:spcPts val="300"/>
+              </a:spcAft>
+              <a:buSzPct val="100000"/>
+              <a:buChar char="•"/>
+            </a:pPr>
+            <a:r>
+              <a:rPr lang="en-US" sz="1200" dirty="0">
+                <a:solidFill>
+                  <a:srgbClr val="1C2833"/>
+                </a:solidFill>
+                <a:latin typeface="Arial" pitchFamily="34" charset="0"/>
+                <a:ea typeface="Arial" pitchFamily="34" charset="-122"/>
+                <a:cs typeface="Arial" pitchFamily="34" charset="-120"/>
+              </a:rPr>
+              <a:t>The most common under-scope: Project 8 (doṣa self-study) reduced to "I will write about myself." Push them to specify what they'll observe each day.</a:t>
+            </a:r>
+            <a:endParaRPr lang="en-US" sz="1200" dirty="0"/>
+          </a:p>
+          <a:p>
+            <a:pPr algn="l" marL="342900" indent="-342900">
+              <a:lnSpc>
+                <a:spcPts val="1620"/>
+              </a:lnSpc>
+              <a:spcAft>
+                <a:spcPts val="300"/>
+              </a:spcAft>
+              <a:buSzPct val="100000"/>
+              <a:buChar char="•"/>
+            </a:pPr>
+            <a:r>
+              <a:rPr lang="en-US" sz="1200" dirty="0">
+                <a:solidFill>
+                  <a:srgbClr val="1C2833"/>
+                </a:solidFill>
+                <a:latin typeface="Arial" pitchFamily="34" charset="0"/>
+                <a:ea typeface="Arial" pitchFamily="34" charset="-122"/>
+                <a:cs typeface="Arial" pitchFamily="34" charset="-120"/>
+              </a:rPr>
+              <a:t>Save 10 minutes at the end of the day to read all plans before leaving school. Don't take this home — it's class work.</a:t>
+            </a:r>
+            <a:endParaRPr lang="en-US" sz="1200" dirty="0"/>
+          </a:p>
+        </p:txBody>
+      </p:sp>
+      <p:sp>
+        <p:nvSpPr>
+          <p:cNvPr id="5" name="Text 3"/>
+          <p:cNvSpPr/>
+          <p:nvPr/>
+        </p:nvSpPr>
+        <p:spPr>
+          <a:xfrm>
+            <a:off x="406301" y="4434929"/>
+            <a:ext cx="8498026" cy="213271"/>
+          </a:xfrm>
+          <a:prstGeom prst="rect">
+            <a:avLst/>
+          </a:prstGeom>
+          <a:noFill/>
+          <a:ln/>
+        </p:spPr>
+        <p:txBody>
+          <a:bodyPr wrap="square" lIns="0" tIns="0" rIns="0" bIns="0" rtlCol="0" anchor="t"/>
+          <a:lstStyle/>
+          <a:p>
+            <a:pPr algn="l" indent="0" marL="0">
+              <a:lnSpc>
+                <a:spcPts val="1680"/>
+              </a:lnSpc>
+              <a:spcBef>
+                <a:spcPts val="300"/>
+              </a:spcBef>
+              <a:spcAft>
+                <a:spcPts val="300"/>
+              </a:spcAft>
+              <a:buNone/>
+            </a:pPr>
+            <a:r>
+              <a:rPr lang="en-US" sz="1200" dirty="0">
+                <a:solidFill>
+                  <a:srgbClr val="1C2833"/>
+                </a:solidFill>
+                <a:latin typeface="Arial" pitchFamily="34" charset="0"/>
+                <a:ea typeface="Arial" pitchFamily="34" charset="-122"/>
+                <a:cs typeface="Arial" pitchFamily="34" charset="-120"/>
+              </a:rPr>
+              <a:t>Middle ·  · IKS Curriculum</a:t>
+            </a:r>
+            <a:endParaRPr lang="en-US" sz="1200" dirty="0"/>
+          </a:p>
+        </p:txBody>
+      </p:sp>
+    </p:spTree>
+  </p:cSld>
+  <p:clrMapOvr>
+    <a:masterClrMapping/>
+  </p:clrMapOvr>
+</p:sld>
+</file>
+
+<file path=ppt/slides/slide18.xml><?xml version="1.0" encoding="utf-8"?>
+<p:sld xmlns:a="http://schemas.openxmlformats.org/drawingml/2006/main" xmlns:r="http://schemas.openxmlformats.org/officeDocument/2006/relationships" xmlns:p="http://schemas.openxmlformats.org/presentationml/2006/main">
+  <p:cSld name="Slide 18">
+    <p:bg>
+      <p:bgPr>
+        <a:solidFill>
+          <a:srgbClr val="FFFFFF"/>
+        </a:solidFill>
+      </p:bgPr>
+    </p:bg>
+    <p:spTree>
+      <p:nvGrpSpPr>
+        <p:cNvPr id="1" name=""/>
+        <p:cNvGrpSpPr/>
+        <p:nvPr/>
+      </p:nvGrpSpPr>
+      <p:grpSpPr>
+        <a:xfrm>
+          <a:off x="0" y="0"/>
+          <a:ext cx="0" cy="0"/>
+          <a:chOff x="0" y="0"/>
+          <a:chExt cx="0" cy="0"/>
+        </a:xfrm>
+      </p:grpSpPr>
+      <p:sp>
+        <p:nvSpPr>
+          <p:cNvPr id="2" name="Text 0"/>
+          <p:cNvSpPr/>
+          <p:nvPr/>
+        </p:nvSpPr>
+        <p:spPr>
+          <a:xfrm>
+            <a:off x="0" y="0"/>
+            <a:ext cx="9144000" cy="101501"/>
+          </a:xfrm>
+          <a:prstGeom prst="rect">
+            <a:avLst/>
+          </a:prstGeom>
+          <a:solidFill>
+            <a:srgbClr val="277884"/>
+          </a:solidFill>
+          <a:ln/>
+        </p:spPr>
+        <p:txBody>
+          <a:bodyPr wrap="square" rtlCol="0" anchor="ctr"/>
+          <a:lstStyle/>
+          <a:p>
+            <a:pPr indent="0" marL="0">
+              <a:buNone/>
+            </a:pPr>
+            <a:endParaRPr lang="en-US" dirty="0"/>
+          </a:p>
+        </p:txBody>
+      </p:sp>
+      <p:sp>
+        <p:nvSpPr>
+          <p:cNvPr id="3" name="Text 1"/>
+          <p:cNvSpPr/>
+          <p:nvPr/>
+        </p:nvSpPr>
+        <p:spPr>
+          <a:xfrm>
+            <a:off x="406301" y="457051"/>
+            <a:ext cx="8498026" cy="274290"/>
+          </a:xfrm>
+          <a:prstGeom prst="rect">
+            <a:avLst/>
+          </a:prstGeom>
+          <a:noFill/>
+          <a:ln/>
+        </p:spPr>
+        <p:txBody>
+          <a:bodyPr wrap="square" lIns="0" tIns="0" rIns="0" bIns="0" rtlCol="0" anchor="t"/>
+          <a:lstStyle/>
+          <a:p>
+            <a:pPr algn="l" indent="0" marL="0">
+              <a:lnSpc>
+                <a:spcPts val="2160"/>
+              </a:lnSpc>
+              <a:spcBef>
+                <a:spcPts val="600"/>
+              </a:spcBef>
+              <a:spcAft>
+                <a:spcPts val="800"/>
+              </a:spcAft>
+              <a:buNone/>
+            </a:pPr>
+            <a:r>
+              <a:rPr lang="en-US" sz="1800" b="1" dirty="0">
+                <a:solidFill>
+                  <a:srgbClr val="FE4447"/>
+                </a:solidFill>
+                <a:latin typeface="Georgia" pitchFamily="34" charset="0"/>
+                <a:ea typeface="Georgia" pitchFamily="34" charset="-122"/>
+                <a:cs typeface="Georgia" pitchFamily="34" charset="-120"/>
+              </a:rPr>
+              <a:t>Citation(s) used in this lesson</a:t>
+            </a:r>
+            <a:endParaRPr lang="en-US" sz="1800" dirty="0"/>
+          </a:p>
+        </p:txBody>
+      </p:sp>
+      <p:sp>
+        <p:nvSpPr>
+          <p:cNvPr id="4" name="Text 2"/>
+          <p:cNvSpPr/>
+          <p:nvPr/>
+        </p:nvSpPr>
+        <p:spPr>
+          <a:xfrm>
+            <a:off x="634901" y="883593"/>
+            <a:ext cx="8102798" cy="300930"/>
+          </a:xfrm>
+          <a:prstGeom prst="rect">
+            <a:avLst/>
+          </a:prstGeom>
+          <a:noFill/>
+          <a:ln/>
+        </p:spPr>
+        <p:txBody>
+          <a:bodyPr wrap="square" lIns="0" tIns="0" rIns="0" bIns="0" rtlCol="0" anchor="t"/>
+          <a:lstStyle/>
+          <a:p>
+            <a:pPr algn="l" marL="342900" indent="-342900">
+              <a:lnSpc>
+                <a:spcPts val="1620"/>
+              </a:lnSpc>
+              <a:spcAft>
+                <a:spcPts val="300"/>
+              </a:spcAft>
+              <a:buSzPct val="100000"/>
+              <a:buChar char="•"/>
+            </a:pPr>
+            <a:r>
+              <a:rPr lang="en-US" sz="1200" dirty="0">
+                <a:solidFill>
+                  <a:srgbClr val="1C2833"/>
+                </a:solidFill>
+                <a:latin typeface="Arial" pitchFamily="34" charset="0"/>
+                <a:ea typeface="Arial" pitchFamily="34" charset="-122"/>
+                <a:cs typeface="Arial" pitchFamily="34" charset="-120"/>
+              </a:rPr>
+              <a:t>Sanskrit term </a:t>
+            </a:r>
+            <a:pPr algn="l" indent="0" marL="0">
+              <a:lnSpc>
+                <a:spcPts val="1620"/>
+              </a:lnSpc>
+              <a:spcAft>
+                <a:spcPts val="300"/>
+              </a:spcAft>
+              <a:buNone/>
+            </a:pPr>
+            <a:r>
+              <a:rPr lang="en-US" sz="1200" i="1" dirty="0">
+                <a:solidFill>
+                  <a:srgbClr val="1C2833"/>
+                </a:solidFill>
+                <a:latin typeface="Arial" pitchFamily="34" charset="0"/>
+                <a:ea typeface="Arial" pitchFamily="34" charset="-122"/>
+                <a:cs typeface="Arial" pitchFamily="34" charset="-120"/>
+              </a:rPr>
               <a:t>abhyāsa</a:t>
             </a:r>
             <a:pPr algn="l" indent="0" marL="0">
               <a:lnSpc>
-                <a:spcPts val="1680"/>
-              </a:lnSpc>
-              <a:spcBef>
-                <a:spcPts val="300"/>
-              </a:spcBef>
+                <a:spcPts val="1620"/>
+              </a:lnSpc>
               <a:spcAft>
                 <a:spcPts val="300"/>
               </a:spcAft>
@@ -2958,11 +5450,8 @@
             </a:r>
             <a:pPr algn="l" indent="0" marL="0">
               <a:lnSpc>
-                <a:spcPts val="1680"/>
-              </a:lnSpc>
-              <a:spcBef>
-                <a:spcPts val="300"/>
-              </a:spcBef>
+                <a:spcPts val="1620"/>
+              </a:lnSpc>
               <a:spcAft>
                 <a:spcPts val="300"/>
               </a:spcAft>
@@ -2981,11 +5470,8 @@
             </a:r>
             <a:pPr algn="l" indent="0" marL="0">
               <a:lnSpc>
-                <a:spcPts val="1680"/>
-              </a:lnSpc>
-              <a:spcBef>
-                <a:spcPts val="300"/>
-              </a:spcBef>
+                <a:spcPts val="1620"/>
+              </a:lnSpc>
               <a:spcAft>
                 <a:spcPts val="300"/>
               </a:spcAft>
@@ -3158,7 +5644,7 @@
                 <a:ea typeface="Georgia" pitchFamily="34" charset="-122"/>
                 <a:cs typeface="Georgia" pitchFamily="34" charset="-120"/>
               </a:rPr>
-              <a:t>Materials</a:t>
+              <a:t>Learning objective</a:t>
             </a:r>
             <a:endParaRPr lang="en-US" sz="1800" dirty="0"/>
           </a:p>
@@ -3206,53 +5692,7 @@
                 <a:ea typeface="Arial" pitchFamily="34" charset="-122"/>
                 <a:cs typeface="Arial" pitchFamily="34" charset="-120"/>
               </a:rPr>
-              <a:t>– Printed </a:t>
-            </a:r>
-            <a:pPr algn="l" indent="0" marL="0">
-              <a:lnSpc>
-                <a:spcPts val="1680"/>
-              </a:lnSpc>
-              <a:spcBef>
-                <a:spcPts val="300"/>
-              </a:spcBef>
-              <a:spcAft>
-                <a:spcPts val="300"/>
-              </a:spcAft>
-              <a:buNone/>
-            </a:pPr>
-            <a:r>
-              <a:rPr lang="en-US" sz="1200" b="1" dirty="0">
-                <a:solidFill>
-                  <a:srgbClr val="1C2833"/>
-                </a:solidFill>
-                <a:latin typeface="Arial" pitchFamily="34" charset="0"/>
-                <a:ea typeface="Arial" pitchFamily="34" charset="-122"/>
-                <a:cs typeface="Arial" pitchFamily="34" charset="-120"/>
-              </a:rPr>
-              <a:t>One-Page Plan Template</a:t>
-            </a:r>
-            <a:pPr algn="l" indent="0" marL="0">
-              <a:lnSpc>
-                <a:spcPts val="1680"/>
-              </a:lnSpc>
-              <a:spcBef>
-                <a:spcPts val="300"/>
-              </a:spcBef>
-              <a:spcAft>
-                <a:spcPts val="300"/>
-              </a:spcAft>
-              <a:buNone/>
-            </a:pPr>
-            <a:r>
-              <a:rPr lang="en-US" sz="1200" dirty="0">
-                <a:solidFill>
-                  <a:srgbClr val="1C2833"/>
-                </a:solidFill>
-                <a:latin typeface="Arial" pitchFamily="34" charset="0"/>
-                <a:ea typeface="Arial" pitchFamily="34" charset="-122"/>
-                <a:cs typeface="Arial" pitchFamily="34" charset="-120"/>
-              </a:rPr>
-              <a:t> (see below), one per student – A wall-display of the project assignments (teacher confirmed overnight) – Notebook, pen</a:t>
+              <a:t>By the end of this lesson, students will lock in their project choice and submit a one-page plan that names the project, the anchor module, the question, two candidate sources, the artefact format, the materials, and success criteria.</a:t>
             </a:r>
             <a:endParaRPr lang="en-US" sz="1200" dirty="0"/>
           </a:p>
@@ -3410,7 +5850,7 @@
                 <a:ea typeface="Georgia" pitchFamily="34" charset="-122"/>
                 <a:cs typeface="Georgia" pitchFamily="34" charset="-120"/>
               </a:rPr>
-              <a:t>Lesson flow</a:t>
+              <a:t>Materials</a:t>
             </a:r>
             <a:endParaRPr lang="en-US" sz="1800" dirty="0"/>
           </a:p>
@@ -3419,6 +5859,140 @@
       <p:sp>
         <p:nvSpPr>
           <p:cNvPr id="4" name="Text 2"/>
+          <p:cNvSpPr/>
+          <p:nvPr/>
+        </p:nvSpPr>
+        <p:spPr>
+          <a:xfrm>
+            <a:off x="634901" y="883593"/>
+            <a:ext cx="8102798" cy="769441"/>
+          </a:xfrm>
+          <a:prstGeom prst="rect">
+            <a:avLst/>
+          </a:prstGeom>
+          <a:noFill/>
+          <a:ln/>
+        </p:spPr>
+        <p:txBody>
+          <a:bodyPr wrap="square" lIns="0" tIns="0" rIns="0" bIns="0" rtlCol="0" anchor="t"/>
+          <a:lstStyle/>
+          <a:p>
+            <a:pPr algn="l" marL="342900" indent="-342900">
+              <a:lnSpc>
+                <a:spcPts val="1620"/>
+              </a:lnSpc>
+              <a:spcAft>
+                <a:spcPts val="300"/>
+              </a:spcAft>
+              <a:buSzPct val="100000"/>
+              <a:buChar char="•"/>
+            </a:pPr>
+            <a:r>
+              <a:rPr lang="en-US" sz="1200" dirty="0">
+                <a:solidFill>
+                  <a:srgbClr val="1C2833"/>
+                </a:solidFill>
+                <a:latin typeface="Arial" pitchFamily="34" charset="0"/>
+                <a:ea typeface="Arial" pitchFamily="34" charset="-122"/>
+                <a:cs typeface="Arial" pitchFamily="34" charset="-120"/>
+              </a:rPr>
+              <a:t>Printed </a:t>
+            </a:r>
+            <a:pPr algn="l" indent="0" marL="0">
+              <a:lnSpc>
+                <a:spcPts val="1620"/>
+              </a:lnSpc>
+              <a:spcAft>
+                <a:spcPts val="300"/>
+              </a:spcAft>
+              <a:buNone/>
+            </a:pPr>
+            <a:r>
+              <a:rPr lang="en-US" sz="1200" b="1" dirty="0">
+                <a:solidFill>
+                  <a:srgbClr val="1C2833"/>
+                </a:solidFill>
+                <a:latin typeface="Arial" pitchFamily="34" charset="0"/>
+                <a:ea typeface="Arial" pitchFamily="34" charset="-122"/>
+                <a:cs typeface="Arial" pitchFamily="34" charset="-120"/>
+              </a:rPr>
+              <a:t>One-Page Plan Template</a:t>
+            </a:r>
+            <a:pPr algn="l" indent="0" marL="0">
+              <a:lnSpc>
+                <a:spcPts val="1620"/>
+              </a:lnSpc>
+              <a:spcAft>
+                <a:spcPts val="300"/>
+              </a:spcAft>
+              <a:buNone/>
+            </a:pPr>
+            <a:r>
+              <a:rPr lang="en-US" sz="1200" dirty="0">
+                <a:solidFill>
+                  <a:srgbClr val="1C2833"/>
+                </a:solidFill>
+                <a:latin typeface="Arial" pitchFamily="34" charset="0"/>
+                <a:ea typeface="Arial" pitchFamily="34" charset="-122"/>
+                <a:cs typeface="Arial" pitchFamily="34" charset="-120"/>
+              </a:rPr>
+              <a:t> (see below), one per student</a:t>
+            </a:r>
+            <a:endParaRPr lang="en-US" sz="1200" dirty="0"/>
+          </a:p>
+          <a:p>
+            <a:pPr algn="l" marL="342900" indent="-342900">
+              <a:lnSpc>
+                <a:spcPts val="1620"/>
+              </a:lnSpc>
+              <a:spcAft>
+                <a:spcPts val="300"/>
+              </a:spcAft>
+              <a:buSzPct val="100000"/>
+              <a:buChar char="•"/>
+            </a:pPr>
+            <a:r>
+              <a:rPr lang="en-US" sz="1200" dirty="0">
+                <a:solidFill>
+                  <a:srgbClr val="1C2833"/>
+                </a:solidFill>
+                <a:latin typeface="Arial" pitchFamily="34" charset="0"/>
+                <a:ea typeface="Arial" pitchFamily="34" charset="-122"/>
+                <a:cs typeface="Arial" pitchFamily="34" charset="-120"/>
+              </a:rPr>
+              <a:t>A wall-display of the project assignments (teacher confirmed overnight)</a:t>
+            </a:r>
+            <a:endParaRPr lang="en-US" sz="1200" dirty="0"/>
+          </a:p>
+          <a:p>
+            <a:pPr algn="l" marL="342900" indent="-342900">
+              <a:lnSpc>
+                <a:spcPts val="1620"/>
+              </a:lnSpc>
+              <a:spcAft>
+                <a:spcPts val="300"/>
+              </a:spcAft>
+              <a:buSzPct val="100000"/>
+              <a:buChar char="•"/>
+            </a:pPr>
+            <a:r>
+              <a:rPr lang="en-US" sz="1200" dirty="0">
+                <a:solidFill>
+                  <a:srgbClr val="1C2833"/>
+                </a:solidFill>
+                <a:latin typeface="Arial" pitchFamily="34" charset="0"/>
+                <a:ea typeface="Arial" pitchFamily="34" charset="-122"/>
+                <a:cs typeface="Arial" pitchFamily="34" charset="-120"/>
+              </a:rPr>
+              <a:t>Notebook, pen</a:t>
+            </a:r>
+            <a:endParaRPr lang="en-US" sz="1200" dirty="0"/>
+          </a:p>
+        </p:txBody>
+      </p:sp>
+      <p:sp>
+        <p:nvSpPr>
+          <p:cNvPr id="5" name="Text 3"/>
           <p:cNvSpPr/>
           <p:nvPr/>
         </p:nvSpPr>
@@ -3568,7 +6142,7 @@
                 <a:ea typeface="Georgia" pitchFamily="34" charset="-122"/>
                 <a:cs typeface="Georgia" pitchFamily="34" charset="-120"/>
               </a:rPr>
-              <a:t>Warm-up (5 min)</a:t>
+              <a:t>Lesson flow</a:t>
             </a:r>
             <a:endParaRPr lang="en-US" sz="1800" dirty="0"/>
           </a:p>
@@ -3577,146 +6151,6 @@
       <p:sp>
         <p:nvSpPr>
           <p:cNvPr id="4" name="Text 2"/>
-          <p:cNvSpPr/>
-          <p:nvPr/>
-        </p:nvSpPr>
-        <p:spPr>
-          <a:xfrm>
-            <a:off x="406301" y="870942"/>
-            <a:ext cx="8498026" cy="213271"/>
-          </a:xfrm>
-          <a:prstGeom prst="rect">
-            <a:avLst/>
-          </a:prstGeom>
-          <a:noFill/>
-          <a:ln/>
-        </p:spPr>
-        <p:txBody>
-          <a:bodyPr wrap="square" lIns="0" tIns="0" rIns="0" bIns="0" rtlCol="0" anchor="t"/>
-          <a:lstStyle/>
-          <a:p>
-            <a:pPr algn="l" indent="0" marL="0">
-              <a:lnSpc>
-                <a:spcPts val="1680"/>
-              </a:lnSpc>
-              <a:spcBef>
-                <a:spcPts val="300"/>
-              </a:spcBef>
-              <a:spcAft>
-                <a:spcPts val="300"/>
-              </a:spcAft>
-              <a:buNone/>
-            </a:pPr>
-            <a:r>
-              <a:rPr lang="en-US" sz="1200" dirty="0">
-                <a:solidFill>
-                  <a:srgbClr val="1C2833"/>
-                </a:solidFill>
-                <a:latin typeface="Arial" pitchFamily="34" charset="0"/>
-                <a:ea typeface="Arial" pitchFamily="34" charset="-122"/>
-                <a:cs typeface="Arial" pitchFamily="34" charset="-120"/>
-              </a:rPr>
-              <a:t>– Daily prompt: </a:t>
-            </a:r>
-            <a:pPr algn="l" indent="0" marL="0">
-              <a:lnSpc>
-                <a:spcPts val="1680"/>
-              </a:lnSpc>
-              <a:spcBef>
-                <a:spcPts val="300"/>
-              </a:spcBef>
-              <a:spcAft>
-                <a:spcPts val="300"/>
-              </a:spcAft>
-              <a:buNone/>
-            </a:pPr>
-            <a:r>
-              <a:rPr lang="en-US" sz="1200" i="1" dirty="0">
-                <a:solidFill>
-                  <a:srgbClr val="1C2833"/>
-                </a:solidFill>
-                <a:latin typeface="Arial" pitchFamily="34" charset="0"/>
-                <a:ea typeface="Arial" pitchFamily="34" charset="-122"/>
-                <a:cs typeface="Arial" pitchFamily="34" charset="-120"/>
-              </a:rPr>
-              <a:t>"In one sentence — what's the question your project will try to answer?"</a:t>
-            </a:r>
-            <a:pPr algn="l" indent="0" marL="0">
-              <a:lnSpc>
-                <a:spcPts val="1680"/>
-              </a:lnSpc>
-              <a:spcBef>
-                <a:spcPts val="300"/>
-              </a:spcBef>
-              <a:spcAft>
-                <a:spcPts val="300"/>
-              </a:spcAft>
-              <a:buNone/>
-            </a:pPr>
-            <a:r>
-              <a:rPr lang="en-US" sz="1200" dirty="0">
-                <a:solidFill>
-                  <a:srgbClr val="1C2833"/>
-                </a:solidFill>
-                <a:latin typeface="Arial" pitchFamily="34" charset="0"/>
-                <a:ea typeface="Arial" pitchFamily="34" charset="-122"/>
-                <a:cs typeface="Arial" pitchFamily="34" charset="-120"/>
-              </a:rPr>
-              <a:t> 3 students share.</a:t>
-            </a:r>
-            <a:endParaRPr lang="en-US" sz="1200" dirty="0"/>
-          </a:p>
-        </p:txBody>
-      </p:sp>
-      <p:sp>
-        <p:nvSpPr>
-          <p:cNvPr id="5" name="Text 3"/>
-          <p:cNvSpPr/>
-          <p:nvPr/>
-        </p:nvSpPr>
-        <p:spPr>
-          <a:xfrm>
-            <a:off x="634901" y="1173063"/>
-            <a:ext cx="8102798" cy="281880"/>
-          </a:xfrm>
-          <a:prstGeom prst="rect">
-            <a:avLst/>
-          </a:prstGeom>
-          <a:noFill/>
-          <a:ln/>
-        </p:spPr>
-        <p:txBody>
-          <a:bodyPr wrap="square" lIns="0" tIns="0" rIns="0" bIns="0" rtlCol="0" anchor="t"/>
-          <a:lstStyle/>
-          <a:p>
-            <a:pPr algn="l" marL="342900" indent="-342900">
-              <a:lnSpc>
-                <a:spcPts val="1620"/>
-              </a:lnSpc>
-              <a:spcAft>
-                <a:spcPts val="300"/>
-              </a:spcAft>
-              <a:buSzPct val="100000"/>
-              <a:buChar char="•"/>
-            </a:pPr>
-            <a:r>
-              <a:rPr lang="en-US" sz="1200" dirty="0">
-                <a:solidFill>
-                  <a:srgbClr val="1C2833"/>
-                </a:solidFill>
-                <a:latin typeface="Arial" pitchFamily="34" charset="0"/>
-                <a:ea typeface="Arial" pitchFamily="34" charset="-122"/>
-                <a:cs typeface="Arial" pitchFamily="34" charset="-120"/>
-              </a:rPr>
-              <a:t>"If you can't say it in a sentence, today is the day you'll find that sentence."</a:t>
-            </a:r>
-            <a:endParaRPr lang="en-US" sz="1200" dirty="0"/>
-          </a:p>
-        </p:txBody>
-      </p:sp>
-      <p:sp>
-        <p:nvSpPr>
-          <p:cNvPr id="6" name="Text 4"/>
           <p:cNvSpPr/>
           <p:nvPr/>
         </p:nvSpPr>
@@ -3866,7 +6300,7 @@
                 <a:ea typeface="Georgia" pitchFamily="34" charset="-122"/>
                 <a:cs typeface="Georgia" pitchFamily="34" charset="-120"/>
               </a:rPr>
-              <a:t>Core (15 min)</a:t>
+              <a:t>Warm-up (5 min)</a:t>
             </a:r>
             <a:endParaRPr lang="en-US" sz="1800" dirty="0"/>
           </a:p>
@@ -3881,7 +6315,7 @@
         <p:spPr>
           <a:xfrm>
             <a:off x="634901" y="883593"/>
-            <a:ext cx="8102798" cy="281880"/>
+            <a:ext cx="8102798" cy="525661"/>
           </a:xfrm>
           <a:prstGeom prst="rect">
             <a:avLst/>
@@ -3904,15 +6338,15 @@
               <a:buChar char="•"/>
             </a:pPr>
             <a:r>
-              <a:rPr lang="en-US" sz="1200" b="1" dirty="0">
-                <a:solidFill>
-                  <a:srgbClr val="1C2833"/>
-                </a:solidFill>
-                <a:latin typeface="Arial" pitchFamily="34" charset="0"/>
-                <a:ea typeface="Arial" pitchFamily="34" charset="-122"/>
-                <a:cs typeface="Arial" pitchFamily="34" charset="-120"/>
-              </a:rPr>
-              <a:t>The six fields of a plan.</a:t>
+              <a:rPr lang="en-US" sz="1200" dirty="0">
+                <a:solidFill>
+                  <a:srgbClr val="1C2833"/>
+                </a:solidFill>
+                <a:latin typeface="Arial" pitchFamily="34" charset="0"/>
+                <a:ea typeface="Arial" pitchFamily="34" charset="-122"/>
+                <a:cs typeface="Arial" pitchFamily="34" charset="-120"/>
+              </a:rPr>
+              <a:t>Daily prompt: </a:t>
             </a:r>
             <a:pPr algn="l" indent="0" marL="0">
               <a:lnSpc>
@@ -3924,6 +6358,26 @@
               <a:buNone/>
             </a:pPr>
             <a:r>
+              <a:rPr lang="en-US" sz="1200" i="1" dirty="0">
+                <a:solidFill>
+                  <a:srgbClr val="1C2833"/>
+                </a:solidFill>
+                <a:latin typeface="Arial" pitchFamily="34" charset="0"/>
+                <a:ea typeface="Arial" pitchFamily="34" charset="-122"/>
+                <a:cs typeface="Arial" pitchFamily="34" charset="-120"/>
+              </a:rPr>
+              <a:t>"In one sentence — what's the question your project will try to answer?"</a:t>
+            </a:r>
+            <a:pPr algn="l" indent="0" marL="0">
+              <a:lnSpc>
+                <a:spcPts val="1620"/>
+              </a:lnSpc>
+              <a:spcAft>
+                <a:spcPts val="300"/>
+              </a:spcAft>
+              <a:buNone/>
+            </a:pPr>
+            <a:r>
               <a:rPr lang="en-US" sz="1200" dirty="0">
                 <a:solidFill>
                   <a:srgbClr val="1C2833"/>
@@ -3932,7 +6386,31 @@
                 <a:ea typeface="Arial" pitchFamily="34" charset="-122"/>
                 <a:cs typeface="Arial" pitchFamily="34" charset="-120"/>
               </a:rPr>
-              <a:t> Walk the class through the template on the board:</a:t>
+              <a:t> 3 students share.</a:t>
+            </a:r>
+            <a:endParaRPr lang="en-US" sz="1200" dirty="0"/>
+          </a:p>
+          <a:p>
+            <a:pPr algn="l" marL="342900" indent="-342900">
+              <a:lnSpc>
+                <a:spcPts val="1620"/>
+              </a:lnSpc>
+              <a:spcAft>
+                <a:spcPts val="300"/>
+              </a:spcAft>
+              <a:buSzPct val="100000"/>
+              <a:buChar char="•"/>
+            </a:pPr>
+            <a:r>
+              <a:rPr lang="en-US" sz="1200" dirty="0">
+                <a:solidFill>
+                  <a:srgbClr val="1C2833"/>
+                </a:solidFill>
+                <a:latin typeface="Arial" pitchFamily="34" charset="0"/>
+                <a:ea typeface="Arial" pitchFamily="34" charset="-122"/>
+                <a:cs typeface="Arial" pitchFamily="34" charset="-120"/>
+              </a:rPr>
+              <a:t>"If you can't say it in a sentence, today is the day you'll find that sentence."</a:t>
             </a:r>
             <a:endParaRPr lang="en-US" sz="1200" dirty="0"/>
           </a:p>
@@ -3946,845 +6424,7 @@
         </p:nvSpPr>
         <p:spPr>
           <a:xfrm>
-            <a:off x="406301" y="1254323"/>
-            <a:ext cx="8498026" cy="213271"/>
-          </a:xfrm>
-          <a:prstGeom prst="rect">
-            <a:avLst/>
-          </a:prstGeom>
-          <a:noFill/>
-          <a:ln/>
-        </p:spPr>
-        <p:txBody>
-          <a:bodyPr wrap="square" lIns="0" tIns="0" rIns="0" bIns="0" rtlCol="0" anchor="t"/>
-          <a:lstStyle/>
-          <a:p>
-            <a:pPr algn="l" indent="0" marL="0">
-              <a:lnSpc>
-                <a:spcPts val="1680"/>
-              </a:lnSpc>
-              <a:spcBef>
-                <a:spcPts val="300"/>
-              </a:spcBef>
-              <a:spcAft>
-                <a:spcPts val="300"/>
-              </a:spcAft>
-              <a:buNone/>
-            </a:pPr>
-            <a:r>
-              <a:rPr lang="en-US" sz="1200" i="1" dirty="0">
-                <a:solidFill>
-                  <a:srgbClr val="1C2833"/>
-                </a:solidFill>
-                <a:latin typeface="Arial" pitchFamily="34" charset="0"/>
-                <a:ea typeface="Arial" pitchFamily="34" charset="-122"/>
-                <a:cs typeface="Arial" pitchFamily="34" charset="-120"/>
-              </a:rPr>
-              <a:t>Each row: Field · What it answers.</a:t>
-            </a:r>
-            <a:endParaRPr lang="en-US" sz="1200" dirty="0"/>
-          </a:p>
-        </p:txBody>
-      </p:sp>
-      <p:sp>
-        <p:nvSpPr>
-          <p:cNvPr id="6" name="Text 4"/>
-          <p:cNvSpPr/>
-          <p:nvPr/>
-        </p:nvSpPr>
-        <p:spPr>
-          <a:xfrm>
-            <a:off x="634901" y="1556445"/>
-            <a:ext cx="8102798" cy="1744563"/>
-          </a:xfrm>
-          <a:prstGeom prst="rect">
-            <a:avLst/>
-          </a:prstGeom>
-          <a:noFill/>
-          <a:ln/>
-        </p:spPr>
-        <p:txBody>
-          <a:bodyPr wrap="square" lIns="0" tIns="0" rIns="0" bIns="0" rtlCol="0" anchor="t"/>
-          <a:lstStyle/>
-          <a:p>
-            <a:pPr algn="l" marL="342900" indent="-342900">
-              <a:lnSpc>
-                <a:spcPts val="1620"/>
-              </a:lnSpc>
-              <a:spcAft>
-                <a:spcPts val="300"/>
-              </a:spcAft>
-              <a:buSzPct val="100000"/>
-              <a:buChar char="•"/>
-            </a:pPr>
-            <a:r>
-              <a:rPr lang="en-US" sz="1200" b="1" dirty="0">
-                <a:solidFill>
-                  <a:srgbClr val="1C2833"/>
-                </a:solidFill>
-                <a:latin typeface="Arial" pitchFamily="34" charset="0"/>
-                <a:ea typeface="Arial" pitchFamily="34" charset="-122"/>
-                <a:cs typeface="Arial" pitchFamily="34" charset="-120"/>
-              </a:rPr>
-              <a:t>Project chosen</a:t>
-            </a:r>
-            <a:pPr algn="l" indent="0" marL="0">
-              <a:lnSpc>
-                <a:spcPts val="1620"/>
-              </a:lnSpc>
-              <a:spcAft>
-                <a:spcPts val="300"/>
-              </a:spcAft>
-              <a:buNone/>
-            </a:pPr>
-            <a:r>
-              <a:rPr lang="en-US" sz="1200" dirty="0">
-                <a:solidFill>
-                  <a:srgbClr val="1C2833"/>
-                </a:solidFill>
-                <a:latin typeface="Arial" pitchFamily="34" charset="0"/>
-                <a:ea typeface="Arial" pitchFamily="34" charset="-122"/>
-                <a:cs typeface="Arial" pitchFamily="34" charset="-120"/>
-              </a:rPr>
-              <a:t> — Which option from the menu (or "open" with anchor module)</a:t>
-            </a:r>
-            <a:endParaRPr lang="en-US" sz="1200" dirty="0"/>
-          </a:p>
-          <a:p>
-            <a:pPr algn="l" marL="342900" indent="-342900">
-              <a:lnSpc>
-                <a:spcPts val="1620"/>
-              </a:lnSpc>
-              <a:spcAft>
-                <a:spcPts val="300"/>
-              </a:spcAft>
-              <a:buSzPct val="100000"/>
-              <a:buChar char="•"/>
-            </a:pPr>
-            <a:r>
-              <a:rPr lang="en-US" sz="1200" b="1" dirty="0">
-                <a:solidFill>
-                  <a:srgbClr val="1C2833"/>
-                </a:solidFill>
-                <a:latin typeface="Arial" pitchFamily="34" charset="0"/>
-                <a:ea typeface="Arial" pitchFamily="34" charset="-122"/>
-                <a:cs typeface="Arial" pitchFamily="34" charset="-120"/>
-              </a:rPr>
-              <a:t>Anchor module</a:t>
-            </a:r>
-            <a:pPr algn="l" indent="0" marL="0">
-              <a:lnSpc>
-                <a:spcPts val="1620"/>
-              </a:lnSpc>
-              <a:spcAft>
-                <a:spcPts val="300"/>
-              </a:spcAft>
-              <a:buNone/>
-            </a:pPr>
-            <a:r>
-              <a:rPr lang="en-US" sz="1200" dirty="0">
-                <a:solidFill>
-                  <a:srgbClr val="1C2833"/>
-                </a:solidFill>
-                <a:latin typeface="Arial" pitchFamily="34" charset="0"/>
-                <a:ea typeface="Arial" pitchFamily="34" charset="-122"/>
-                <a:cs typeface="Arial" pitchFamily="34" charset="-120"/>
-              </a:rPr>
-              <a:t> — Which prior module's framework you'll apply</a:t>
-            </a:r>
-            <a:endParaRPr lang="en-US" sz="1200" dirty="0"/>
-          </a:p>
-          <a:p>
-            <a:pPr algn="l" marL="342900" indent="-342900">
-              <a:lnSpc>
-                <a:spcPts val="1620"/>
-              </a:lnSpc>
-              <a:spcAft>
-                <a:spcPts val="300"/>
-              </a:spcAft>
-              <a:buSzPct val="100000"/>
-              <a:buChar char="•"/>
-            </a:pPr>
-            <a:r>
-              <a:rPr lang="en-US" sz="1200" b="1" dirty="0">
-                <a:solidFill>
-                  <a:srgbClr val="1C2833"/>
-                </a:solidFill>
-                <a:latin typeface="Arial" pitchFamily="34" charset="0"/>
-                <a:ea typeface="Arial" pitchFamily="34" charset="-122"/>
-                <a:cs typeface="Arial" pitchFamily="34" charset="-120"/>
-              </a:rPr>
-              <a:t>Driving question</a:t>
-            </a:r>
-            <a:pPr algn="l" indent="0" marL="0">
-              <a:lnSpc>
-                <a:spcPts val="1620"/>
-              </a:lnSpc>
-              <a:spcAft>
-                <a:spcPts val="300"/>
-              </a:spcAft>
-              <a:buNone/>
-            </a:pPr>
-            <a:r>
-              <a:rPr lang="en-US" sz="1200" dirty="0">
-                <a:solidFill>
-                  <a:srgbClr val="1C2833"/>
-                </a:solidFill>
-                <a:latin typeface="Arial" pitchFamily="34" charset="0"/>
-                <a:ea typeface="Arial" pitchFamily="34" charset="-122"/>
-                <a:cs typeface="Arial" pitchFamily="34" charset="-120"/>
-              </a:rPr>
-              <a:t> — The question this project tries to answer (1 sentence)</a:t>
-            </a:r>
-            <a:endParaRPr lang="en-US" sz="1200" dirty="0"/>
-          </a:p>
-          <a:p>
-            <a:pPr algn="l" marL="342900" indent="-342900">
-              <a:lnSpc>
-                <a:spcPts val="1620"/>
-              </a:lnSpc>
-              <a:spcAft>
-                <a:spcPts val="300"/>
-              </a:spcAft>
-              <a:buSzPct val="100000"/>
-              <a:buChar char="•"/>
-            </a:pPr>
-            <a:r>
-              <a:rPr lang="en-US" sz="1200" b="1" dirty="0">
-                <a:solidFill>
-                  <a:srgbClr val="1C2833"/>
-                </a:solidFill>
-                <a:latin typeface="Arial" pitchFamily="34" charset="0"/>
-                <a:ea typeface="Arial" pitchFamily="34" charset="-122"/>
-                <a:cs typeface="Arial" pitchFamily="34" charset="-120"/>
-              </a:rPr>
-              <a:t>Two candidate sources</a:t>
-            </a:r>
-            <a:pPr algn="l" indent="0" marL="0">
-              <a:lnSpc>
-                <a:spcPts val="1620"/>
-              </a:lnSpc>
-              <a:spcAft>
-                <a:spcPts val="300"/>
-              </a:spcAft>
-              <a:buNone/>
-            </a:pPr>
-            <a:r>
-              <a:rPr lang="en-US" sz="1200" dirty="0">
-                <a:solidFill>
-                  <a:srgbClr val="1C2833"/>
-                </a:solidFill>
-                <a:latin typeface="Arial" pitchFamily="34" charset="0"/>
-                <a:ea typeface="Arial" pitchFamily="34" charset="-122"/>
-                <a:cs typeface="Arial" pitchFamily="34" charset="-120"/>
-              </a:rPr>
-              <a:t> — Where you'll get evidence from (one prior-module cache + one other)</a:t>
-            </a:r>
-            <a:endParaRPr lang="en-US" sz="1200" dirty="0"/>
-          </a:p>
-          <a:p>
-            <a:pPr algn="l" marL="342900" indent="-342900">
-              <a:lnSpc>
-                <a:spcPts val="1620"/>
-              </a:lnSpc>
-              <a:spcAft>
-                <a:spcPts val="300"/>
-              </a:spcAft>
-              <a:buSzPct val="100000"/>
-              <a:buChar char="•"/>
-            </a:pPr>
-            <a:r>
-              <a:rPr lang="en-US" sz="1200" b="1" dirty="0">
-                <a:solidFill>
-                  <a:srgbClr val="1C2833"/>
-                </a:solidFill>
-                <a:latin typeface="Arial" pitchFamily="34" charset="0"/>
-                <a:ea typeface="Arial" pitchFamily="34" charset="-122"/>
-                <a:cs typeface="Arial" pitchFamily="34" charset="-120"/>
-              </a:rPr>
-              <a:t>Artefact format</a:t>
-            </a:r>
-            <a:pPr algn="l" indent="0" marL="0">
-              <a:lnSpc>
-                <a:spcPts val="1620"/>
-              </a:lnSpc>
-              <a:spcAft>
-                <a:spcPts val="300"/>
-              </a:spcAft>
-              <a:buNone/>
-            </a:pPr>
-            <a:r>
-              <a:rPr lang="en-US" sz="1200" dirty="0">
-                <a:solidFill>
-                  <a:srgbClr val="1C2833"/>
-                </a:solidFill>
-                <a:latin typeface="Arial" pitchFamily="34" charset="0"/>
-                <a:ea typeface="Arial" pitchFamily="34" charset="-122"/>
-                <a:cs typeface="Arial" pitchFamily="34" charset="-120"/>
-              </a:rPr>
-              <a:t> — What you'll actually produce (poster / deck / report / etc.)</a:t>
-            </a:r>
-            <a:endParaRPr lang="en-US" sz="1200" dirty="0"/>
-          </a:p>
-          <a:p>
-            <a:pPr algn="l" marL="342900" indent="-342900">
-              <a:lnSpc>
-                <a:spcPts val="1620"/>
-              </a:lnSpc>
-              <a:spcAft>
-                <a:spcPts val="300"/>
-              </a:spcAft>
-              <a:buSzPct val="100000"/>
-              <a:buChar char="•"/>
-            </a:pPr>
-            <a:r>
-              <a:rPr lang="en-US" sz="1200" b="1" dirty="0">
-                <a:solidFill>
-                  <a:srgbClr val="1C2833"/>
-                </a:solidFill>
-                <a:latin typeface="Arial" pitchFamily="34" charset="0"/>
-                <a:ea typeface="Arial" pitchFamily="34" charset="-122"/>
-                <a:cs typeface="Arial" pitchFamily="34" charset="-120"/>
-              </a:rPr>
-              <a:t>Success criteria</a:t>
-            </a:r>
-            <a:pPr algn="l" indent="0" marL="0">
-              <a:lnSpc>
-                <a:spcPts val="1620"/>
-              </a:lnSpc>
-              <a:spcAft>
-                <a:spcPts val="300"/>
-              </a:spcAft>
-              <a:buNone/>
-            </a:pPr>
-            <a:r>
-              <a:rPr lang="en-US" sz="1200" dirty="0">
-                <a:solidFill>
-                  <a:srgbClr val="1C2833"/>
-                </a:solidFill>
-                <a:latin typeface="Arial" pitchFamily="34" charset="0"/>
-                <a:ea typeface="Arial" pitchFamily="34" charset="-122"/>
-                <a:cs typeface="Arial" pitchFamily="34" charset="-120"/>
-              </a:rPr>
-              <a:t> — Three things that, if present in the final, mean it worked</a:t>
-            </a:r>
-            <a:endParaRPr lang="en-US" sz="1200" dirty="0"/>
-          </a:p>
-          <a:p>
-            <a:pPr algn="l" marL="342900" indent="-342900">
-              <a:lnSpc>
-                <a:spcPts val="1620"/>
-              </a:lnSpc>
-              <a:spcAft>
-                <a:spcPts val="300"/>
-              </a:spcAft>
-              <a:buSzPct val="100000"/>
-              <a:buChar char="•"/>
-            </a:pPr>
-            <a:r>
-              <a:rPr lang="en-US" sz="1200" b="1" dirty="0">
-                <a:solidFill>
-                  <a:srgbClr val="1C2833"/>
-                </a:solidFill>
-                <a:latin typeface="Arial" pitchFamily="34" charset="0"/>
-                <a:ea typeface="Arial" pitchFamily="34" charset="-122"/>
-                <a:cs typeface="Arial" pitchFamily="34" charset="-120"/>
-              </a:rPr>
-              <a:t>Materials needed</a:t>
-            </a:r>
-            <a:pPr algn="l" indent="0" marL="0">
-              <a:lnSpc>
-                <a:spcPts val="1620"/>
-              </a:lnSpc>
-              <a:spcAft>
-                <a:spcPts val="300"/>
-              </a:spcAft>
-              <a:buNone/>
-            </a:pPr>
-            <a:r>
-              <a:rPr lang="en-US" sz="1200" dirty="0">
-                <a:solidFill>
-                  <a:srgbClr val="1C2833"/>
-                </a:solidFill>
-                <a:latin typeface="Arial" pitchFamily="34" charset="0"/>
-                <a:ea typeface="Arial" pitchFamily="34" charset="-122"/>
-                <a:cs typeface="Arial" pitchFamily="34" charset="-120"/>
-              </a:rPr>
-              <a:t> — What you need to bring or have stocked</a:t>
-            </a:r>
-            <a:endParaRPr lang="en-US" sz="1200" dirty="0"/>
-          </a:p>
-        </p:txBody>
-      </p:sp>
-      <p:sp>
-        <p:nvSpPr>
-          <p:cNvPr id="7" name="Text 5"/>
-          <p:cNvSpPr/>
-          <p:nvPr/>
-        </p:nvSpPr>
-        <p:spPr>
-          <a:xfrm>
-            <a:off x="634901" y="3402509"/>
-            <a:ext cx="8102798" cy="281880"/>
-          </a:xfrm>
-          <a:prstGeom prst="rect">
-            <a:avLst/>
-          </a:prstGeom>
-          <a:noFill/>
-          <a:ln/>
-        </p:spPr>
-        <p:txBody>
-          <a:bodyPr wrap="square" lIns="0" tIns="0" rIns="0" bIns="0" rtlCol="0" anchor="t"/>
-          <a:lstStyle/>
-          <a:p>
-            <a:pPr algn="l" marL="342900" indent="-342900">
-              <a:lnSpc>
-                <a:spcPts val="1620"/>
-              </a:lnSpc>
-              <a:spcAft>
-                <a:spcPts val="300"/>
-              </a:spcAft>
-              <a:buSzPct val="100000"/>
-              <a:buChar char="•"/>
-            </a:pPr>
-            <a:r>
-              <a:rPr lang="en-US" sz="1200" b="1" dirty="0">
-                <a:solidFill>
-                  <a:srgbClr val="1C2833"/>
-                </a:solidFill>
-                <a:latin typeface="Arial" pitchFamily="34" charset="0"/>
-                <a:ea typeface="Arial" pitchFamily="34" charset="-122"/>
-                <a:cs typeface="Arial" pitchFamily="34" charset="-120"/>
-              </a:rPr>
-              <a:t>A worked example on the board.</a:t>
-            </a:r>
-            <a:pPr algn="l" indent="0" marL="0">
-              <a:lnSpc>
-                <a:spcPts val="1620"/>
-              </a:lnSpc>
-              <a:spcAft>
-                <a:spcPts val="300"/>
-              </a:spcAft>
-              <a:buNone/>
-            </a:pPr>
-            <a:r>
-              <a:rPr lang="en-US" sz="1200" dirty="0">
-                <a:solidFill>
-                  <a:srgbClr val="1C2833"/>
-                </a:solidFill>
-                <a:latin typeface="Arial" pitchFamily="34" charset="0"/>
-                <a:ea typeface="Arial" pitchFamily="34" charset="-122"/>
-                <a:cs typeface="Arial" pitchFamily="34" charset="-120"/>
-              </a:rPr>
-              <a:t> Take one project (e.g. Project 4 — herb deck) and fill in each field aloud:</a:t>
-            </a:r>
-            <a:endParaRPr lang="en-US" sz="1200" dirty="0"/>
-          </a:p>
-        </p:txBody>
-      </p:sp>
-      <p:sp>
-        <p:nvSpPr>
-          <p:cNvPr id="8" name="Text 6"/>
-          <p:cNvSpPr/>
-          <p:nvPr/>
-        </p:nvSpPr>
-        <p:spPr>
-          <a:xfrm>
-            <a:off x="406301" y="3773239"/>
-            <a:ext cx="8498026" cy="1502420"/>
-          </a:xfrm>
-          <a:prstGeom prst="rect">
-            <a:avLst/>
-          </a:prstGeom>
-          <a:noFill/>
-          <a:ln/>
-        </p:spPr>
-        <p:txBody>
-          <a:bodyPr wrap="square" lIns="0" tIns="0" rIns="0" bIns="0" rtlCol="0" anchor="t"/>
-          <a:lstStyle/>
-          <a:p>
-            <a:pPr algn="l" indent="0" marL="0">
-              <a:lnSpc>
-                <a:spcPts val="1680"/>
-              </a:lnSpc>
-              <a:spcBef>
-                <a:spcPts val="300"/>
-              </a:spcBef>
-              <a:spcAft>
-                <a:spcPts val="300"/>
-              </a:spcAft>
-              <a:buNone/>
-            </a:pPr>
-            <a:r>
-              <a:rPr lang="en-US" sz="1200" dirty="0">
-                <a:solidFill>
-                  <a:srgbClr val="1C2833"/>
-                </a:solidFill>
-                <a:latin typeface="Arial" pitchFamily="34" charset="0"/>
-                <a:ea typeface="Arial" pitchFamily="34" charset="-122"/>
-                <a:cs typeface="Arial" pitchFamily="34" charset="-120"/>
-              </a:rPr>
-              <a:t>– Project chosen: Herb deck (10 herbs from my neighbourhood). – Anchor module: Module 10 — Auṣadhi. – Driving question: </a:t>
-            </a:r>
-            <a:pPr algn="l" indent="0" marL="0">
-              <a:lnSpc>
-                <a:spcPts val="1680"/>
-              </a:lnSpc>
-              <a:spcBef>
-                <a:spcPts val="300"/>
-              </a:spcBef>
-              <a:spcAft>
-                <a:spcPts val="300"/>
-              </a:spcAft>
-              <a:buNone/>
-            </a:pPr>
-            <a:r>
-              <a:rPr lang="en-US" sz="1200" i="1" dirty="0">
-                <a:solidFill>
-                  <a:srgbClr val="1C2833"/>
-                </a:solidFill>
-                <a:latin typeface="Arial" pitchFamily="34" charset="0"/>
-                <a:ea typeface="Arial" pitchFamily="34" charset="-122"/>
-                <a:cs typeface="Arial" pitchFamily="34" charset="-120"/>
-              </a:rPr>
-              <a:t>Which 10 herbs grow within 200 m of my home, and what does the tradition say about each?</a:t>
-            </a:r>
-            <a:pPr algn="l" indent="0" marL="0">
-              <a:lnSpc>
-                <a:spcPts val="1680"/>
-              </a:lnSpc>
-              <a:spcBef>
-                <a:spcPts val="300"/>
-              </a:spcBef>
-              <a:spcAft>
-                <a:spcPts val="300"/>
-              </a:spcAft>
-              <a:buNone/>
-            </a:pPr>
-            <a:r>
-              <a:rPr lang="en-US" sz="1200" dirty="0">
-                <a:solidFill>
-                  <a:srgbClr val="1C2833"/>
-                </a:solidFill>
-                <a:latin typeface="Arial" pitchFamily="34" charset="0"/>
-                <a:ea typeface="Arial" pitchFamily="34" charset="-122"/>
-                <a:cs typeface="Arial" pitchFamily="34" charset="-120"/>
-              </a:rPr>
-              <a:t> – Two candidate sources: Module 10's </a:t>
-            </a:r>
-            <a:pPr algn="l" indent="0" marL="0">
-              <a:lnSpc>
-                <a:spcPts val="1680"/>
-              </a:lnSpc>
-              <a:spcBef>
-                <a:spcPts val="300"/>
-              </a:spcBef>
-              <a:spcAft>
-                <a:spcPts val="300"/>
-              </a:spcAft>
-              <a:buNone/>
-            </a:pPr>
-            <a:r>
-              <a:rPr lang="en-US" sz="1200" dirty="0">
-                <a:solidFill>
-                  <a:srgbClr val="1C2833"/>
-                </a:solidFill>
-                <a:latin typeface="Arial" pitchFamily="34" charset="0"/>
-                <a:ea typeface="Arial" pitchFamily="34" charset="-122"/>
-                <a:cs typeface="Arial" pitchFamily="34" charset="-120"/>
-              </a:rPr>
-              <a:t>.rag-cache/</a:t>
-            </a:r>
-            <a:pPr algn="l" indent="0" marL="0">
-              <a:lnSpc>
-                <a:spcPts val="1680"/>
-              </a:lnSpc>
-              <a:spcBef>
-                <a:spcPts val="300"/>
-              </a:spcBef>
-              <a:spcAft>
-                <a:spcPts val="300"/>
-              </a:spcAft>
-              <a:buNone/>
-            </a:pPr>
-            <a:r>
-              <a:rPr lang="en-US" sz="1200" dirty="0">
-                <a:solidFill>
-                  <a:srgbClr val="1C2833"/>
-                </a:solidFill>
-                <a:latin typeface="Arial" pitchFamily="34" charset="0"/>
-                <a:ea typeface="Arial" pitchFamily="34" charset="-122"/>
-                <a:cs typeface="Arial" pitchFamily="34" charset="-120"/>
-              </a:rPr>
-              <a:t> (for Ayurvedic uses); Pradip Krishen's </a:t>
-            </a:r>
-            <a:pPr algn="l" indent="0" marL="0">
-              <a:lnSpc>
-                <a:spcPts val="1680"/>
-              </a:lnSpc>
-              <a:spcBef>
-                <a:spcPts val="300"/>
-              </a:spcBef>
-              <a:spcAft>
-                <a:spcPts val="300"/>
-              </a:spcAft>
-              <a:buNone/>
-            </a:pPr>
-            <a:r>
-              <a:rPr lang="en-US" sz="1200" i="1" dirty="0">
-                <a:solidFill>
-                  <a:srgbClr val="1C2833"/>
-                </a:solidFill>
-                <a:latin typeface="Arial" pitchFamily="34" charset="0"/>
-                <a:ea typeface="Arial" pitchFamily="34" charset="-122"/>
-                <a:cs typeface="Arial" pitchFamily="34" charset="-120"/>
-              </a:rPr>
-              <a:t>Trees of Delhi</a:t>
-            </a:r>
-            <a:pPr algn="l" indent="0" marL="0">
-              <a:lnSpc>
-                <a:spcPts val="1680"/>
-              </a:lnSpc>
-              <a:spcBef>
-                <a:spcPts val="300"/>
-              </a:spcBef>
-              <a:spcAft>
-                <a:spcPts val="300"/>
-              </a:spcAft>
-              <a:buNone/>
-            </a:pPr>
-            <a:r>
-              <a:rPr lang="en-US" sz="1200" dirty="0">
-                <a:solidFill>
-                  <a:srgbClr val="1C2833"/>
-                </a:solidFill>
-                <a:latin typeface="Arial" pitchFamily="34" charset="0"/>
-                <a:ea typeface="Arial" pitchFamily="34" charset="-122"/>
-                <a:cs typeface="Arial" pitchFamily="34" charset="-120"/>
-              </a:rPr>
-              <a:t> for identification (or a state forest-department field guide for your region). – Artefact format: 10 cards (postcard size), front = photo + sketch, back = Sanskrit name + English + use + part used. – Success criteria: (a) all 10 are real plants from my neighbourhood, (b) every card has a verifiable Ayurvedic note from the cache, (c) the deck is bound or stored together (not 10 loose pages). – Materials: cardstock or thick paper, glue, sketch pens, camera or phone.</a:t>
-            </a:r>
-            <a:endParaRPr lang="en-US" sz="1200" dirty="0"/>
-          </a:p>
-        </p:txBody>
-      </p:sp>
-      <p:sp>
-        <p:nvSpPr>
-          <p:cNvPr id="9" name="Text 7"/>
-          <p:cNvSpPr/>
-          <p:nvPr/>
-        </p:nvSpPr>
-        <p:spPr>
-          <a:xfrm>
-            <a:off x="634901" y="5364510"/>
-            <a:ext cx="8102798" cy="281880"/>
-          </a:xfrm>
-          <a:prstGeom prst="rect">
-            <a:avLst/>
-          </a:prstGeom>
-          <a:noFill/>
-          <a:ln/>
-        </p:spPr>
-        <p:txBody>
-          <a:bodyPr wrap="square" lIns="0" tIns="0" rIns="0" bIns="0" rtlCol="0" anchor="t"/>
-          <a:lstStyle/>
-          <a:p>
-            <a:pPr algn="l" marL="342900" indent="-342900">
-              <a:lnSpc>
-                <a:spcPts val="1620"/>
-              </a:lnSpc>
-              <a:spcAft>
-                <a:spcPts val="300"/>
-              </a:spcAft>
-              <a:buSzPct val="100000"/>
-              <a:buChar char="•"/>
-            </a:pPr>
-            <a:r>
-              <a:rPr lang="en-US" sz="1200" b="1" dirty="0">
-                <a:solidFill>
-                  <a:srgbClr val="1C2833"/>
-                </a:solidFill>
-                <a:latin typeface="Arial" pitchFamily="34" charset="0"/>
-                <a:ea typeface="Arial" pitchFamily="34" charset="-122"/>
-                <a:cs typeface="Arial" pitchFamily="34" charset="-120"/>
-              </a:rPr>
-              <a:t>The over-scoping trap.</a:t>
-            </a:r>
-            <a:pPr algn="l" indent="0" marL="0">
-              <a:lnSpc>
-                <a:spcPts val="1620"/>
-              </a:lnSpc>
-              <a:spcAft>
-                <a:spcPts val="300"/>
-              </a:spcAft>
-              <a:buNone/>
-            </a:pPr>
-            <a:r>
-              <a:rPr lang="en-US" sz="1200" dirty="0">
-                <a:solidFill>
-                  <a:srgbClr val="1C2833"/>
-                </a:solidFill>
-                <a:latin typeface="Arial" pitchFamily="34" charset="0"/>
-                <a:ea typeface="Arial" pitchFamily="34" charset="-122"/>
-                <a:cs typeface="Arial" pitchFamily="34" charset="-120"/>
-              </a:rPr>
-              <a:t> Three signs your plan is too big:</a:t>
-            </a:r>
-            <a:endParaRPr lang="en-US" sz="1200" dirty="0"/>
-          </a:p>
-        </p:txBody>
-      </p:sp>
-      <p:sp>
-        <p:nvSpPr>
-          <p:cNvPr id="10" name="Text 8"/>
-          <p:cNvSpPr/>
-          <p:nvPr/>
-        </p:nvSpPr>
-        <p:spPr>
-          <a:xfrm>
-            <a:off x="406301" y="5735241"/>
-            <a:ext cx="8498026" cy="426541"/>
-          </a:xfrm>
-          <a:prstGeom prst="rect">
-            <a:avLst/>
-          </a:prstGeom>
-          <a:noFill/>
-          <a:ln/>
-        </p:spPr>
-        <p:txBody>
-          <a:bodyPr wrap="square" lIns="0" tIns="0" rIns="0" bIns="0" rtlCol="0" anchor="t"/>
-          <a:lstStyle/>
-          <a:p>
-            <a:pPr algn="l" indent="0" marL="0">
-              <a:lnSpc>
-                <a:spcPts val="1680"/>
-              </a:lnSpc>
-              <a:spcBef>
-                <a:spcPts val="300"/>
-              </a:spcBef>
-              <a:spcAft>
-                <a:spcPts val="300"/>
-              </a:spcAft>
-              <a:buNone/>
-            </a:pPr>
-            <a:r>
-              <a:rPr lang="en-US" sz="1200" dirty="0">
-                <a:solidFill>
-                  <a:srgbClr val="1C2833"/>
-                </a:solidFill>
-                <a:latin typeface="Arial" pitchFamily="34" charset="0"/>
-                <a:ea typeface="Arial" pitchFamily="34" charset="-122"/>
-                <a:cs typeface="Arial" pitchFamily="34" charset="-120"/>
-              </a:rPr>
-              <a:t>– You can't list the materials in 30 seconds.    – You can't say what's done in fewer than 5 sentences.    – You'd need an extra week to finish.</a:t>
-            </a:r>
-            <a:endParaRPr lang="en-US" sz="1200" dirty="0"/>
-          </a:p>
-        </p:txBody>
-      </p:sp>
-      <p:sp>
-        <p:nvSpPr>
-          <p:cNvPr id="11" name="Text 9"/>
-          <p:cNvSpPr/>
-          <p:nvPr/>
-        </p:nvSpPr>
-        <p:spPr>
-          <a:xfrm>
-            <a:off x="406301" y="6237982"/>
-            <a:ext cx="8498026" cy="213271"/>
-          </a:xfrm>
-          <a:prstGeom prst="rect">
-            <a:avLst/>
-          </a:prstGeom>
-          <a:noFill/>
-          <a:ln/>
-        </p:spPr>
-        <p:txBody>
-          <a:bodyPr wrap="square" lIns="0" tIns="0" rIns="0" bIns="0" rtlCol="0" anchor="t"/>
-          <a:lstStyle/>
-          <a:p>
-            <a:pPr algn="l" indent="0" marL="0">
-              <a:lnSpc>
-                <a:spcPts val="1680"/>
-              </a:lnSpc>
-              <a:spcBef>
-                <a:spcPts val="300"/>
-              </a:spcBef>
-              <a:spcAft>
-                <a:spcPts val="300"/>
-              </a:spcAft>
-              <a:buNone/>
-            </a:pPr>
-            <a:r>
-              <a:rPr lang="en-US" sz="1200" dirty="0">
-                <a:solidFill>
-                  <a:srgbClr val="1C2833"/>
-                </a:solidFill>
-                <a:latin typeface="Arial" pitchFamily="34" charset="0"/>
-                <a:ea typeface="Arial" pitchFamily="34" charset="-122"/>
-                <a:cs typeface="Arial" pitchFamily="34" charset="-120"/>
-              </a:rPr>
-              <a:t>"If any of these are true, </a:t>
-            </a:r>
-            <a:pPr algn="l" indent="0" marL="0">
-              <a:lnSpc>
-                <a:spcPts val="1680"/>
-              </a:lnSpc>
-              <a:spcBef>
-                <a:spcPts val="300"/>
-              </a:spcBef>
-              <a:spcAft>
-                <a:spcPts val="300"/>
-              </a:spcAft>
-              <a:buNone/>
-            </a:pPr>
-            <a:r>
-              <a:rPr lang="en-US" sz="1200" i="1" dirty="0">
-                <a:solidFill>
-                  <a:srgbClr val="1C2833"/>
-                </a:solidFill>
-                <a:latin typeface="Arial" pitchFamily="34" charset="0"/>
-                <a:ea typeface="Arial" pitchFamily="34" charset="-122"/>
-                <a:cs typeface="Arial" pitchFamily="34" charset="-120"/>
-              </a:rPr>
-              <a:t>cut your project in half</a:t>
-            </a:r>
-            <a:pPr algn="l" indent="0" marL="0">
-              <a:lnSpc>
-                <a:spcPts val="1680"/>
-              </a:lnSpc>
-              <a:spcBef>
-                <a:spcPts val="300"/>
-              </a:spcBef>
-              <a:spcAft>
-                <a:spcPts val="300"/>
-              </a:spcAft>
-              <a:buNone/>
-            </a:pPr>
-            <a:r>
-              <a:rPr lang="en-US" sz="1200" dirty="0">
-                <a:solidFill>
-                  <a:srgbClr val="1C2833"/>
-                </a:solidFill>
-                <a:latin typeface="Arial" pitchFamily="34" charset="0"/>
-                <a:ea typeface="Arial" pitchFamily="34" charset="-122"/>
-                <a:cs typeface="Arial" pitchFamily="34" charset="-120"/>
-              </a:rPr>
-              <a:t>. A small finished piece beats a large half-finished one."</a:t>
-            </a:r>
-            <a:endParaRPr lang="en-US" sz="1200" dirty="0"/>
-          </a:p>
-        </p:txBody>
-      </p:sp>
-      <p:sp>
-        <p:nvSpPr>
-          <p:cNvPr id="12" name="Text 10"/>
-          <p:cNvSpPr/>
-          <p:nvPr/>
-        </p:nvSpPr>
-        <p:spPr>
-          <a:xfrm>
-            <a:off x="406301" y="6603653"/>
+            <a:off x="406301" y="4434929"/>
             <a:ext cx="8498026" cy="213271"/>
           </a:xfrm>
           <a:prstGeom prst="rect">
@@ -4928,7 +6568,7 @@
                 <a:ea typeface="Georgia" pitchFamily="34" charset="-122"/>
                 <a:cs typeface="Georgia" pitchFamily="34" charset="-120"/>
               </a:rPr>
-              <a:t>Activity (20 min) — Write the plan</a:t>
+              <a:t>Core (15 min)</a:t>
             </a:r>
             <a:endParaRPr lang="en-US" sz="1800" dirty="0"/>
           </a:p>
@@ -4942,8 +6582,8 @@
         </p:nvSpPr>
         <p:spPr>
           <a:xfrm>
-            <a:off x="406301" y="870942"/>
-            <a:ext cx="8498026" cy="426541"/>
+            <a:off x="634901" y="883593"/>
+            <a:ext cx="8102798" cy="281880"/>
           </a:xfrm>
           <a:prstGeom prst="rect">
             <a:avLst/>
@@ -4955,6 +6595,72 @@
           <a:bodyPr wrap="square" lIns="0" tIns="0" rIns="0" bIns="0" rtlCol="0" anchor="t"/>
           <a:lstStyle/>
           <a:p>
+            <a:pPr algn="l" marL="342900" indent="-342900">
+              <a:lnSpc>
+                <a:spcPts val="1620"/>
+              </a:lnSpc>
+              <a:spcAft>
+                <a:spcPts val="300"/>
+              </a:spcAft>
+              <a:buSzPct val="100000"/>
+              <a:buChar char="•"/>
+            </a:pPr>
+            <a:r>
+              <a:rPr lang="en-US" sz="1200" b="1" dirty="0">
+                <a:solidFill>
+                  <a:srgbClr val="1C2833"/>
+                </a:solidFill>
+                <a:latin typeface="Arial" pitchFamily="34" charset="0"/>
+                <a:ea typeface="Arial" pitchFamily="34" charset="-122"/>
+                <a:cs typeface="Arial" pitchFamily="34" charset="-120"/>
+              </a:rPr>
+              <a:t>The six fields of a plan.</a:t>
+            </a:r>
+            <a:pPr algn="l" indent="0" marL="0">
+              <a:lnSpc>
+                <a:spcPts val="1620"/>
+              </a:lnSpc>
+              <a:spcAft>
+                <a:spcPts val="300"/>
+              </a:spcAft>
+              <a:buNone/>
+            </a:pPr>
+            <a:r>
+              <a:rPr lang="en-US" sz="1200" dirty="0">
+                <a:solidFill>
+                  <a:srgbClr val="1C2833"/>
+                </a:solidFill>
+                <a:latin typeface="Arial" pitchFamily="34" charset="0"/>
+                <a:ea typeface="Arial" pitchFamily="34" charset="-122"/>
+                <a:cs typeface="Arial" pitchFamily="34" charset="-120"/>
+              </a:rPr>
+              <a:t> Walk the class through the template on the board:</a:t>
+            </a:r>
+            <a:endParaRPr lang="en-US" sz="1200" dirty="0"/>
+          </a:p>
+        </p:txBody>
+      </p:sp>
+      <p:sp>
+        <p:nvSpPr>
+          <p:cNvPr id="5" name="Text 3"/>
+          <p:cNvSpPr/>
+          <p:nvPr/>
+        </p:nvSpPr>
+        <p:spPr>
+          <a:xfrm>
+            <a:off x="406301" y="1254323"/>
+            <a:ext cx="8498026" cy="213271"/>
+          </a:xfrm>
+          <a:prstGeom prst="rect">
+            <a:avLst/>
+          </a:prstGeom>
+          <a:noFill/>
+          <a:ln/>
+        </p:spPr>
+        <p:txBody>
+          <a:bodyPr wrap="square" lIns="0" tIns="0" rIns="0" bIns="0" rtlCol="0" anchor="t"/>
+          <a:lstStyle/>
+          <a:p>
             <a:pPr algn="l" indent="0" marL="0">
               <a:lnSpc>
                 <a:spcPts val="1680"/>
@@ -4968,29 +6674,6 @@
               <a:buNone/>
             </a:pPr>
             <a:r>
-              <a:rPr lang="en-US" sz="1200" dirty="0">
-                <a:solidFill>
-                  <a:srgbClr val="1C2833"/>
-                </a:solidFill>
-                <a:latin typeface="Arial" pitchFamily="34" charset="0"/>
-                <a:ea typeface="Arial" pitchFamily="34" charset="-122"/>
-                <a:cs typeface="Arial" pitchFamily="34" charset="-120"/>
-              </a:rPr>
-              <a:t>– 18 minutes silent writing on the template. – Last 2 minutes: pair-swap. Read your partner's plan. On a sticky note, write </a:t>
-            </a:r>
-            <a:pPr algn="l" indent="0" marL="0">
-              <a:lnSpc>
-                <a:spcPts val="1680"/>
-              </a:lnSpc>
-              <a:spcBef>
-                <a:spcPts val="300"/>
-              </a:spcBef>
-              <a:spcAft>
-                <a:spcPts val="300"/>
-              </a:spcAft>
-              <a:buNone/>
-            </a:pPr>
-            <a:r>
               <a:rPr lang="en-US" sz="1200" i="1" dirty="0">
                 <a:solidFill>
                   <a:srgbClr val="1C2833"/>
@@ -4999,76 +6682,7 @@
                 <a:ea typeface="Arial" pitchFamily="34" charset="-122"/>
                 <a:cs typeface="Arial" pitchFamily="34" charset="-120"/>
               </a:rPr>
-              <a:t>one thing that's clear</a:t>
-            </a:r>
-            <a:pPr algn="l" indent="0" marL="0">
-              <a:lnSpc>
-                <a:spcPts val="1680"/>
-              </a:lnSpc>
-              <a:spcBef>
-                <a:spcPts val="300"/>
-              </a:spcBef>
-              <a:spcAft>
-                <a:spcPts val="300"/>
-              </a:spcAft>
-              <a:buNone/>
-            </a:pPr>
-            <a:r>
-              <a:rPr lang="en-US" sz="1200" dirty="0">
-                <a:solidFill>
-                  <a:srgbClr val="1C2833"/>
-                </a:solidFill>
-                <a:latin typeface="Arial" pitchFamily="34" charset="0"/>
-                <a:ea typeface="Arial" pitchFamily="34" charset="-122"/>
-                <a:cs typeface="Arial" pitchFamily="34" charset="-120"/>
-              </a:rPr>
-              <a:t> and </a:t>
-            </a:r>
-            <a:pPr algn="l" indent="0" marL="0">
-              <a:lnSpc>
-                <a:spcPts val="1680"/>
-              </a:lnSpc>
-              <a:spcBef>
-                <a:spcPts val="300"/>
-              </a:spcBef>
-              <a:spcAft>
-                <a:spcPts val="300"/>
-              </a:spcAft>
-              <a:buNone/>
-            </a:pPr>
-            <a:r>
-              <a:rPr lang="en-US" sz="1200" i="1" dirty="0">
-                <a:solidFill>
-                  <a:srgbClr val="1C2833"/>
-                </a:solidFill>
-                <a:latin typeface="Arial" pitchFamily="34" charset="0"/>
-                <a:ea typeface="Arial" pitchFamily="34" charset="-122"/>
-                <a:cs typeface="Arial" pitchFamily="34" charset="-120"/>
-              </a:rPr>
-              <a:t>one thing that's unclear</a:t>
-            </a:r>
-            <a:pPr algn="l" indent="0" marL="0">
-              <a:lnSpc>
-                <a:spcPts val="1680"/>
-              </a:lnSpc>
-              <a:spcBef>
-                <a:spcPts val="300"/>
-              </a:spcBef>
-              <a:spcAft>
-                <a:spcPts val="300"/>
-              </a:spcAft>
-              <a:buNone/>
-            </a:pPr>
-            <a:r>
-              <a:rPr lang="en-US" sz="1200" dirty="0">
-                <a:solidFill>
-                  <a:srgbClr val="1C2833"/>
-                </a:solidFill>
-                <a:latin typeface="Arial" pitchFamily="34" charset="0"/>
-                <a:ea typeface="Arial" pitchFamily="34" charset="-122"/>
-                <a:cs typeface="Arial" pitchFamily="34" charset="-120"/>
-              </a:rPr>
-              <a:t>. Hand the sticky back.</a:t>
+              <a:t>Each row: Field · What it answers.</a:t>
             </a:r>
             <a:endParaRPr lang="en-US" sz="1200" dirty="0"/>
           </a:p>
@@ -5076,7 +6690,7 @@
       </p:sp>
       <p:sp>
         <p:nvSpPr>
-          <p:cNvPr id="5" name="Text 3"/>
+          <p:cNvPr id="6" name="Text 4"/>
           <p:cNvSpPr/>
           <p:nvPr/>
         </p:nvSpPr>
@@ -5226,7 +6840,7 @@
                 <a:ea typeface="Georgia" pitchFamily="34" charset="-122"/>
                 <a:cs typeface="Georgia" pitchFamily="34" charset="-120"/>
               </a:rPr>
-              <a:t>Wrap-up (5 min)</a:t>
+              <a:t>Core (15 min) (cont.)</a:t>
             </a:r>
             <a:endParaRPr lang="en-US" sz="1800" dirty="0"/>
           </a:p>
@@ -5241,7 +6855,7 @@
         <p:spPr>
           <a:xfrm>
             <a:off x="634901" y="883593"/>
-            <a:ext cx="8102798" cy="487561"/>
+            <a:ext cx="8102798" cy="1500783"/>
           </a:xfrm>
           <a:prstGeom prst="rect">
             <a:avLst/>
@@ -5272,7 +6886,7 @@
                 <a:ea typeface="Arial" pitchFamily="34" charset="-122"/>
                 <a:cs typeface="Arial" pitchFamily="34" charset="-120"/>
               </a:rPr>
-              <a:t>Submit plans into the in-tray</a:t>
+              <a:t>Project chosen</a:t>
             </a:r>
             <a:pPr algn="l" indent="0" marL="0">
               <a:lnSpc>
@@ -5292,132 +6906,235 @@
                 <a:ea typeface="Arial" pitchFamily="34" charset="-122"/>
                 <a:cs typeface="Arial" pitchFamily="34" charset="-120"/>
               </a:rPr>
-              <a:t> as you leave. Teacher reads tonight; flagged plans get a 10-min check-in tomorrow morning.</a:t>
+              <a:t> — Which option from the menu (or "open" with anchor module)</a:t>
             </a:r>
             <a:endParaRPr lang="en-US" sz="1200" dirty="0"/>
           </a:p>
+          <a:p>
+            <a:pPr algn="l" marL="342900" indent="-342900">
+              <a:lnSpc>
+                <a:spcPts val="1620"/>
+              </a:lnSpc>
+              <a:spcAft>
+                <a:spcPts val="300"/>
+              </a:spcAft>
+              <a:buSzPct val="100000"/>
+              <a:buChar char="•"/>
+            </a:pPr>
+            <a:r>
+              <a:rPr lang="en-US" sz="1200" b="1" dirty="0">
+                <a:solidFill>
+                  <a:srgbClr val="1C2833"/>
+                </a:solidFill>
+                <a:latin typeface="Arial" pitchFamily="34" charset="0"/>
+                <a:ea typeface="Arial" pitchFamily="34" charset="-122"/>
+                <a:cs typeface="Arial" pitchFamily="34" charset="-120"/>
+              </a:rPr>
+              <a:t>Anchor module</a:t>
+            </a:r>
+            <a:pPr algn="l" indent="0" marL="0">
+              <a:lnSpc>
+                <a:spcPts val="1620"/>
+              </a:lnSpc>
+              <a:spcAft>
+                <a:spcPts val="300"/>
+              </a:spcAft>
+              <a:buNone/>
+            </a:pPr>
+            <a:r>
+              <a:rPr lang="en-US" sz="1200" dirty="0">
+                <a:solidFill>
+                  <a:srgbClr val="1C2833"/>
+                </a:solidFill>
+                <a:latin typeface="Arial" pitchFamily="34" charset="0"/>
+                <a:ea typeface="Arial" pitchFamily="34" charset="-122"/>
+                <a:cs typeface="Arial" pitchFamily="34" charset="-120"/>
+              </a:rPr>
+              <a:t> — Which prior module's framework you'll apply</a:t>
+            </a:r>
+            <a:endParaRPr lang="en-US" sz="1200" dirty="0"/>
+          </a:p>
+          <a:p>
+            <a:pPr algn="l" marL="342900" indent="-342900">
+              <a:lnSpc>
+                <a:spcPts val="1620"/>
+              </a:lnSpc>
+              <a:spcAft>
+                <a:spcPts val="300"/>
+              </a:spcAft>
+              <a:buSzPct val="100000"/>
+              <a:buChar char="•"/>
+            </a:pPr>
+            <a:r>
+              <a:rPr lang="en-US" sz="1200" b="1" dirty="0">
+                <a:solidFill>
+                  <a:srgbClr val="1C2833"/>
+                </a:solidFill>
+                <a:latin typeface="Arial" pitchFamily="34" charset="0"/>
+                <a:ea typeface="Arial" pitchFamily="34" charset="-122"/>
+                <a:cs typeface="Arial" pitchFamily="34" charset="-120"/>
+              </a:rPr>
+              <a:t>Driving question</a:t>
+            </a:r>
+            <a:pPr algn="l" indent="0" marL="0">
+              <a:lnSpc>
+                <a:spcPts val="1620"/>
+              </a:lnSpc>
+              <a:spcAft>
+                <a:spcPts val="300"/>
+              </a:spcAft>
+              <a:buNone/>
+            </a:pPr>
+            <a:r>
+              <a:rPr lang="en-US" sz="1200" dirty="0">
+                <a:solidFill>
+                  <a:srgbClr val="1C2833"/>
+                </a:solidFill>
+                <a:latin typeface="Arial" pitchFamily="34" charset="0"/>
+                <a:ea typeface="Arial" pitchFamily="34" charset="-122"/>
+                <a:cs typeface="Arial" pitchFamily="34" charset="-120"/>
+              </a:rPr>
+              <a:t> — The question this project tries to answer (1 sentence)</a:t>
+            </a:r>
+            <a:endParaRPr lang="en-US" sz="1200" dirty="0"/>
+          </a:p>
+          <a:p>
+            <a:pPr algn="l" marL="342900" indent="-342900">
+              <a:lnSpc>
+                <a:spcPts val="1620"/>
+              </a:lnSpc>
+              <a:spcAft>
+                <a:spcPts val="300"/>
+              </a:spcAft>
+              <a:buSzPct val="100000"/>
+              <a:buChar char="•"/>
+            </a:pPr>
+            <a:r>
+              <a:rPr lang="en-US" sz="1200" b="1" dirty="0">
+                <a:solidFill>
+                  <a:srgbClr val="1C2833"/>
+                </a:solidFill>
+                <a:latin typeface="Arial" pitchFamily="34" charset="0"/>
+                <a:ea typeface="Arial" pitchFamily="34" charset="-122"/>
+                <a:cs typeface="Arial" pitchFamily="34" charset="-120"/>
+              </a:rPr>
+              <a:t>Two candidate sources</a:t>
+            </a:r>
+            <a:pPr algn="l" indent="0" marL="0">
+              <a:lnSpc>
+                <a:spcPts val="1620"/>
+              </a:lnSpc>
+              <a:spcAft>
+                <a:spcPts val="300"/>
+              </a:spcAft>
+              <a:buNone/>
+            </a:pPr>
+            <a:r>
+              <a:rPr lang="en-US" sz="1200" dirty="0">
+                <a:solidFill>
+                  <a:srgbClr val="1C2833"/>
+                </a:solidFill>
+                <a:latin typeface="Arial" pitchFamily="34" charset="0"/>
+                <a:ea typeface="Arial" pitchFamily="34" charset="-122"/>
+                <a:cs typeface="Arial" pitchFamily="34" charset="-120"/>
+              </a:rPr>
+              <a:t> — Where you'll get evidence from (one prior-module cache + one other)</a:t>
+            </a:r>
+            <a:endParaRPr lang="en-US" sz="1200" dirty="0"/>
+          </a:p>
+          <a:p>
+            <a:pPr algn="l" marL="342900" indent="-342900">
+              <a:lnSpc>
+                <a:spcPts val="1620"/>
+              </a:lnSpc>
+              <a:spcAft>
+                <a:spcPts val="300"/>
+              </a:spcAft>
+              <a:buSzPct val="100000"/>
+              <a:buChar char="•"/>
+            </a:pPr>
+            <a:r>
+              <a:rPr lang="en-US" sz="1200" b="1" dirty="0">
+                <a:solidFill>
+                  <a:srgbClr val="1C2833"/>
+                </a:solidFill>
+                <a:latin typeface="Arial" pitchFamily="34" charset="0"/>
+                <a:ea typeface="Arial" pitchFamily="34" charset="-122"/>
+                <a:cs typeface="Arial" pitchFamily="34" charset="-120"/>
+              </a:rPr>
+              <a:t>Artefact format</a:t>
+            </a:r>
+            <a:pPr algn="l" indent="0" marL="0">
+              <a:lnSpc>
+                <a:spcPts val="1620"/>
+              </a:lnSpc>
+              <a:spcAft>
+                <a:spcPts val="300"/>
+              </a:spcAft>
+              <a:buNone/>
+            </a:pPr>
+            <a:r>
+              <a:rPr lang="en-US" sz="1200" dirty="0">
+                <a:solidFill>
+                  <a:srgbClr val="1C2833"/>
+                </a:solidFill>
+                <a:latin typeface="Arial" pitchFamily="34" charset="0"/>
+                <a:ea typeface="Arial" pitchFamily="34" charset="-122"/>
+                <a:cs typeface="Arial" pitchFamily="34" charset="-120"/>
+              </a:rPr>
+              <a:t> — What you'll actually produce (poster / deck / report / etc.)</a:t>
+            </a:r>
+            <a:endParaRPr lang="en-US" sz="1200" dirty="0"/>
+          </a:p>
+          <a:p>
+            <a:pPr algn="l" marL="342900" indent="-342900">
+              <a:lnSpc>
+                <a:spcPts val="1620"/>
+              </a:lnSpc>
+              <a:spcAft>
+                <a:spcPts val="300"/>
+              </a:spcAft>
+              <a:buSzPct val="100000"/>
+              <a:buChar char="•"/>
+            </a:pPr>
+            <a:r>
+              <a:rPr lang="en-US" sz="1200" b="1" dirty="0">
+                <a:solidFill>
+                  <a:srgbClr val="1C2833"/>
+                </a:solidFill>
+                <a:latin typeface="Arial" pitchFamily="34" charset="0"/>
+                <a:ea typeface="Arial" pitchFamily="34" charset="-122"/>
+                <a:cs typeface="Arial" pitchFamily="34" charset="-120"/>
+              </a:rPr>
+              <a:t>Success criteria</a:t>
+            </a:r>
+            <a:pPr algn="l" indent="0" marL="0">
+              <a:lnSpc>
+                <a:spcPts val="1620"/>
+              </a:lnSpc>
+              <a:spcAft>
+                <a:spcPts val="300"/>
+              </a:spcAft>
+              <a:buNone/>
+            </a:pPr>
+            <a:r>
+              <a:rPr lang="en-US" sz="1200" dirty="0">
+                <a:solidFill>
+                  <a:srgbClr val="1C2833"/>
+                </a:solidFill>
+                <a:latin typeface="Arial" pitchFamily="34" charset="0"/>
+                <a:ea typeface="Arial" pitchFamily="34" charset="-122"/>
+                <a:cs typeface="Arial" pitchFamily="34" charset="-120"/>
+              </a:rPr>
+              <a:t> — Three things that, if present in the final, mean it worked</a:t>
+            </a:r>
+            <a:endParaRPr lang="en-US" sz="1200" dirty="0"/>
+          </a:p>
         </p:txBody>
       </p:sp>
       <p:sp>
         <p:nvSpPr>
           <p:cNvPr id="5" name="Text 3"/>
-          <p:cNvSpPr/>
-          <p:nvPr/>
-        </p:nvSpPr>
-        <p:spPr>
-          <a:xfrm>
-            <a:off x="406301" y="1460004"/>
-            <a:ext cx="8498026" cy="436066"/>
-          </a:xfrm>
-          <a:prstGeom prst="rect">
-            <a:avLst/>
-          </a:prstGeom>
-          <a:noFill/>
-          <a:ln/>
-        </p:spPr>
-        <p:txBody>
-          <a:bodyPr wrap="square" lIns="0" tIns="0" rIns="0" bIns="0" rtlCol="0" anchor="t"/>
-          <a:lstStyle/>
-          <a:p>
-            <a:pPr algn="l" indent="0" marL="0">
-              <a:lnSpc>
-                <a:spcPts val="1680"/>
-              </a:lnSpc>
-              <a:spcBef>
-                <a:spcPts val="300"/>
-              </a:spcBef>
-              <a:spcAft>
-                <a:spcPts val="300"/>
-              </a:spcAft>
-              <a:buNone/>
-            </a:pPr>
-            <a:r>
-              <a:rPr lang="en-US" sz="1200" dirty="0">
-                <a:solidFill>
-                  <a:srgbClr val="1C2833"/>
-                </a:solidFill>
-                <a:latin typeface="Arial" pitchFamily="34" charset="0"/>
-                <a:ea typeface="Arial" pitchFamily="34" charset="-122"/>
-                <a:cs typeface="Arial" pitchFamily="34" charset="-120"/>
-              </a:rPr>
-              <a:t>– Journal entry: "Today I chose ___ . The hardest part of the plan was ___ ." – Preview: </a:t>
-            </a:r>
-            <a:pPr algn="l" indent="0" marL="0">
-              <a:lnSpc>
-                <a:spcPts val="1680"/>
-              </a:lnSpc>
-              <a:spcBef>
-                <a:spcPts val="300"/>
-              </a:spcBef>
-              <a:spcAft>
-                <a:spcPts val="300"/>
-              </a:spcAft>
-              <a:buNone/>
-            </a:pPr>
-            <a:r>
-              <a:rPr lang="en-US" sz="1200" i="1" dirty="0">
-                <a:solidFill>
-                  <a:srgbClr val="1C2833"/>
-                </a:solidFill>
-                <a:latin typeface="Arial" pitchFamily="34" charset="0"/>
-                <a:ea typeface="Arial" pitchFamily="34" charset="-122"/>
-                <a:cs typeface="Arial" pitchFamily="34" charset="-120"/>
-              </a:rPr>
-              <a:t>"Tomorrow you start research. Bring your anchor module's </a:t>
-            </a:r>
-            <a:pPr algn="l" indent="0" marL="0">
-              <a:lnSpc>
-                <a:spcPts val="1680"/>
-              </a:lnSpc>
-              <a:spcBef>
-                <a:spcPts val="300"/>
-              </a:spcBef>
-              <a:spcAft>
-                <a:spcPts val="300"/>
-              </a:spcAft>
-              <a:buNone/>
-            </a:pPr>
-            <a:r>
-              <a:rPr lang="en-US" sz="1200" i="1" dirty="0">
-                <a:solidFill>
-                  <a:srgbClr val="1C2833"/>
-                </a:solidFill>
-                <a:latin typeface="Arial" pitchFamily="34" charset="0"/>
-                <a:ea typeface="Arial" pitchFamily="34" charset="-122"/>
-                <a:cs typeface="Arial" pitchFamily="34" charset="-120"/>
-              </a:rPr>
-              <a:t>sources.md</a:t>
-            </a:r>
-            <a:pPr algn="l" indent="0" marL="0">
-              <a:lnSpc>
-                <a:spcPts val="1680"/>
-              </a:lnSpc>
-              <a:spcBef>
-                <a:spcPts val="300"/>
-              </a:spcBef>
-              <a:spcAft>
-                <a:spcPts val="300"/>
-              </a:spcAft>
-              <a:buNone/>
-            </a:pPr>
-            <a:r>
-              <a:rPr lang="en-US" sz="1200" i="1" dirty="0">
-                <a:solidFill>
-                  <a:srgbClr val="1C2833"/>
-                </a:solidFill>
-                <a:latin typeface="Arial" pitchFamily="34" charset="0"/>
-                <a:ea typeface="Arial" pitchFamily="34" charset="-122"/>
-                <a:cs typeface="Arial" pitchFamily="34" charset="-120"/>
-              </a:rPr>
-              <a:t> printout, and your notebook."</a:t>
-            </a:r>
-            <a:endParaRPr lang="en-US" sz="1200" dirty="0"/>
-          </a:p>
-        </p:txBody>
-      </p:sp>
-      <p:sp>
-        <p:nvSpPr>
-          <p:cNvPr id="6" name="Text 4"/>
           <p:cNvSpPr/>
           <p:nvPr/>
         </p:nvSpPr>
@@ -5567,7 +7284,7 @@
                 <a:ea typeface="Georgia" pitchFamily="34" charset="-122"/>
                 <a:cs typeface="Georgia" pitchFamily="34" charset="-120"/>
               </a:rPr>
-              <a:t>Student-facing content</a:t>
+              <a:t>Core (15 min) (cont.)</a:t>
             </a:r>
             <a:endParaRPr lang="en-US" sz="1800" dirty="0"/>
           </a:p>
@@ -5581,61 +7298,74 @@
         </p:nvSpPr>
         <p:spPr>
           <a:xfrm>
-            <a:off x="406301" y="883593"/>
-            <a:ext cx="8331398" cy="1881187"/>
-          </a:xfrm>
-          <a:prstGeom prst="rect">
-            <a:avLst/>
-          </a:prstGeom>
-          <a:solidFill>
-            <a:srgbClr val="F4F8F9"/>
-          </a:solidFill>
+            <a:off x="634901" y="883593"/>
+            <a:ext cx="8102798" cy="281880"/>
+          </a:xfrm>
+          <a:prstGeom prst="rect">
+            <a:avLst/>
+          </a:prstGeom>
+          <a:noFill/>
           <a:ln/>
         </p:spPr>
         <p:txBody>
-          <a:bodyPr wrap="square" rtlCol="0" anchor="ctr"/>
-          <a:lstStyle/>
-          <a:p>
-            <a:pPr indent="0" marL="0">
-              <a:buNone/>
-            </a:pPr>
-            <a:endParaRPr lang="en-US" dirty="0"/>
-          </a:p>
-        </p:txBody>
-      </p:sp>
-      <p:sp>
-        <p:nvSpPr>
-          <p:cNvPr id="5" name="Shape 3"/>
+          <a:bodyPr wrap="square" lIns="0" tIns="0" rIns="0" bIns="0" rtlCol="0" anchor="t"/>
+          <a:lstStyle/>
+          <a:p>
+            <a:pPr algn="l" marL="342900" indent="-342900">
+              <a:lnSpc>
+                <a:spcPts val="1620"/>
+              </a:lnSpc>
+              <a:spcAft>
+                <a:spcPts val="300"/>
+              </a:spcAft>
+              <a:buSzPct val="100000"/>
+              <a:buChar char="•"/>
+            </a:pPr>
+            <a:r>
+              <a:rPr lang="en-US" sz="1200" b="1" dirty="0">
+                <a:solidFill>
+                  <a:srgbClr val="1C2833"/>
+                </a:solidFill>
+                <a:latin typeface="Arial" pitchFamily="34" charset="0"/>
+                <a:ea typeface="Arial" pitchFamily="34" charset="-122"/>
+                <a:cs typeface="Arial" pitchFamily="34" charset="-120"/>
+              </a:rPr>
+              <a:t>Materials needed</a:t>
+            </a:r>
+            <a:pPr algn="l" indent="0" marL="0">
+              <a:lnSpc>
+                <a:spcPts val="1620"/>
+              </a:lnSpc>
+              <a:spcAft>
+                <a:spcPts val="300"/>
+              </a:spcAft>
+              <a:buNone/>
+            </a:pPr>
+            <a:r>
+              <a:rPr lang="en-US" sz="1200" dirty="0">
+                <a:solidFill>
+                  <a:srgbClr val="1C2833"/>
+                </a:solidFill>
+                <a:latin typeface="Arial" pitchFamily="34" charset="0"/>
+                <a:ea typeface="Arial" pitchFamily="34" charset="-122"/>
+                <a:cs typeface="Arial" pitchFamily="34" charset="-120"/>
+              </a:rPr>
+              <a:t> — What you need to bring or have stocked</a:t>
+            </a:r>
+            <a:endParaRPr lang="en-US" sz="1200" dirty="0"/>
+          </a:p>
+        </p:txBody>
+      </p:sp>
+      <p:sp>
+        <p:nvSpPr>
+          <p:cNvPr id="5" name="Text 3"/>
           <p:cNvSpPr/>
           <p:nvPr/>
         </p:nvSpPr>
         <p:spPr>
           <a:xfrm>
-            <a:off x="434876" y="883593"/>
-            <a:ext cx="0" cy="1881187"/>
-          </a:xfrm>
-          <a:prstGeom prst="line">
-            <a:avLst/>
-          </a:prstGeom>
-          <a:noFill/>
-          <a:ln w="57150">
-            <a:solidFill>
-              <a:srgbClr val="FE4447"/>
-            </a:solidFill>
-            <a:prstDash val="solid"/>
-          </a:ln>
-        </p:spPr>
-      </p:sp>
-      <p:sp>
-        <p:nvSpPr>
-          <p:cNvPr id="6" name="Text 4"/>
-          <p:cNvSpPr/>
-          <p:nvPr/>
-        </p:nvSpPr>
-        <p:spPr>
-          <a:xfrm>
-            <a:off x="692051" y="1074093"/>
-            <a:ext cx="7973389" cy="230981"/>
+            <a:off x="634901" y="1266974"/>
+            <a:ext cx="8102798" cy="281880"/>
           </a:xfrm>
           <a:prstGeom prst="rect">
             <a:avLst/>
@@ -5647,203 +7377,54 @@
           <a:bodyPr wrap="square" lIns="0" tIns="0" rIns="0" bIns="0" rtlCol="0" anchor="t"/>
           <a:lstStyle/>
           <a:p>
-            <a:pPr algn="l" indent="0" marL="0">
-              <a:lnSpc>
-                <a:spcPts val="1820"/>
-              </a:lnSpc>
-              <a:spcBef>
-                <a:spcPts val="300"/>
-              </a:spcBef>
-              <a:spcAft>
-                <a:spcPts val="300"/>
-              </a:spcAft>
-              <a:buNone/>
-            </a:pPr>
-            <a:r>
-              <a:rPr lang="en-US" sz="1300" b="1" i="1" dirty="0">
-                <a:solidFill>
-                  <a:srgbClr val="1C2833"/>
-                </a:solidFill>
-                <a:latin typeface="Georgia" pitchFamily="34" charset="0"/>
-                <a:ea typeface="Georgia" pitchFamily="34" charset="-122"/>
-                <a:cs typeface="Georgia" pitchFamily="34" charset="-120"/>
-              </a:rPr>
-              <a:t>A project without a plan is a hope.</a:t>
-            </a:r>
-            <a:endParaRPr lang="en-US" sz="1300" dirty="0"/>
-          </a:p>
-        </p:txBody>
-      </p:sp>
-      <p:sp>
-        <p:nvSpPr>
-          <p:cNvPr id="7" name="Text 5"/>
-          <p:cNvSpPr/>
-          <p:nvPr/>
-        </p:nvSpPr>
-        <p:spPr>
-          <a:xfrm>
-            <a:off x="692051" y="1343174"/>
-            <a:ext cx="7973389" cy="230981"/>
-          </a:xfrm>
-          <a:prstGeom prst="rect">
-            <a:avLst/>
-          </a:prstGeom>
-          <a:noFill/>
-          <a:ln/>
-        </p:spPr>
-        <p:txBody>
-          <a:bodyPr wrap="square" lIns="0" tIns="0" rIns="0" bIns="0" rtlCol="0" anchor="t"/>
-          <a:lstStyle/>
-          <a:p>
-            <a:pPr algn="l" indent="0" marL="0">
-              <a:lnSpc>
-                <a:spcPts val="1820"/>
-              </a:lnSpc>
-              <a:spcBef>
-                <a:spcPts val="300"/>
-              </a:spcBef>
-              <a:spcAft>
-                <a:spcPts val="300"/>
-              </a:spcAft>
-              <a:buNone/>
-            </a:pPr>
-            <a:r>
-              <a:rPr lang="en-US" sz="1300" i="1" dirty="0">
-                <a:solidFill>
-                  <a:srgbClr val="1C2833"/>
-                </a:solidFill>
-                <a:latin typeface="Georgia" pitchFamily="34" charset="0"/>
-                <a:ea typeface="Georgia" pitchFamily="34" charset="-122"/>
-                <a:cs typeface="Georgia" pitchFamily="34" charset="-120"/>
-              </a:rPr>
-              <a:t>Today you write the plan. Six fields. One page. Submit before you leave.</a:t>
-            </a:r>
-            <a:endParaRPr lang="en-US" sz="1300" dirty="0"/>
-          </a:p>
-        </p:txBody>
-      </p:sp>
-      <p:sp>
-        <p:nvSpPr>
-          <p:cNvPr id="8" name="Text 6"/>
-          <p:cNvSpPr/>
-          <p:nvPr/>
-        </p:nvSpPr>
-        <p:spPr>
-          <a:xfrm>
-            <a:off x="692051" y="1612255"/>
-            <a:ext cx="7973389" cy="692944"/>
-          </a:xfrm>
-          <a:prstGeom prst="rect">
-            <a:avLst/>
-          </a:prstGeom>
-          <a:noFill/>
-          <a:ln/>
-        </p:spPr>
-        <p:txBody>
-          <a:bodyPr wrap="square" lIns="0" tIns="0" rIns="0" bIns="0" rtlCol="0" anchor="t"/>
-          <a:lstStyle/>
-          <a:p>
-            <a:pPr algn="l" indent="0" marL="0">
-              <a:lnSpc>
-                <a:spcPts val="1820"/>
-              </a:lnSpc>
-              <a:spcBef>
-                <a:spcPts val="300"/>
-              </a:spcBef>
-              <a:spcAft>
-                <a:spcPts val="300"/>
-              </a:spcAft>
-              <a:buNone/>
-            </a:pPr>
-            <a:r>
-              <a:rPr lang="en-US" sz="1300" i="1" dirty="0">
-                <a:solidFill>
-                  <a:srgbClr val="1C2833"/>
-                </a:solidFill>
-                <a:latin typeface="Georgia" pitchFamily="34" charset="0"/>
-                <a:ea typeface="Georgia" pitchFamily="34" charset="-122"/>
-                <a:cs typeface="Georgia" pitchFamily="34" charset="-120"/>
-              </a:rPr>
-              <a:t>| Field | Your answer | |-------|-------------| | Project chosen | | | Anchor module | | | Driving question (1 sentence) | | | Two candidate sources | | | Artefact format | | | Success criteria (3 bullets) | | | Materials needed | |</a:t>
-            </a:r>
-            <a:endParaRPr lang="en-US" sz="1300" dirty="0"/>
-          </a:p>
-        </p:txBody>
-      </p:sp>
-      <p:sp>
-        <p:nvSpPr>
-          <p:cNvPr id="9" name="Text 7"/>
-          <p:cNvSpPr/>
-          <p:nvPr/>
-        </p:nvSpPr>
-        <p:spPr>
-          <a:xfrm>
-            <a:off x="692051" y="2343299"/>
-            <a:ext cx="7973389" cy="230981"/>
-          </a:xfrm>
-          <a:prstGeom prst="rect">
-            <a:avLst/>
-          </a:prstGeom>
-          <a:noFill/>
-          <a:ln/>
-        </p:spPr>
-        <p:txBody>
-          <a:bodyPr wrap="square" lIns="0" tIns="0" rIns="0" bIns="0" rtlCol="0" anchor="t"/>
-          <a:lstStyle/>
-          <a:p>
-            <a:pPr algn="l" indent="0" marL="0">
-              <a:lnSpc>
-                <a:spcPts val="1820"/>
-              </a:lnSpc>
-              <a:spcBef>
-                <a:spcPts val="300"/>
-              </a:spcBef>
-              <a:spcAft>
-                <a:spcPts val="300"/>
-              </a:spcAft>
-              <a:buNone/>
-            </a:pPr>
-            <a:r>
-              <a:rPr lang="en-US" sz="1300" b="1" i="1" dirty="0">
-                <a:solidFill>
-                  <a:srgbClr val="1C2833"/>
-                </a:solidFill>
-                <a:latin typeface="Georgia" pitchFamily="34" charset="0"/>
-                <a:ea typeface="Georgia" pitchFamily="34" charset="-122"/>
-                <a:cs typeface="Georgia" pitchFamily="34" charset="-120"/>
-              </a:rPr>
-              <a:t>Cut, don't pad.</a:t>
-            </a:r>
-            <a:pPr algn="l" indent="0" marL="0">
-              <a:lnSpc>
-                <a:spcPts val="1820"/>
-              </a:lnSpc>
-              <a:spcBef>
-                <a:spcPts val="300"/>
-              </a:spcBef>
-              <a:spcAft>
-                <a:spcPts val="300"/>
-              </a:spcAft>
-              <a:buNone/>
-            </a:pPr>
-            <a:r>
-              <a:rPr lang="en-US" sz="1300" dirty="0">
-                <a:solidFill>
-                  <a:srgbClr val="1C2833"/>
-                </a:solidFill>
-                <a:latin typeface="Georgia" pitchFamily="34" charset="0"/>
-                <a:ea typeface="Georgia" pitchFamily="34" charset="-122"/>
-                <a:cs typeface="Georgia" pitchFamily="34" charset="-120"/>
-              </a:rPr>
-              <a:t> A small finished project is better than a large unfinished one.</a:t>
-            </a:r>
-            <a:endParaRPr lang="en-US" sz="1300" dirty="0"/>
-          </a:p>
-        </p:txBody>
-      </p:sp>
-      <p:sp>
-        <p:nvSpPr>
-          <p:cNvPr id="10" name="Text 8"/>
+            <a:pPr algn="l" marL="342900" indent="-342900">
+              <a:lnSpc>
+                <a:spcPts val="1620"/>
+              </a:lnSpc>
+              <a:spcAft>
+                <a:spcPts val="300"/>
+              </a:spcAft>
+              <a:buSzPct val="100000"/>
+              <a:buChar char="•"/>
+            </a:pPr>
+            <a:r>
+              <a:rPr lang="en-US" sz="1200" b="1" dirty="0">
+                <a:solidFill>
+                  <a:srgbClr val="1C2833"/>
+                </a:solidFill>
+                <a:latin typeface="Arial" pitchFamily="34" charset="0"/>
+                <a:ea typeface="Arial" pitchFamily="34" charset="-122"/>
+                <a:cs typeface="Arial" pitchFamily="34" charset="-120"/>
+              </a:rPr>
+              <a:t>A worked example on the board.</a:t>
+            </a:r>
+            <a:pPr algn="l" indent="0" marL="0">
+              <a:lnSpc>
+                <a:spcPts val="1620"/>
+              </a:lnSpc>
+              <a:spcAft>
+                <a:spcPts val="300"/>
+              </a:spcAft>
+              <a:buNone/>
+            </a:pPr>
+            <a:r>
+              <a:rPr lang="en-US" sz="1200" dirty="0">
+                <a:solidFill>
+                  <a:srgbClr val="1C2833"/>
+                </a:solidFill>
+                <a:latin typeface="Arial" pitchFamily="34" charset="0"/>
+                <a:ea typeface="Arial" pitchFamily="34" charset="-122"/>
+                <a:cs typeface="Arial" pitchFamily="34" charset="-120"/>
+              </a:rPr>
+              <a:t> Take one project (e.g. Project 4 — herb deck) and fill in each field aloud:</a:t>
+            </a:r>
+            <a:endParaRPr lang="en-US" sz="1200" dirty="0"/>
+          </a:p>
+        </p:txBody>
+      </p:sp>
+      <p:sp>
+        <p:nvSpPr>
+          <p:cNvPr id="6" name="Text 4"/>
           <p:cNvSpPr/>
           <p:nvPr/>
         </p:nvSpPr>
@@ -5993,7 +7574,7 @@
                 <a:ea typeface="Georgia" pitchFamily="34" charset="-122"/>
                 <a:cs typeface="Georgia" pitchFamily="34" charset="-120"/>
               </a:rPr>
-              <a:t>Homework</a:t>
+              <a:t>Core (15 min) (cont.)</a:t>
             </a:r>
             <a:endParaRPr lang="en-US" sz="1800" dirty="0"/>
           </a:p>
@@ -6007,8 +7588,8 @@
         </p:nvSpPr>
         <p:spPr>
           <a:xfrm>
-            <a:off x="406301" y="870942"/>
-            <a:ext cx="8498026" cy="436066"/>
+            <a:off x="634901" y="883593"/>
+            <a:ext cx="8102798" cy="1481733"/>
           </a:xfrm>
           <a:prstGeom prst="rect">
             <a:avLst/>
@@ -6020,17 +7601,15 @@
           <a:bodyPr wrap="square" lIns="0" tIns="0" rIns="0" bIns="0" rtlCol="0" anchor="t"/>
           <a:lstStyle/>
           <a:p>
-            <a:pPr algn="l" indent="0" marL="0">
-              <a:lnSpc>
-                <a:spcPts val="1680"/>
-              </a:lnSpc>
-              <a:spcBef>
-                <a:spcPts val="300"/>
-              </a:spcBef>
-              <a:spcAft>
-                <a:spcPts val="300"/>
-              </a:spcAft>
-              <a:buNone/>
+            <a:pPr algn="l" marL="342900" indent="-342900">
+              <a:lnSpc>
+                <a:spcPts val="1620"/>
+              </a:lnSpc>
+              <a:spcAft>
+                <a:spcPts val="300"/>
+              </a:spcAft>
+              <a:buSzPct val="100000"/>
+              <a:buChar char="•"/>
             </a:pPr>
             <a:r>
               <a:rPr lang="en-US" sz="1200" dirty="0">
@@ -6041,19 +7620,20 @@
                 <a:ea typeface="Arial" pitchFamily="34" charset="-122"/>
                 <a:cs typeface="Arial" pitchFamily="34" charset="-120"/>
               </a:rPr>
-              <a:t>– Locate your anchor module's </a:t>
-            </a:r>
-            <a:pPr algn="l" indent="0" marL="0">
-              <a:lnSpc>
-                <a:spcPts val="1680"/>
-              </a:lnSpc>
-              <a:spcBef>
-                <a:spcPts val="300"/>
-              </a:spcBef>
-              <a:spcAft>
-                <a:spcPts val="300"/>
-              </a:spcAft>
-              <a:buNone/>
+              <a:t>Project chosen: Herb deck (10 herbs from my neighbourhood).</a:t>
+            </a:r>
+            <a:endParaRPr lang="en-US" sz="1200" dirty="0"/>
+          </a:p>
+          <a:p>
+            <a:pPr algn="l" marL="342900" indent="-342900">
+              <a:lnSpc>
+                <a:spcPts val="1620"/>
+              </a:lnSpc>
+              <a:spcAft>
+                <a:spcPts val="300"/>
+              </a:spcAft>
+              <a:buSzPct val="100000"/>
+              <a:buChar char="•"/>
             </a:pPr>
             <a:r>
               <a:rPr lang="en-US" sz="1200" dirty="0">
@@ -6064,19 +7644,20 @@
                 <a:ea typeface="Arial" pitchFamily="34" charset="-122"/>
                 <a:cs typeface="Arial" pitchFamily="34" charset="-120"/>
               </a:rPr>
-              <a:t>sources.md</a:t>
-            </a:r>
-            <a:pPr algn="l" indent="0" marL="0">
-              <a:lnSpc>
-                <a:spcPts val="1680"/>
-              </a:lnSpc>
-              <a:spcBef>
-                <a:spcPts val="300"/>
-              </a:spcBef>
-              <a:spcAft>
-                <a:spcPts val="300"/>
-              </a:spcAft>
-              <a:buNone/>
+              <a:t>Anchor module: Module 10 — Auṣadhi.</a:t>
+            </a:r>
+            <a:endParaRPr lang="en-US" sz="1200" dirty="0"/>
+          </a:p>
+          <a:p>
+            <a:pPr algn="l" marL="342900" indent="-342900">
+              <a:lnSpc>
+                <a:spcPts val="1620"/>
+              </a:lnSpc>
+              <a:spcAft>
+                <a:spcPts val="300"/>
+              </a:spcAft>
+              <a:buSzPct val="100000"/>
+              <a:buChar char="•"/>
             </a:pPr>
             <a:r>
               <a:rPr lang="en-US" sz="1200" dirty="0">
@@ -6087,7 +7668,155 @@
                 <a:ea typeface="Arial" pitchFamily="34" charset="-122"/>
                 <a:cs typeface="Arial" pitchFamily="34" charset="-120"/>
               </a:rPr>
-              <a:t> and read it. Tag one source you'll definitely use. – Bring all materials you have at home to class on Day 3. – If you forgot to submit your plan today, slide it under the staff-room door this evening.</a:t>
+              <a:t>Driving question: </a:t>
+            </a:r>
+            <a:pPr algn="l" indent="0" marL="0">
+              <a:lnSpc>
+                <a:spcPts val="1620"/>
+              </a:lnSpc>
+              <a:spcAft>
+                <a:spcPts val="300"/>
+              </a:spcAft>
+              <a:buNone/>
+            </a:pPr>
+            <a:r>
+              <a:rPr lang="en-US" sz="1200" i="1" dirty="0">
+                <a:solidFill>
+                  <a:srgbClr val="1C2833"/>
+                </a:solidFill>
+                <a:latin typeface="Arial" pitchFamily="34" charset="0"/>
+                <a:ea typeface="Arial" pitchFamily="34" charset="-122"/>
+                <a:cs typeface="Arial" pitchFamily="34" charset="-120"/>
+              </a:rPr>
+              <a:t>Which 10 herbs grow within 200 m of my home, and what does the tradition say about each?</a:t>
+            </a:r>
+            <a:endParaRPr lang="en-US" sz="1200" dirty="0"/>
+          </a:p>
+          <a:p>
+            <a:pPr algn="l" marL="342900" indent="-342900">
+              <a:lnSpc>
+                <a:spcPts val="1620"/>
+              </a:lnSpc>
+              <a:spcAft>
+                <a:spcPts val="300"/>
+              </a:spcAft>
+              <a:buSzPct val="100000"/>
+              <a:buChar char="•"/>
+            </a:pPr>
+            <a:r>
+              <a:rPr lang="en-US" sz="1200" dirty="0">
+                <a:solidFill>
+                  <a:srgbClr val="1C2833"/>
+                </a:solidFill>
+                <a:latin typeface="Arial" pitchFamily="34" charset="0"/>
+                <a:ea typeface="Arial" pitchFamily="34" charset="-122"/>
+                <a:cs typeface="Arial" pitchFamily="34" charset="-120"/>
+              </a:rPr>
+              <a:t>Two candidate sources: Module 10's </a:t>
+            </a:r>
+            <a:pPr algn="l" indent="0" marL="0">
+              <a:lnSpc>
+                <a:spcPts val="1620"/>
+              </a:lnSpc>
+              <a:spcAft>
+                <a:spcPts val="300"/>
+              </a:spcAft>
+              <a:buNone/>
+            </a:pPr>
+            <a:r>
+              <a:rPr lang="en-US" sz="1200" dirty="0">
+                <a:solidFill>
+                  <a:srgbClr val="1C2833"/>
+                </a:solidFill>
+                <a:latin typeface="Arial" pitchFamily="34" charset="0"/>
+                <a:ea typeface="Arial" pitchFamily="34" charset="-122"/>
+                <a:cs typeface="Arial" pitchFamily="34" charset="-120"/>
+              </a:rPr>
+              <a:t>.rag-cache/</a:t>
+            </a:r>
+            <a:pPr algn="l" indent="0" marL="0">
+              <a:lnSpc>
+                <a:spcPts val="1620"/>
+              </a:lnSpc>
+              <a:spcAft>
+                <a:spcPts val="300"/>
+              </a:spcAft>
+              <a:buNone/>
+            </a:pPr>
+            <a:r>
+              <a:rPr lang="en-US" sz="1200" dirty="0">
+                <a:solidFill>
+                  <a:srgbClr val="1C2833"/>
+                </a:solidFill>
+                <a:latin typeface="Arial" pitchFamily="34" charset="0"/>
+                <a:ea typeface="Arial" pitchFamily="34" charset="-122"/>
+                <a:cs typeface="Arial" pitchFamily="34" charset="-120"/>
+              </a:rPr>
+              <a:t> (for Ayurvedic uses); Pradip Krishen's </a:t>
+            </a:r>
+            <a:pPr algn="l" indent="0" marL="0">
+              <a:lnSpc>
+                <a:spcPts val="1620"/>
+              </a:lnSpc>
+              <a:spcAft>
+                <a:spcPts val="300"/>
+              </a:spcAft>
+              <a:buNone/>
+            </a:pPr>
+            <a:r>
+              <a:rPr lang="en-US" sz="1200" i="1" dirty="0">
+                <a:solidFill>
+                  <a:srgbClr val="1C2833"/>
+                </a:solidFill>
+                <a:latin typeface="Arial" pitchFamily="34" charset="0"/>
+                <a:ea typeface="Arial" pitchFamily="34" charset="-122"/>
+                <a:cs typeface="Arial" pitchFamily="34" charset="-120"/>
+              </a:rPr>
+              <a:t>Trees of Delhi</a:t>
+            </a:r>
+            <a:pPr algn="l" indent="0" marL="0">
+              <a:lnSpc>
+                <a:spcPts val="1620"/>
+              </a:lnSpc>
+              <a:spcAft>
+                <a:spcPts val="300"/>
+              </a:spcAft>
+              <a:buNone/>
+            </a:pPr>
+            <a:r>
+              <a:rPr lang="en-US" sz="1200" dirty="0">
+                <a:solidFill>
+                  <a:srgbClr val="1C2833"/>
+                </a:solidFill>
+                <a:latin typeface="Arial" pitchFamily="34" charset="0"/>
+                <a:ea typeface="Arial" pitchFamily="34" charset="-122"/>
+                <a:cs typeface="Arial" pitchFamily="34" charset="-120"/>
+              </a:rPr>
+              <a:t> for identification (or a state forest-department field guide for your region).</a:t>
+            </a:r>
+            <a:endParaRPr lang="en-US" sz="1200" dirty="0"/>
+          </a:p>
+          <a:p>
+            <a:pPr algn="l" marL="342900" indent="-342900">
+              <a:lnSpc>
+                <a:spcPts val="1620"/>
+              </a:lnSpc>
+              <a:spcAft>
+                <a:spcPts val="300"/>
+              </a:spcAft>
+              <a:buSzPct val="100000"/>
+              <a:buChar char="•"/>
+            </a:pPr>
+            <a:r>
+              <a:rPr lang="en-US" sz="1200" dirty="0">
+                <a:solidFill>
+                  <a:srgbClr val="1C2833"/>
+                </a:solidFill>
+                <a:latin typeface="Arial" pitchFamily="34" charset="0"/>
+                <a:ea typeface="Arial" pitchFamily="34" charset="-122"/>
+                <a:cs typeface="Arial" pitchFamily="34" charset="-120"/>
+              </a:rPr>
+              <a:t>Artefact format: 10 cards (postcard size), front = photo + sketch, back = Sanskrit name + English + use + part used.</a:t>
             </a:r>
             <a:endParaRPr lang="en-US" sz="1200" dirty="0"/>
           </a:p>
